--- a/bitcoin_decomposition.pptx
+++ b/bitcoin_decomposition.pptx
@@ -41,6 +41,9 @@
     <p:sldId id="289" r:id="rId40"/>
     <p:sldId id="290" r:id="rId41"/>
     <p:sldId id="291" r:id="rId42"/>
+    <p:sldId id="292" r:id="rId43"/>
+    <p:sldId id="293" r:id="rId44"/>
+    <p:sldId id="294" r:id="rId45"/>
   </p:sldIdLst>
   <p:sldSz cx="12191695" cy="6858000" type="screen4x3"/>
   <p:notesSz cx="6858000" cy="9144000"/>
@@ -12099,6 +12102,60 @@
 </p:sld>
 </file>
 
+<file path=ppt/slides/slide37.xml><?xml version="1.0" encoding="utf-8"?>
+<p:sld xmlns:a="http://schemas.openxmlformats.org/drawingml/2006/main" xmlns:p="http://schemas.openxmlformats.org/presentationml/2006/main" xmlns:r="http://schemas.openxmlformats.org/officeDocument/2006/relationships">
+  <p:cSld>
+    <p:spTree>
+      <p:nvGrpSpPr>
+        <p:cNvPr id="1" name=""/>
+        <p:cNvGrpSpPr/>
+        <p:nvPr/>
+      </p:nvGrpSpPr>
+      <p:grpSpPr/>
+    </p:spTree>
+  </p:cSld>
+  <p:clrMapOvr>
+    <a:masterClrMapping/>
+  </p:clrMapOvr>
+</p:sld>
+</file>
+
+<file path=ppt/slides/slide38.xml><?xml version="1.0" encoding="utf-8"?>
+<p:sld xmlns:a="http://schemas.openxmlformats.org/drawingml/2006/main" xmlns:p="http://schemas.openxmlformats.org/presentationml/2006/main" xmlns:r="http://schemas.openxmlformats.org/officeDocument/2006/relationships">
+  <p:cSld>
+    <p:spTree>
+      <p:nvGrpSpPr>
+        <p:cNvPr id="1" name=""/>
+        <p:cNvGrpSpPr/>
+        <p:nvPr/>
+      </p:nvGrpSpPr>
+      <p:grpSpPr/>
+    </p:spTree>
+  </p:cSld>
+  <p:clrMapOvr>
+    <a:masterClrMapping/>
+  </p:clrMapOvr>
+</p:sld>
+</file>
+
+<file path=ppt/slides/slide39.xml><?xml version="1.0" encoding="utf-8"?>
+<p:sld xmlns:a="http://schemas.openxmlformats.org/drawingml/2006/main" xmlns:p="http://schemas.openxmlformats.org/presentationml/2006/main" xmlns:r="http://schemas.openxmlformats.org/officeDocument/2006/relationships">
+  <p:cSld>
+    <p:spTree>
+      <p:nvGrpSpPr>
+        <p:cNvPr id="1" name=""/>
+        <p:cNvGrpSpPr/>
+        <p:nvPr/>
+      </p:nvGrpSpPr>
+      <p:grpSpPr/>
+    </p:spTree>
+  </p:cSld>
+  <p:clrMapOvr>
+    <a:masterClrMapping/>
+  </p:clrMapOvr>
+</p:sld>
+</file>
+
 <file path=ppt/slides/slide4.xml><?xml version="1.0" encoding="utf-8"?>
 <p:sld xmlns:a="http://schemas.openxmlformats.org/drawingml/2006/main" xmlns:p="http://schemas.openxmlformats.org/presentationml/2006/main" xmlns:r="http://schemas.openxmlformats.org/officeDocument/2006/relationships">
   <p:cSld>

--- a/bitcoin_decomposition.pptx
+++ b/bitcoin_decomposition.pptx
@@ -44,6 +44,7 @@
     <p:sldId id="292" r:id="rId43"/>
     <p:sldId id="293" r:id="rId44"/>
     <p:sldId id="294" r:id="rId45"/>
+    <p:sldId id="295" r:id="rId46"/>
   </p:sldIdLst>
   <p:sldSz cx="12191695" cy="6858000" type="screen4x3"/>
   <p:notesSz cx="6858000" cy="9144000"/>
@@ -12517,6 +12518,24 @@
 </p:sld>
 </file>
 
+<file path=ppt/slides/slide40.xml><?xml version="1.0" encoding="utf-8"?>
+<p:sld xmlns:a="http://schemas.openxmlformats.org/drawingml/2006/main" xmlns:p="http://schemas.openxmlformats.org/presentationml/2006/main" xmlns:r="http://schemas.openxmlformats.org/officeDocument/2006/relationships">
+  <p:cSld>
+    <p:spTree>
+      <p:nvGrpSpPr>
+        <p:cNvPr id="1" name=""/>
+        <p:cNvGrpSpPr/>
+        <p:nvPr/>
+      </p:nvGrpSpPr>
+      <p:grpSpPr/>
+    </p:spTree>
+  </p:cSld>
+  <p:clrMapOvr>
+    <a:masterClrMapping/>
+  </p:clrMapOvr>
+</p:sld>
+</file>
+
 <file path=ppt/slides/slide5.xml><?xml version="1.0" encoding="utf-8"?>
 <p:sld xmlns:a="http://schemas.openxmlformats.org/drawingml/2006/main" xmlns:p="http://schemas.openxmlformats.org/presentationml/2006/main" xmlns:r="http://schemas.openxmlformats.org/officeDocument/2006/relationships">
   <p:cSld>

--- a/bitcoin_decomposition.pptx
+++ b/bitcoin_decomposition.pptx
@@ -15,6 +15,8 @@
     <p:sldId id="273" r:id="rId24"/>
     <p:sldId id="274" r:id="rId25"/>
     <p:sldId id="276" r:id="rId27"/>
+    <p:sldId id="296" r:id="rId47"/>
+    <p:sldId id="297" r:id="rId48"/>
     <p:sldId id="277" r:id="rId28"/>
     <p:sldId id="278" r:id="rId29"/>
     <p:sldId id="275" r:id="rId26"/>
@@ -3394,7 +3396,7 @@
               </a:defRPr>
             </a:pPr>
             <a:r>
-              <a:t>Seven Independent Lines of Evidence → July 2009</a:t>
+              <a:t>Eight Independent Lines of Evidence → July 2009</a:t>
             </a:r>
           </a:p>
         </p:txBody>
@@ -3671,7 +3673,7 @@
               </a:defRPr>
             </a:pPr>
             <a:r>
-              <a:t>All seven methods converge on June-August 2009 — no economic transactions at this time</a:t>
+              <a:t>All eight methods converge on June-August 2009 — no economic transactions at this time</a:t>
             </a:r>
           </a:p>
         </p:txBody>
@@ -3687,14 +3689,6 @@
 <file path=ppt/slides/slide11.xml><?xml version="1.0" encoding="utf-8"?>
 <p:sld xmlns:a="http://schemas.openxmlformats.org/drawingml/2006/main" xmlns:p="http://schemas.openxmlformats.org/presentationml/2006/main" xmlns:r="http://schemas.openxmlformats.org/officeDocument/2006/relationships">
   <p:cSld>
-    <p:bg>
-      <p:bgPr>
-        <a:solidFill>
-          <a:srgbClr val="1A1A2E"/>
-        </a:solidFill>
-        <a:effectLst/>
-      </p:bgPr>
-    </p:bg>
     <p:spTree>
       <p:nvGrpSpPr>
         <p:cNvPr id="1" name=""/>
@@ -3704,7 +3698,7 @@
       <p:grpSpPr/>
       <p:sp>
         <p:nvSpPr>
-          <p:cNvPr id="2" name="Rectangle 1"/>
+          <p:cNvPr id="2" name="HeaderRect"/>
           <p:cNvSpPr/>
           <p:nvPr/>
         </p:nvSpPr>
@@ -3767,30 +3761,51 @@
           </a:bodyPr>
           <a:lstStyle/>
           <a:p>
-            <a:pPr algn="l">
-              <a:defRPr sz="2800" b="1">
-                <a:solidFill>
-                  <a:srgbClr val="F7931A"/>
-                </a:solidFill>
-                <a:latin typeface="Calibri"/>
-              </a:defRPr>
-            </a:pPr>
-            <a:r>
-              <a:t>Floor-to-Peaks: The Power Law Spans the Entire Distribution</a:t>
-            </a:r>
-          </a:p>
-        </p:txBody>
-      </p:sp>
-      <p:sp>
-        <p:nvSpPr>
-          <p:cNvPr id="4" name="TextBox 3"/>
+            <a:r>
+              <a:rPr sz="2800" b="1">
+                <a:solidFill>
+                  <a:srgbClr val="FFFFFF"/>
+                </a:solidFill>
+              </a:rPr>
+              <a:t>Eighth Test: OOS σ Sweep (Strict Train/Test)</a:t>
+            </a:r>
+          </a:p>
+        </p:txBody>
+      </p:sp>
+      <p:pic>
+        <p:nvPicPr>
+          <p:cNvPr id="4" name="Picture 3" descr="sweep_t0_holdout2015.jpg"/>
+          <p:cNvPicPr>
+            <a:picLocks noChangeAspect="1"/>
+          </p:cNvPicPr>
+          <p:nvPr/>
+        </p:nvPicPr>
+        <p:blipFill>
+          <a:blip r:embed="rId2"/>
+          <a:stretch>
+            <a:fillRect/>
+          </a:stretch>
+        </p:blipFill>
+        <p:spPr>
+          <a:xfrm>
+            <a:off x="274320" y="914400"/>
+            <a:ext cx="5486400" cy="5669280"/>
+          </a:xfrm>
+          <a:prstGeom prst="rect">
+            <a:avLst/>
+          </a:prstGeom>
+        </p:spPr>
+      </p:pic>
+      <p:sp>
+        <p:nvSpPr>
+          <p:cNvPr id="5" name="TextBox 4"/>
           <p:cNvSpPr txBox="1"/>
           <p:nvPr/>
         </p:nvSpPr>
         <p:spPr>
           <a:xfrm>
-            <a:off x="457200" y="1097280"/>
-            <a:ext cx="10515600" cy="5029200"/>
+            <a:off x="6035040" y="914400"/>
+            <a:ext cx="5943600" cy="5669280"/>
           </a:xfrm>
           <a:prstGeom prst="rect">
             <a:avLst/>
@@ -3803,238 +3818,193 @@
           </a:bodyPr>
           <a:lstStyle/>
           <a:p>
-            <a:pPr algn="l">
-              <a:defRPr sz="1500" b="0">
-                <a:solidFill>
-                  <a:srgbClr val="EEEEEE"/>
-                </a:solidFill>
-                <a:latin typeface="Calibri"/>
-              </a:defRPr>
-            </a:pPr>
-          </a:p>
-          <a:p>
-            <a:pPr>
-              <a:defRPr sz="1600" b="0">
-                <a:solidFill>
-                  <a:srgbClr val="EEEEEE"/>
-                </a:solidFill>
-                <a:latin typeface="Calibri"/>
-              </a:defRPr>
-            </a:pPr>
-            <a:r>
-              <a:t>34 equal-width bins in log₁₀(t). Fit power law to each percentile:</a:t>
-            </a:r>
-          </a:p>
-          <a:p>
-            <a:pPr>
-              <a:defRPr sz="600" b="0">
-                <a:solidFill>
-                  <a:srgbClr val="EEEEEE"/>
-                </a:solidFill>
-                <a:latin typeface="Calibri"/>
-              </a:defRPr>
-            </a:pPr>
-          </a:p>
-          <a:p>
-            <a:pPr>
-              <a:defRPr sz="1500" b="1">
-                <a:solidFill>
-                  <a:srgbClr val="F7931A"/>
-                </a:solidFill>
-                <a:latin typeface="Calibri"/>
-              </a:defRPr>
-            </a:pPr>
-            <a:r>
-              <a:t>Percentile      Slope    Optimal Genesis     R²</a:t>
-            </a:r>
-          </a:p>
-          <a:p>
-            <a:pPr>
-              <a:defRPr sz="1300" b="0">
-                <a:solidFill>
-                  <a:srgbClr val="888888"/>
-                </a:solidFill>
-                <a:latin typeface="Calibri"/>
-              </a:defRPr>
-            </a:pPr>
-            <a:r>
-              <a:t>─────────────────────────────────────────────────</a:t>
-            </a:r>
-          </a:p>
-          <a:p>
-            <a:pPr>
-              <a:defRPr sz="1400" b="0">
-                <a:solidFill>
-                  <a:srgbClr val="EEEEEE"/>
-                </a:solidFill>
-                <a:latin typeface="Calibri"/>
-              </a:defRPr>
-            </a:pPr>
-            <a:r>
-              <a:t>Bin max (peaks)   5.09     Nov 23, 2009      0.949</a:t>
-            </a:r>
-          </a:p>
-          <a:p>
-            <a:pPr>
-              <a:defRPr sz="1400" b="0">
-                <a:solidFill>
-                  <a:srgbClr val="EEEEEE"/>
-                </a:solidFill>
-                <a:latin typeface="Calibri"/>
-              </a:defRPr>
-            </a:pPr>
-            <a:r>
-              <a:t>Bin P95           5.14     Nov 17, 2009      0.955</a:t>
-            </a:r>
-          </a:p>
-          <a:p>
-            <a:pPr>
-              <a:defRPr sz="1400" b="0">
-                <a:solidFill>
-                  <a:srgbClr val="EEEEEE"/>
-                </a:solidFill>
-                <a:latin typeface="Calibri"/>
-              </a:defRPr>
-            </a:pPr>
-            <a:r>
-              <a:t>Bin median        5.11     Oct 16, 2009      0.972</a:t>
-            </a:r>
-          </a:p>
-          <a:p>
-            <a:pPr>
-              <a:defRPr sz="1400" b="0">
-                <a:solidFill>
-                  <a:srgbClr val="EEEEEE"/>
-                </a:solidFill>
-                <a:latin typeface="Calibri"/>
-              </a:defRPr>
-            </a:pPr>
-            <a:r>
-              <a:t>Bin P5            5.03     Jun  1, 2009      0.978</a:t>
-            </a:r>
-          </a:p>
-          <a:p>
-            <a:pPr>
-              <a:defRPr sz="1400" b="0">
-                <a:solidFill>
-                  <a:srgbClr val="EEEEEE"/>
-                </a:solidFill>
-                <a:latin typeface="Calibri"/>
-              </a:defRPr>
-            </a:pPr>
-            <a:r>
-              <a:t>Bin min (floor)   5.02     Jun 25, 2009      0.984</a:t>
-            </a:r>
-          </a:p>
-          <a:p>
-            <a:pPr>
-              <a:defRPr sz="600" b="0">
-                <a:solidFill>
-                  <a:srgbClr val="EEEEEE"/>
-                </a:solidFill>
-                <a:latin typeface="Calibri"/>
-              </a:defRPr>
-            </a:pPr>
-          </a:p>
-          <a:p>
-            <a:pPr>
-              <a:defRPr sz="1600" b="1">
-                <a:solidFill>
-                  <a:srgbClr val="F7931A"/>
-                </a:solidFill>
-                <a:latin typeface="Calibri"/>
-              </a:defRPr>
-            </a:pPr>
-            <a:r>
-              <a:t>Key findings:</a:t>
-            </a:r>
-          </a:p>
-          <a:p>
-            <a:pPr lvl="1">
-              <a:defRPr sz="1400" b="0">
-                <a:solidFill>
-                  <a:srgbClr val="2ECC71"/>
-                </a:solidFill>
-                <a:latin typeface="Calibri"/>
-              </a:defRPr>
-            </a:pPr>
-            <a:r>
-              <a:t>All percentiles follow nearly the same slope: β ∈ [5.02, 5.14]</a:t>
-            </a:r>
-          </a:p>
-          <a:p>
-            <a:pPr lvl="1">
-              <a:defRPr sz="1400" b="0">
-                <a:solidFill>
-                  <a:srgbClr val="2ECC71"/>
-                </a:solidFill>
-                <a:latin typeface="Calibri"/>
-              </a:defRPr>
-            </a:pPr>
-            <a:r>
-              <a:t>The gap between peaks and floor narrows over time → volatility is decreasing</a:t>
-            </a:r>
-          </a:p>
-          <a:p>
-            <a:pPr lvl="1">
-              <a:defRPr sz="1400" b="0">
-                <a:solidFill>
-                  <a:srgbClr val="2ECC71"/>
-                </a:solidFill>
-                <a:latin typeface="Calibri"/>
-              </a:defRPr>
-            </a:pPr>
-            <a:r>
-              <a:t>The underlying growth rate (~5.08) is constant across the entire price distribution</a:t>
-            </a:r>
-          </a:p>
-          <a:p>
-            <a:pPr>
-              <a:defRPr sz="600" b="0">
-                <a:solidFill>
-                  <a:srgbClr val="EEEEEE"/>
-                </a:solidFill>
-                <a:latin typeface="Calibri"/>
-              </a:defRPr>
-            </a:pPr>
-          </a:p>
-          <a:p>
-            <a:pPr>
-              <a:defRPr sz="1400" b="0">
-                <a:solidFill>
-                  <a:srgbClr val="888888"/>
-                </a:solidFill>
-                <a:latin typeface="Calibri"/>
-              </a:defRPr>
-            </a:pPr>
-            <a:r>
-              <a:t>The floor "starts" earlier (Jun 2009) because it's anchored by the first prices</a:t>
-            </a:r>
-          </a:p>
-          <a:p>
-            <a:pPr>
-              <a:defRPr sz="1400" b="0">
-                <a:solidFill>
-                  <a:srgbClr val="888888"/>
-                </a:solidFill>
-                <a:latin typeface="Calibri"/>
-              </a:defRPr>
-            </a:pPr>
-            <a:r>
-              <a:t>The peaks start later (Nov 2009) because the first bubble didn't happen until 2011</a:t>
-            </a:r>
-          </a:p>
-          <a:p>
-            <a:pPr>
-              <a:defRPr sz="1400" b="1">
-                <a:solidFill>
-                  <a:srgbClr val="EEEEEE"/>
-                </a:solidFill>
-                <a:latin typeface="Calibri"/>
-              </a:defRPr>
-            </a:pPr>
-            <a:r>
-              <a:t>July 25 sits in the middle — balancing floor and peak behavior</a:t>
+            <a:r>
+              <a:rPr sz="1300" b="1">
+                <a:solidFill>
+                  <a:srgbClr val="1E1E1E"/>
+                </a:solidFill>
+              </a:rPr>
+              <a:t>Methodology — strict out-of-sample:</a:t>
+            </a:r>
+          </a:p>
+          <a:p>
+            <a:r>
+              <a:rPr sz="1300">
+                <a:solidFill>
+                  <a:srgbClr val="1E1E1E"/>
+                </a:solidFill>
+              </a:rPr>
+              <a:t>  • Fit power law on pre-2015-01-01 data (n_fit ≈ 1,600 at canonical).</a:t>
+            </a:r>
+          </a:p>
+          <a:p>
+            <a:r>
+              <a:rPr sz="1300">
+                <a:solidFill>
+                  <a:srgbClr val="1E1E1E"/>
+                </a:solidFill>
+              </a:rPr>
+              <a:t>  • Evaluate on 4,118 post-2015 samples the fit has never seen.</a:t>
+            </a:r>
+          </a:p>
+          <a:p>
+            <a:r>
+              <a:rPr sz="1300">
+                <a:solidFill>
+                  <a:srgbClr val="1E1E1E"/>
+                </a:solidFill>
+              </a:rPr>
+              <a:t>  • Sweep 522 t₀ candidates at 7-day step, 2007-01-01 → 2017-01-01.</a:t>
+            </a:r>
+          </a:p>
+          <a:p>
+            <a:r>
+              <a:rPr sz="1300">
+                <a:solidFill>
+                  <a:srgbClr val="1E1E1E"/>
+                </a:solidFill>
+              </a:rPr>
+              <a:t>  • Three weightings: log-density (primary), unweighted, 1/t.</a:t>
+            </a:r>
+          </a:p>
+          <a:p>
+            <a:r>
+              <a:rPr sz="1300">
+                <a:solidFill>
+                  <a:srgbClr val="1E1E1E"/>
+                </a:solidFill>
+              </a:rPr>
+              <a:t/>
+            </a:r>
+          </a:p>
+          <a:p>
+            <a:r>
+              <a:rPr sz="1300" b="1">
+                <a:solidFill>
+                  <a:srgbClr val="1E1E1E"/>
+                </a:solidFill>
+              </a:rPr>
+              <a:t>Findings at the canonical t₀ = 2009-07-25:</a:t>
+            </a:r>
+          </a:p>
+          <a:p>
+            <a:r>
+              <a:rPr sz="1300">
+                <a:solidFill>
+                  <a:srgbClr val="1E1E1E"/>
+                </a:solidFill>
+              </a:rPr>
+              <a:t>  • β = 5.53   σ_fit = 0.368   σ_holdout = 0.432</a:t>
+            </a:r>
+          </a:p>
+          <a:p>
+            <a:r>
+              <a:rPr sz="1300">
+                <a:solidFill>
+                  <a:srgbClr val="1E1E1E"/>
+                </a:solidFill>
+              </a:rPr>
+              <a:t/>
+            </a:r>
+          </a:p>
+          <a:p>
+            <a:r>
+              <a:rPr sz="1300" b="1">
+                <a:solidFill>
+                  <a:srgbClr val="1E1E1E"/>
+                </a:solidFill>
+              </a:rPr>
+              <a:t>Optimum on this holdout:</a:t>
+            </a:r>
+          </a:p>
+          <a:p>
+            <a:r>
+              <a:rPr sz="1300">
+                <a:solidFill>
+                  <a:srgbClr val="1E1E1E"/>
+                </a:solidFill>
+              </a:rPr>
+              <a:t>  • Argmin σ_holdout: 2009-11-09   (+107 days, ~15 weeks later)</a:t>
+            </a:r>
+          </a:p>
+          <a:p>
+            <a:r>
+              <a:rPr sz="1300">
+                <a:solidFill>
+                  <a:srgbClr val="1E1E1E"/>
+                </a:solidFill>
+              </a:rPr>
+              <a:t>  • σ_holdout at optimum: 0.269 (40% lower than canonical)</a:t>
+            </a:r>
+          </a:p>
+          <a:p>
+            <a:r>
+              <a:rPr sz="1300">
+                <a:solidFill>
+                  <a:srgbClr val="1E1E1E"/>
+                </a:solidFill>
+              </a:rPr>
+              <a:t>  • β at optimum: 4.58</a:t>
+            </a:r>
+          </a:p>
+          <a:p>
+            <a:r>
+              <a:rPr sz="1300">
+                <a:solidFill>
+                  <a:srgbClr val="1E1E1E"/>
+                </a:solidFill>
+              </a:rPr>
+              <a:t/>
+            </a:r>
+          </a:p>
+          <a:p>
+            <a:r>
+              <a:rPr sz="1300" b="1">
+                <a:solidFill>
+                  <a:srgbClr val="1E1E1E"/>
+                </a:solidFill>
+              </a:rPr>
+              <a:t>Interpretation — a 4-month trough, not a sharp minimum:</a:t>
+            </a:r>
+          </a:p>
+          <a:p>
+            <a:r>
+              <a:rPr sz="1300">
+                <a:solidFill>
+                  <a:srgbClr val="1E1E1E"/>
+                </a:solidFill>
+              </a:rPr>
+              <a:t>  • All three weightings converge on the same trough.</a:t>
+            </a:r>
+          </a:p>
+          <a:p>
+            <a:r>
+              <a:rPr sz="1300">
+                <a:solidFill>
+                  <a:srgbClr val="1E1E1E"/>
+                </a:solidFill>
+              </a:rPr>
+              <a:t>  • Optimum is inside a wide σ_holdout valley spanning Q3 2009.</a:t>
+            </a:r>
+          </a:p>
+          <a:p>
+            <a:r>
+              <a:rPr sz="1300">
+                <a:solidFill>
+                  <a:srgbClr val="1E1E1E"/>
+                </a:solidFill>
+              </a:rPr>
+              <a:t>  • β varies ~20% within the trough (4.6 – 5.5).</a:t>
+            </a:r>
+          </a:p>
+          <a:p>
+            <a:r>
+              <a:rPr sz="1300">
+                <a:solidFill>
+                  <a:srgbClr val="1E1E1E"/>
+                </a:solidFill>
+              </a:rPr>
+              <a:t>  • Sweep ends at t₀ ≈ 2013 where n_fit drops below 500.</a:t>
             </a:r>
           </a:p>
         </p:txBody>
@@ -4050,14 +4020,6 @@
 <file path=ppt/slides/slide12.xml><?xml version="1.0" encoding="utf-8"?>
 <p:sld xmlns:a="http://schemas.openxmlformats.org/drawingml/2006/main" xmlns:p="http://schemas.openxmlformats.org/presentationml/2006/main" xmlns:r="http://schemas.openxmlformats.org/officeDocument/2006/relationships">
   <p:cSld>
-    <p:bg>
-      <p:bgPr>
-        <a:solidFill>
-          <a:srgbClr val="1A1A2E"/>
-        </a:solidFill>
-        <a:effectLst/>
-      </p:bgPr>
-    </p:bg>
     <p:spTree>
       <p:nvGrpSpPr>
         <p:cNvPr id="1" name=""/>
@@ -4067,7 +4029,7 @@
       <p:grpSpPr/>
       <p:sp>
         <p:nvSpPr>
-          <p:cNvPr id="2" name="Rectangle 1"/>
+          <p:cNvPr id="2" name="HeaderRect"/>
           <p:cNvSpPr/>
           <p:nvPr/>
         </p:nvSpPr>
@@ -4130,30 +4092,51 @@
           </a:bodyPr>
           <a:lstStyle/>
           <a:p>
-            <a:pPr algn="l">
-              <a:defRPr sz="2800" b="1">
-                <a:solidFill>
-                  <a:srgbClr val="F7931A"/>
-                </a:solidFill>
-                <a:latin typeface="Calibri"/>
-              </a:defRPr>
-            </a:pPr>
-            <a:r>
-              <a:t>What Does t=0 Mean?</a:t>
-            </a:r>
-          </a:p>
-        </p:txBody>
-      </p:sp>
-      <p:sp>
-        <p:nvSpPr>
-          <p:cNvPr id="4" name="TextBox 3"/>
+            <a:r>
+              <a:rPr sz="2800" b="1">
+                <a:solidFill>
+                  <a:srgbClr val="FFFFFF"/>
+                </a:solidFill>
+              </a:rPr>
+              <a:t>Moving the Holdout Boundary Flips the Optimum's Sign</a:t>
+            </a:r>
+          </a:p>
+        </p:txBody>
+      </p:sp>
+      <p:pic>
+        <p:nvPicPr>
+          <p:cNvPr id="4" name="Picture 3" descr="sweep_t0_holdout2016.jpg"/>
+          <p:cNvPicPr>
+            <a:picLocks noChangeAspect="1"/>
+          </p:cNvPicPr>
+          <p:nvPr/>
+        </p:nvPicPr>
+        <p:blipFill>
+          <a:blip r:embed="rId2"/>
+          <a:stretch>
+            <a:fillRect/>
+          </a:stretch>
+        </p:blipFill>
+        <p:spPr>
+          <a:xfrm>
+            <a:off x="274320" y="914400"/>
+            <a:ext cx="5486400" cy="5669280"/>
+          </a:xfrm>
+          <a:prstGeom prst="rect">
+            <a:avLst/>
+          </a:prstGeom>
+        </p:spPr>
+      </p:pic>
+      <p:sp>
+        <p:nvSpPr>
+          <p:cNvPr id="5" name="TextBox 4"/>
           <p:cNvSpPr txBox="1"/>
           <p:nvPr/>
         </p:nvSpPr>
         <p:spPr>
           <a:xfrm>
-            <a:off x="457200" y="1097280"/>
-            <a:ext cx="10515600" cy="5029200"/>
+            <a:off x="6035040" y="914400"/>
+            <a:ext cx="5943600" cy="5669280"/>
           </a:xfrm>
           <a:prstGeom prst="rect">
             <a:avLst/>
@@ -4166,238 +4149,233 @@
           </a:bodyPr>
           <a:lstStyle/>
           <a:p>
-            <a:pPr algn="l">
-              <a:defRPr sz="1600" b="0">
-                <a:solidFill>
-                  <a:srgbClr val="EEEEEE"/>
-                </a:solidFill>
-                <a:latin typeface="Calibri"/>
-              </a:defRPr>
-            </a:pPr>
-          </a:p>
-          <a:p>
-            <a:pPr>
-              <a:defRPr sz="1800" b="1">
-                <a:solidFill>
-                  <a:srgbClr val="E74C3C"/>
-                </a:solidFill>
-                <a:latin typeface="Calibri"/>
-              </a:defRPr>
-            </a:pPr>
-            <a:r>
-              <a:t>The optimal time origin (July 25, 2009) is NOT:</a:t>
-            </a:r>
-          </a:p>
-          <a:p>
-            <a:pPr lvl="1">
-              <a:defRPr sz="1500" b="0">
-                <a:solidFill>
-                  <a:srgbClr val="888888"/>
-                </a:solidFill>
-                <a:latin typeface="Calibri"/>
-              </a:defRPr>
-            </a:pPr>
-            <a:r>
-              <a:t>The Bitcoin genesis block (Jan 3, 2009)</a:t>
-            </a:r>
-          </a:p>
-          <a:p>
-            <a:pPr lvl="1">
-              <a:defRPr sz="1500" b="0">
-                <a:solidFill>
-                  <a:srgbClr val="888888"/>
-                </a:solidFill>
-                <a:latin typeface="Calibri"/>
-              </a:defRPr>
-            </a:pPr>
-            <a:r>
-              <a:t>The first transaction (Jan 12, 2009)</a:t>
-            </a:r>
-          </a:p>
-          <a:p>
-            <a:pPr lvl="1">
-              <a:defRPr sz="1500" b="0">
-                <a:solidFill>
-                  <a:srgbClr val="888888"/>
-                </a:solidFill>
-                <a:latin typeface="Calibri"/>
-              </a:defRPr>
-            </a:pPr>
-            <a:r>
-              <a:t>The first dollar-denominated exchange rate (Oct 5, 2009)</a:t>
-            </a:r>
-          </a:p>
-          <a:p>
-            <a:pPr lvl="1">
-              <a:defRPr sz="1500" b="0">
-                <a:solidFill>
-                  <a:srgbClr val="888888"/>
-                </a:solidFill>
-                <a:latin typeface="Calibri"/>
-              </a:defRPr>
-            </a:pPr>
-            <a:r>
-              <a:t>Any specific economic event</a:t>
-            </a:r>
-          </a:p>
-          <a:p>
-            <a:pPr>
-              <a:defRPr sz="800" b="0">
-                <a:solidFill>
-                  <a:srgbClr val="EEEEEE"/>
-                </a:solidFill>
-                <a:latin typeface="Calibri"/>
-              </a:defRPr>
-            </a:pPr>
-          </a:p>
-          <a:p>
-            <a:pPr>
-              <a:defRPr sz="1800" b="1">
-                <a:solidFill>
-                  <a:srgbClr val="2ECC71"/>
-                </a:solidFill>
-                <a:latin typeface="Calibri"/>
-              </a:defRPr>
-            </a:pPr>
-            <a:r>
-              <a:t>It IS:</a:t>
-            </a:r>
-          </a:p>
-          <a:p>
-            <a:pPr lvl="1">
-              <a:defRPr sz="1500" b="0">
-                <a:solidFill>
-                  <a:srgbClr val="EEEEEE"/>
-                </a:solidFill>
-                <a:latin typeface="Calibri"/>
-              </a:defRPr>
-            </a:pPr>
-            <a:r>
-              <a:t>The date where Bitcoin's price behavior begins to follow a power law</a:t>
-            </a:r>
-          </a:p>
-          <a:p>
-            <a:pPr lvl="1">
-              <a:defRPr sz="1500" b="0">
-                <a:solidFill>
-                  <a:srgbClr val="EEEEEE"/>
-                </a:solidFill>
-                <a:latin typeface="Calibri"/>
-              </a:defRPr>
-            </a:pPr>
-            <a:r>
-              <a:t>A statistical property of the data, not a historical milestone</a:t>
-            </a:r>
-          </a:p>
-          <a:p>
-            <a:pPr lvl="1">
-              <a:defRPr sz="1500" b="0">
-                <a:solidFill>
-                  <a:srgbClr val="EEEEEE"/>
-                </a:solidFill>
-                <a:latin typeface="Calibri"/>
-              </a:defRPr>
-            </a:pPr>
-            <a:r>
-              <a:t>The point where the mathematical structure "turns on"</a:t>
-            </a:r>
-          </a:p>
-          <a:p>
-            <a:pPr>
-              <a:defRPr sz="800" b="0">
-                <a:solidFill>
-                  <a:srgbClr val="EEEEEE"/>
-                </a:solidFill>
-                <a:latin typeface="Calibri"/>
-              </a:defRPr>
-            </a:pPr>
-          </a:p>
-          <a:p>
-            <a:pPr>
-              <a:defRPr sz="1600" b="1">
-                <a:solidFill>
-                  <a:srgbClr val="F7931A"/>
-                </a:solidFill>
-                <a:latin typeface="Calibri"/>
-              </a:defRPr>
-            </a:pPr>
-            <a:r>
-              <a:t>Blockchain data shows no economic activity in summer 2009</a:t>
-            </a:r>
-          </a:p>
-          <a:p>
-            <a:pPr lvl="1">
-              <a:defRPr sz="1400" b="0">
-                <a:solidFill>
-                  <a:srgbClr val="888888"/>
-                </a:solidFill>
-                <a:latin typeface="Calibri"/>
-              </a:defRPr>
-            </a:pPr>
-            <a:r>
-              <a:t>50 BTC in block 0 were unspendable (code bug). Block 1 mined 5 days later.</a:t>
-            </a:r>
-          </a:p>
-          <a:p>
-            <a:pPr lvl="1">
-              <a:defRPr sz="1400" b="0">
-                <a:solidFill>
-                  <a:srgbClr val="888888"/>
-                </a:solidFill>
-                <a:latin typeface="Calibri"/>
-              </a:defRPr>
-            </a:pPr>
-            <a:r>
-              <a:t>First real transaction: Satoshi → Hal Finney, Jan 12, 2009 (block 170)</a:t>
-            </a:r>
-          </a:p>
-          <a:p>
-            <a:pPr lvl="1">
-              <a:defRPr sz="1400" b="0">
-                <a:solidFill>
-                  <a:srgbClr val="888888"/>
-                </a:solidFill>
-                <a:latin typeface="Calibri"/>
-              </a:defRPr>
-            </a:pPr>
-            <a:r>
-              <a:t>First dollar rate: Oct 2009 (New Liberty Standard, 1,309 BTC = $1)</a:t>
-            </a:r>
-          </a:p>
-          <a:p>
-            <a:pPr>
-              <a:defRPr sz="800" b="0">
-                <a:solidFill>
-                  <a:srgbClr val="EEEEEE"/>
-                </a:solidFill>
-                <a:latin typeface="Calibri"/>
-              </a:defRPr>
-            </a:pPr>
-          </a:p>
-          <a:p>
-            <a:pPr>
-              <a:defRPr sz="1500" b="0">
-                <a:solidFill>
-                  <a:srgbClr val="EEEEEE"/>
-                </a:solidFill>
-                <a:latin typeface="Calibri"/>
-              </a:defRPr>
-            </a:pPr>
-            <a:r>
-              <a:t>Interpretation: the power law may reflect the moment Bitcoin transitions from</a:t>
-            </a:r>
-          </a:p>
-          <a:p>
-            <a:pPr>
-              <a:defRPr sz="1500" b="0">
-                <a:solidFill>
-                  <a:srgbClr val="EEEEEE"/>
-                </a:solidFill>
-                <a:latin typeface="Calibri"/>
-              </a:defRPr>
-            </a:pPr>
-            <a:r>
-              <a:t>"experiment" to "nascent monetary system" — even before anyone could price it</a:t>
+            <a:r>
+              <a:rPr sz="1300" b="1">
+                <a:solidFill>
+                  <a:srgbClr val="1E1E1E"/>
+                </a:solidFill>
+              </a:rPr>
+              <a:t>Same sweep, different holdout boundary:</a:t>
+            </a:r>
+          </a:p>
+          <a:p>
+            <a:r>
+              <a:rPr sz="1300">
+                <a:solidFill>
+                  <a:srgbClr val="1E1E1E"/>
+                </a:solidFill>
+              </a:rPr>
+              <a:t>  • Fit on pre-2016-12-15 data (n_fit ≈ 2,330 at canonical).</a:t>
+            </a:r>
+          </a:p>
+          <a:p>
+            <a:r>
+              <a:rPr sz="1300">
+                <a:solidFill>
+                  <a:srgbClr val="1E1E1E"/>
+                </a:solidFill>
+              </a:rPr>
+              <a:t>  • Evaluate on 3,404 post-2016-12 samples.</a:t>
+            </a:r>
+          </a:p>
+          <a:p>
+            <a:r>
+              <a:rPr sz="1300">
+                <a:solidFill>
+                  <a:srgbClr val="1E1E1E"/>
+                </a:solidFill>
+              </a:rPr>
+              <a:t>  • 2 extra years of training data vs prior sweep.</a:t>
+            </a:r>
+          </a:p>
+          <a:p>
+            <a:r>
+              <a:rPr sz="1300">
+                <a:solidFill>
+                  <a:srgbClr val="1E1E1E"/>
+                </a:solidFill>
+              </a:rPr>
+              <a:t/>
+            </a:r>
+          </a:p>
+          <a:p>
+            <a:r>
+              <a:rPr sz="1300" b="1">
+                <a:solidFill>
+                  <a:srgbClr val="1E1E1E"/>
+                </a:solidFill>
+              </a:rPr>
+              <a:t>Findings at the canonical t₀ = 2009-07-25:</a:t>
+            </a:r>
+          </a:p>
+          <a:p>
+            <a:r>
+              <a:rPr sz="1300">
+                <a:solidFill>
+                  <a:srgbClr val="1E1E1E"/>
+                </a:solidFill>
+              </a:rPr>
+              <a:t>  • β = 4.81   σ_fit = 0.372   σ_holdout = 0.331</a:t>
+            </a:r>
+          </a:p>
+          <a:p>
+            <a:r>
+              <a:rPr sz="1300">
+                <a:solidFill>
+                  <a:srgbClr val="1E1E1E"/>
+                </a:solidFill>
+              </a:rPr>
+              <a:t/>
+            </a:r>
+          </a:p>
+          <a:p>
+            <a:r>
+              <a:rPr sz="1300" b="1">
+                <a:solidFill>
+                  <a:srgbClr val="1E1E1E"/>
+                </a:solidFill>
+              </a:rPr>
+              <a:t>Optimum on this holdout:</a:t>
+            </a:r>
+          </a:p>
+          <a:p>
+            <a:r>
+              <a:rPr sz="1300">
+                <a:solidFill>
+                  <a:srgbClr val="1E1E1E"/>
+                </a:solidFill>
+              </a:rPr>
+              <a:t>  • Argmin σ_holdout: 2009-03-23   (−124 days, ~4 months earlier)</a:t>
+            </a:r>
+          </a:p>
+          <a:p>
+            <a:r>
+              <a:rPr sz="1300">
+                <a:solidFill>
+                  <a:srgbClr val="1E1E1E"/>
+                </a:solidFill>
+              </a:rPr>
+              <a:t>  • σ_holdout at optimum: 0.228</a:t>
+            </a:r>
+          </a:p>
+          <a:p>
+            <a:r>
+              <a:rPr sz="1300">
+                <a:solidFill>
+                  <a:srgbClr val="1E1E1E"/>
+                </a:solidFill>
+              </a:rPr>
+              <a:t>  • β at optimum: 5.62</a:t>
+            </a:r>
+          </a:p>
+          <a:p>
+            <a:r>
+              <a:rPr sz="1300">
+                <a:solidFill>
+                  <a:srgbClr val="1E1E1E"/>
+                </a:solidFill>
+              </a:rPr>
+              <a:t/>
+            </a:r>
+          </a:p>
+          <a:p>
+            <a:r>
+              <a:rPr sz="1300" b="1">
+                <a:solidFill>
+                  <a:srgbClr val="1E1E1E"/>
+                </a:solidFill>
+              </a:rPr>
+              <a:t>The direction of the offset flipped:</a:t>
+            </a:r>
+          </a:p>
+          <a:p>
+            <a:r>
+              <a:rPr sz="1300">
+                <a:solidFill>
+                  <a:srgbClr val="1E1E1E"/>
+                </a:solidFill>
+              </a:rPr>
+              <a:t>  • 2015 holdout → optimum is 107 d AFTER canonical.</a:t>
+            </a:r>
+          </a:p>
+          <a:p>
+            <a:r>
+              <a:rPr sz="1300">
+                <a:solidFill>
+                  <a:srgbClr val="1E1E1E"/>
+                </a:solidFill>
+              </a:rPr>
+              <a:t>  • 2016-12 holdout → optimum is 124 d BEFORE canonical.</a:t>
+            </a:r>
+          </a:p>
+          <a:p>
+            <a:r>
+              <a:rPr sz="1300">
+                <a:solidFill>
+                  <a:srgbClr val="1E1E1E"/>
+                </a:solidFill>
+              </a:rPr>
+              <a:t/>
+            </a:r>
+          </a:p>
+          <a:p>
+            <a:r>
+              <a:rPr sz="1300" b="1">
+                <a:solidFill>
+                  <a:srgbClr val="1E1E1E"/>
+                </a:solidFill>
+              </a:rPr>
+              <a:t>Takeaway — ~100-day scatter is methodology noise, not bias:</a:t>
+            </a:r>
+          </a:p>
+          <a:p>
+            <a:r>
+              <a:rPr sz="1300">
+                <a:solidFill>
+                  <a:srgbClr val="1E1E1E"/>
+                </a:solidFill>
+              </a:rPr>
+              <a:t>  • Optimum position is sensitive to which era is ground truth.</a:t>
+            </a:r>
+          </a:p>
+          <a:p>
+            <a:r>
+              <a:rPr sz="1300">
+                <a:solidFill>
+                  <a:srgbClr val="1E1E1E"/>
+                </a:solidFill>
+              </a:rPr>
+              <a:t>  • Canonical 2009-07-25 sits inside the ±4-month envelope</a:t>
+            </a:r>
+          </a:p>
+          <a:p>
+            <a:r>
+              <a:rPr sz="1300">
+                <a:solidFill>
+                  <a:srgbClr val="1E1E1E"/>
+                </a:solidFill>
+              </a:rPr>
+              <a:t>    regardless of the holdout cutoff.</a:t>
+            </a:r>
+          </a:p>
+          <a:p>
+            <a:r>
+              <a:rPr sz="1300">
+                <a:solidFill>
+                  <a:srgbClr val="1E1E1E"/>
+                </a:solidFill>
+              </a:rPr>
+              <a:t>  • Picking July 25 trades a small single-holdout σ loss for</a:t>
+            </a:r>
+          </a:p>
+          <a:p>
+            <a:r>
+              <a:rPr sz="1300">
+                <a:solidFill>
+                  <a:srgbClr val="1E1E1E"/>
+                </a:solidFill>
+              </a:rPr>
+              <a:t>    robustness across methodology choices.</a:t>
             </a:r>
           </a:p>
         </p:txBody>
@@ -4502,7 +4480,7 @@
               </a:defRPr>
             </a:pPr>
             <a:r>
-              <a:t>Three Tests Converge on July 2009</a:t>
+              <a:t>Floor-to-Peaks: The Power Law Spans the Entire Distribution</a:t>
             </a:r>
           </a:p>
         </p:txBody>
@@ -4530,6 +4508,16 @@
           <a:lstStyle/>
           <a:p>
             <a:pPr algn="l">
+              <a:defRPr sz="1500" b="0">
+                <a:solidFill>
+                  <a:srgbClr val="EEEEEE"/>
+                </a:solidFill>
+                <a:latin typeface="Calibri"/>
+              </a:defRPr>
+            </a:pPr>
+          </a:p>
+          <a:p>
+            <a:pPr>
               <a:defRPr sz="1600" b="0">
                 <a:solidFill>
                   <a:srgbClr val="EEEEEE"/>
@@ -4537,10 +4525,23 @@
                 <a:latin typeface="Calibri"/>
               </a:defRPr>
             </a:pPr>
-          </a:p>
-          <a:p>
-            <a:pPr>
-              <a:defRPr sz="1800" b="1">
+            <a:r>
+              <a:t>34 equal-width bins in log₁₀(t). Fit power law to each percentile:</a:t>
+            </a:r>
+          </a:p>
+          <a:p>
+            <a:pPr>
+              <a:defRPr sz="600" b="0">
+                <a:solidFill>
+                  <a:srgbClr val="EEEEEE"/>
+                </a:solidFill>
+                <a:latin typeface="Calibri"/>
+              </a:defRPr>
+            </a:pPr>
+          </a:p>
+          <a:p>
+            <a:pPr>
+              <a:defRPr sz="1500" b="1">
                 <a:solidFill>
                   <a:srgbClr val="F7931A"/>
                 </a:solidFill>
@@ -4548,174 +4549,196 @@
               </a:defRPr>
             </a:pPr>
             <a:r>
-              <a:t>The optimal time origin was confirmed by three independent statistical tests:</a:t>
-            </a:r>
-          </a:p>
-          <a:p>
-            <a:pPr>
-              <a:defRPr sz="800" b="0">
-                <a:solidFill>
-                  <a:srgbClr val="EEEEEE"/>
-                </a:solidFill>
-                <a:latin typeface="Calibri"/>
-              </a:defRPr>
-            </a:pPr>
-          </a:p>
-          <a:p>
-            <a:pPr>
-              <a:defRPr sz="1800" b="1">
-                <a:solidFill>
-                  <a:srgbClr val="5DADE2"/>
-                </a:solidFill>
-                <a:latin typeface="Calibri"/>
-              </a:defRPr>
-            </a:pPr>
-            <a:r>
-              <a:t>1. Durbin-Watson test for autocorrelation in residuals</a:t>
+              <a:t>Percentile      Slope    Optimal Genesis     R²</a:t>
+            </a:r>
+          </a:p>
+          <a:p>
+            <a:pPr>
+              <a:defRPr sz="1300" b="0">
+                <a:solidFill>
+                  <a:srgbClr val="888888"/>
+                </a:solidFill>
+                <a:latin typeface="Calibri"/>
+              </a:defRPr>
+            </a:pPr>
+            <a:r>
+              <a:t>─────────────────────────────────────────────────</a:t>
+            </a:r>
+          </a:p>
+          <a:p>
+            <a:pPr>
+              <a:defRPr sz="1400" b="0">
+                <a:solidFill>
+                  <a:srgbClr val="EEEEEE"/>
+                </a:solidFill>
+                <a:latin typeface="Calibri"/>
+              </a:defRPr>
+            </a:pPr>
+            <a:r>
+              <a:t>Bin max (peaks)   5.09     Nov 23, 2009      0.949</a:t>
+            </a:r>
+          </a:p>
+          <a:p>
+            <a:pPr>
+              <a:defRPr sz="1400" b="0">
+                <a:solidFill>
+                  <a:srgbClr val="EEEEEE"/>
+                </a:solidFill>
+                <a:latin typeface="Calibri"/>
+              </a:defRPr>
+            </a:pPr>
+            <a:r>
+              <a:t>Bin P95           5.14     Nov 17, 2009      0.955</a:t>
+            </a:r>
+          </a:p>
+          <a:p>
+            <a:pPr>
+              <a:defRPr sz="1400" b="0">
+                <a:solidFill>
+                  <a:srgbClr val="EEEEEE"/>
+                </a:solidFill>
+                <a:latin typeface="Calibri"/>
+              </a:defRPr>
+            </a:pPr>
+            <a:r>
+              <a:t>Bin median        5.11     Oct 16, 2009      0.972</a:t>
+            </a:r>
+          </a:p>
+          <a:p>
+            <a:pPr>
+              <a:defRPr sz="1400" b="0">
+                <a:solidFill>
+                  <a:srgbClr val="EEEEEE"/>
+                </a:solidFill>
+                <a:latin typeface="Calibri"/>
+              </a:defRPr>
+            </a:pPr>
+            <a:r>
+              <a:t>Bin P5            5.03     Jun  1, 2009      0.978</a:t>
+            </a:r>
+          </a:p>
+          <a:p>
+            <a:pPr>
+              <a:defRPr sz="1400" b="0">
+                <a:solidFill>
+                  <a:srgbClr val="EEEEEE"/>
+                </a:solidFill>
+                <a:latin typeface="Calibri"/>
+              </a:defRPr>
+            </a:pPr>
+            <a:r>
+              <a:t>Bin min (floor)   5.02     Jun 25, 2009      0.984</a:t>
+            </a:r>
+          </a:p>
+          <a:p>
+            <a:pPr>
+              <a:defRPr sz="600" b="0">
+                <a:solidFill>
+                  <a:srgbClr val="EEEEEE"/>
+                </a:solidFill>
+                <a:latin typeface="Calibri"/>
+              </a:defRPr>
+            </a:pPr>
+          </a:p>
+          <a:p>
+            <a:pPr>
+              <a:defRPr sz="1600" b="1">
+                <a:solidFill>
+                  <a:srgbClr val="F7931A"/>
+                </a:solidFill>
+                <a:latin typeface="Calibri"/>
+              </a:defRPr>
+            </a:pPr>
+            <a:r>
+              <a:t>Key findings:</a:t>
             </a:r>
           </a:p>
           <a:p>
             <a:pPr lvl="1">
               <a:defRPr sz="1400" b="0">
                 <a:solidFill>
-                  <a:srgbClr val="888888"/>
-                </a:solidFill>
-                <a:latin typeface="Calibri"/>
-              </a:defRPr>
-            </a:pPr>
-            <a:r>
-              <a:t>   Residuals closest to white noise at genesis ≈ July 2009</a:t>
-            </a:r>
-          </a:p>
-          <a:p>
-            <a:pPr>
-              <a:defRPr sz="600" b="0">
-                <a:solidFill>
-                  <a:srgbClr val="EEEEEE"/>
-                </a:solidFill>
-                <a:latin typeface="Calibri"/>
-              </a:defRPr>
-            </a:pPr>
-          </a:p>
-          <a:p>
-            <a:pPr>
-              <a:defRPr sz="1800" b="1">
-                <a:solidFill>
-                  <a:srgbClr val="5DADE2"/>
-                </a:solidFill>
-                <a:latin typeface="Calibri"/>
-              </a:defRPr>
-            </a:pPr>
-            <a:r>
-              <a:t>2. Out-of-sample RMSE (train/test split)</a:t>
+                  <a:srgbClr val="2ECC71"/>
+                </a:solidFill>
+                <a:latin typeface="Calibri"/>
+              </a:defRPr>
+            </a:pPr>
+            <a:r>
+              <a:t>All percentiles follow nearly the same slope: β ∈ [5.02, 5.14]</a:t>
             </a:r>
           </a:p>
           <a:p>
             <a:pPr lvl="1">
               <a:defRPr sz="1400" b="0">
                 <a:solidFill>
-                  <a:srgbClr val="888888"/>
-                </a:solidFill>
-                <a:latin typeface="Calibri"/>
-              </a:defRPr>
-            </a:pPr>
-            <a:r>
-              <a:t>   Best predictive accuracy when genesis ≈ July 2009</a:t>
-            </a:r>
-          </a:p>
-          <a:p>
-            <a:pPr>
-              <a:defRPr sz="600" b="0">
-                <a:solidFill>
-                  <a:srgbClr val="EEEEEE"/>
-                </a:solidFill>
-                <a:latin typeface="Calibri"/>
-              </a:defRPr>
-            </a:pPr>
-          </a:p>
-          <a:p>
-            <a:pPr>
-              <a:defRPr sz="1800" b="1">
-                <a:solidFill>
-                  <a:srgbClr val="5DADE2"/>
-                </a:solidFill>
-                <a:latin typeface="Calibri"/>
-              </a:defRPr>
-            </a:pPr>
-            <a:r>
-              <a:t>3. Slope stability across subsets</a:t>
+                  <a:srgbClr val="2ECC71"/>
+                </a:solidFill>
+                <a:latin typeface="Calibri"/>
+              </a:defRPr>
+            </a:pPr>
+            <a:r>
+              <a:t>The gap between peaks and floor narrows over time → volatility is decreasing</a:t>
             </a:r>
           </a:p>
           <a:p>
             <a:pPr lvl="1">
               <a:defRPr sz="1400" b="0">
                 <a:solidFill>
+                  <a:srgbClr val="2ECC71"/>
+                </a:solidFill>
+                <a:latin typeface="Calibri"/>
+              </a:defRPr>
+            </a:pPr>
+            <a:r>
+              <a:t>The underlying growth rate (~5.08) is constant across the entire price distribution</a:t>
+            </a:r>
+          </a:p>
+          <a:p>
+            <a:pPr>
+              <a:defRPr sz="600" b="0">
+                <a:solidFill>
+                  <a:srgbClr val="EEEEEE"/>
+                </a:solidFill>
+                <a:latin typeface="Calibri"/>
+              </a:defRPr>
+            </a:pPr>
+          </a:p>
+          <a:p>
+            <a:pPr>
+              <a:defRPr sz="1400" b="0">
+                <a:solidFill>
                   <a:srgbClr val="888888"/>
                 </a:solidFill>
                 <a:latin typeface="Calibri"/>
               </a:defRPr>
             </a:pPr>
             <a:r>
-              <a:t>   Exponent most consistent when genesis ≈ July 2009</a:t>
-            </a:r>
-          </a:p>
-          <a:p>
-            <a:pPr>
-              <a:defRPr sz="800" b="0">
-                <a:solidFill>
-                  <a:srgbClr val="EEEEEE"/>
-                </a:solidFill>
-                <a:latin typeface="Calibri"/>
-              </a:defRPr>
-            </a:pPr>
-          </a:p>
-          <a:p>
-            <a:pPr>
-              <a:defRPr sz="1600" b="1">
-                <a:solidFill>
-                  <a:srgbClr val="2ECC71"/>
-                </a:solidFill>
-                <a:latin typeface="Calibri"/>
-              </a:defRPr>
-            </a:pPr>
-            <a:r>
-              <a:t>546 candidate dates tested — all three tests converge on the same narrow window</a:t>
-            </a:r>
-          </a:p>
-          <a:p>
-            <a:pPr>
-              <a:defRPr sz="600" b="0">
-                <a:solidFill>
-                  <a:srgbClr val="EEEEEE"/>
-                </a:solidFill>
-                <a:latin typeface="Calibri"/>
-              </a:defRPr>
-            </a:pPr>
-          </a:p>
-          <a:p>
-            <a:pPr>
-              <a:defRPr sz="1600" b="0">
-                <a:solidFill>
-                  <a:srgbClr val="EEEEEE"/>
-                </a:solidFill>
-                <a:latin typeface="Calibri"/>
-              </a:defRPr>
-            </a:pPr>
-            <a:r>
-              <a:t>Distinct from the Bitcoin genesis block (Jan 3, 2009) — this is a statistical</a:t>
-            </a:r>
-          </a:p>
-          <a:p>
-            <a:pPr>
-              <a:defRPr sz="1600" b="0">
-                <a:solidFill>
-                  <a:srgbClr val="EEEEEE"/>
-                </a:solidFill>
-                <a:latin typeface="Calibri"/>
-              </a:defRPr>
-            </a:pPr>
-            <a:r>
-              <a:t>property of the price data, not a specific economic event</a:t>
+              <a:t>The floor "starts" earlier (Jun 2009) because it's anchored by the first prices</a:t>
+            </a:r>
+          </a:p>
+          <a:p>
+            <a:pPr>
+              <a:defRPr sz="1400" b="0">
+                <a:solidFill>
+                  <a:srgbClr val="888888"/>
+                </a:solidFill>
+                <a:latin typeface="Calibri"/>
+              </a:defRPr>
+            </a:pPr>
+            <a:r>
+              <a:t>The peaks start later (Nov 2009) because the first bubble didn't happen until 2011</a:t>
+            </a:r>
+          </a:p>
+          <a:p>
+            <a:pPr>
+              <a:defRPr sz="1400" b="1">
+                <a:solidFill>
+                  <a:srgbClr val="EEEEEE"/>
+                </a:solidFill>
+                <a:latin typeface="Calibri"/>
+              </a:defRPr>
+            </a:pPr>
+            <a:r>
+              <a:t>July 25 sits in the middle — balancing floor and peak behavior</a:t>
             </a:r>
           </a:p>
         </p:txBody>
@@ -4820,7 +4843,7 @@
               </a:defRPr>
             </a:pPr>
             <a:r>
-              <a:t>Is the Power Law a Single Regime?</a:t>
+              <a:t>What Does t=0 Mean?</a:t>
             </a:r>
           </a:p>
         </p:txBody>
@@ -4833,8 +4856,8 @@
         </p:nvSpPr>
         <p:spPr>
           <a:xfrm>
-            <a:off x="457200" y="1005840"/>
-            <a:ext cx="10972800" cy="5303520"/>
+            <a:off x="457200" y="1097280"/>
+            <a:ext cx="10515600" cy="5029200"/>
           </a:xfrm>
           <a:prstGeom prst="rect">
             <a:avLst/>
@@ -4848,38 +4871,77 @@
           <a:lstStyle/>
           <a:p>
             <a:pPr algn="l">
+              <a:defRPr sz="1600" b="0">
+                <a:solidFill>
+                  <a:srgbClr val="EEEEEE"/>
+                </a:solidFill>
+                <a:latin typeface="Calibri"/>
+              </a:defRPr>
+            </a:pPr>
+          </a:p>
+          <a:p>
+            <a:pPr>
+              <a:defRPr sz="1800" b="1">
+                <a:solidFill>
+                  <a:srgbClr val="E74C3C"/>
+                </a:solidFill>
+                <a:latin typeface="Calibri"/>
+              </a:defRPr>
+            </a:pPr>
+            <a:r>
+              <a:t>The optimal time origin (July 25, 2009) is NOT:</a:t>
+            </a:r>
+          </a:p>
+          <a:p>
+            <a:pPr lvl="1">
               <a:defRPr sz="1500" b="0">
                 <a:solidFill>
-                  <a:srgbClr val="EEEEEE"/>
-                </a:solidFill>
-                <a:latin typeface="Calibri"/>
-              </a:defRPr>
-            </a:pPr>
-          </a:p>
-          <a:p>
-            <a:pPr>
-              <a:defRPr sz="1600" b="0">
-                <a:solidFill>
-                  <a:srgbClr val="EEEEEE"/>
-                </a:solidFill>
-                <a:latin typeface="Calibri"/>
-              </a:defRPr>
-            </a:pPr>
-            <a:r>
-              <a:t>If residuals are autocorrelated (DW≈0.004), does that imply structural</a:t>
-            </a:r>
-          </a:p>
-          <a:p>
-            <a:pPr>
-              <a:defRPr sz="1600" b="0">
-                <a:solidFill>
-                  <a:srgbClr val="EEEEEE"/>
-                </a:solidFill>
-                <a:latin typeface="Calibri"/>
-              </a:defRPr>
-            </a:pPr>
-            <a:r>
-              <a:t>regime changes — different power law slopes in different eras?</a:t>
+                  <a:srgbClr val="888888"/>
+                </a:solidFill>
+                <a:latin typeface="Calibri"/>
+              </a:defRPr>
+            </a:pPr>
+            <a:r>
+              <a:t>The Bitcoin genesis block (Jan 3, 2009)</a:t>
+            </a:r>
+          </a:p>
+          <a:p>
+            <a:pPr lvl="1">
+              <a:defRPr sz="1500" b="0">
+                <a:solidFill>
+                  <a:srgbClr val="888888"/>
+                </a:solidFill>
+                <a:latin typeface="Calibri"/>
+              </a:defRPr>
+            </a:pPr>
+            <a:r>
+              <a:t>The first transaction (Jan 12, 2009)</a:t>
+            </a:r>
+          </a:p>
+          <a:p>
+            <a:pPr lvl="1">
+              <a:defRPr sz="1500" b="0">
+                <a:solidFill>
+                  <a:srgbClr val="888888"/>
+                </a:solidFill>
+                <a:latin typeface="Calibri"/>
+              </a:defRPr>
+            </a:pPr>
+            <a:r>
+              <a:t>The first dollar-denominated exchange rate (Oct 5, 2009)</a:t>
+            </a:r>
+          </a:p>
+          <a:p>
+            <a:pPr lvl="1">
+              <a:defRPr sz="1500" b="0">
+                <a:solidFill>
+                  <a:srgbClr val="888888"/>
+                </a:solidFill>
+                <a:latin typeface="Calibri"/>
+              </a:defRPr>
+            </a:pPr>
+            <a:r>
+              <a:t>Any specific economic event</a:t>
             </a:r>
           </a:p>
           <a:p>
@@ -4894,6 +4956,68 @@
           </a:p>
           <a:p>
             <a:pPr>
+              <a:defRPr sz="1800" b="1">
+                <a:solidFill>
+                  <a:srgbClr val="2ECC71"/>
+                </a:solidFill>
+                <a:latin typeface="Calibri"/>
+              </a:defRPr>
+            </a:pPr>
+            <a:r>
+              <a:t>It IS:</a:t>
+            </a:r>
+          </a:p>
+          <a:p>
+            <a:pPr lvl="1">
+              <a:defRPr sz="1500" b="0">
+                <a:solidFill>
+                  <a:srgbClr val="EEEEEE"/>
+                </a:solidFill>
+                <a:latin typeface="Calibri"/>
+              </a:defRPr>
+            </a:pPr>
+            <a:r>
+              <a:t>The date where Bitcoin's price behavior begins to follow a power law</a:t>
+            </a:r>
+          </a:p>
+          <a:p>
+            <a:pPr lvl="1">
+              <a:defRPr sz="1500" b="0">
+                <a:solidFill>
+                  <a:srgbClr val="EEEEEE"/>
+                </a:solidFill>
+                <a:latin typeface="Calibri"/>
+              </a:defRPr>
+            </a:pPr>
+            <a:r>
+              <a:t>A statistical property of the data, not a historical milestone</a:t>
+            </a:r>
+          </a:p>
+          <a:p>
+            <a:pPr lvl="1">
+              <a:defRPr sz="1500" b="0">
+                <a:solidFill>
+                  <a:srgbClr val="EEEEEE"/>
+                </a:solidFill>
+                <a:latin typeface="Calibri"/>
+              </a:defRPr>
+            </a:pPr>
+            <a:r>
+              <a:t>The point where the mathematical structure "turns on"</a:t>
+            </a:r>
+          </a:p>
+          <a:p>
+            <a:pPr>
+              <a:defRPr sz="800" b="0">
+                <a:solidFill>
+                  <a:srgbClr val="EEEEEE"/>
+                </a:solidFill>
+                <a:latin typeface="Calibri"/>
+              </a:defRPr>
+            </a:pPr>
+          </a:p>
+          <a:p>
+            <a:pPr>
               <a:defRPr sz="1600" b="1">
                 <a:solidFill>
                   <a:srgbClr val="F7931A"/>
@@ -4902,35 +5026,12 @@
               </a:defRPr>
             </a:pPr>
             <a:r>
-              <a:t>Five econometric tests on all available data (2010-2026, N=5,714):</a:t>
-            </a:r>
-          </a:p>
-          <a:p>
-            <a:pPr>
-              <a:defRPr sz="400" b="0">
-                <a:solidFill>
-                  <a:srgbClr val="EEEEEE"/>
-                </a:solidFill>
-                <a:latin typeface="Calibri"/>
-              </a:defRPr>
-            </a:pPr>
-          </a:p>
-          <a:p>
-            <a:pPr>
-              <a:defRPr sz="1400" b="1">
-                <a:solidFill>
-                  <a:srgbClr val="5DADE2"/>
-                </a:solidFill>
-                <a:latin typeface="Calibri"/>
-              </a:defRPr>
-            </a:pPr>
-            <a:r>
-              <a:t>1. Box-Cox λ sweep: optimal λ=0.012 ≈ 0 (pure log-log)</a:t>
+              <a:t>Blockchain data shows no economic activity in summer 2009</a:t>
             </a:r>
           </a:p>
           <a:p>
             <a:pPr lvl="1">
-              <a:defRPr sz="1200" b="0">
+              <a:defRPr sz="1400" b="0">
                 <a:solidFill>
                   <a:srgbClr val="888888"/>
                 </a:solidFill>
@@ -4938,35 +5039,12 @@
               </a:defRPr>
             </a:pPr>
             <a:r>
-              <a:t>   RMSE improves only 0.03% over λ=0. Power law IS the correct form.</a:t>
-            </a:r>
-          </a:p>
-          <a:p>
-            <a:pPr>
-              <a:defRPr sz="400" b="0">
-                <a:solidFill>
-                  <a:srgbClr val="EEEEEE"/>
-                </a:solidFill>
-                <a:latin typeface="Calibri"/>
-              </a:defRPr>
-            </a:pPr>
-          </a:p>
-          <a:p>
-            <a:pPr>
-              <a:defRPr sz="1400" b="1">
-                <a:solidFill>
-                  <a:srgbClr val="5DADE2"/>
-                </a:solidFill>
-                <a:latin typeface="Calibri"/>
-              </a:defRPr>
-            </a:pPr>
-            <a:r>
-              <a:t>2. Rolling regression (2yr window): slope oscillates ≈ −8 to +15</a:t>
+              <a:t>50 BTC in block 0 were unspendable (code bug). Block 1 mined 5 days later.</a:t>
             </a:r>
           </a:p>
           <a:p>
             <a:pPr lvl="1">
-              <a:defRPr sz="1200" b="0">
+              <a:defRPr sz="1400" b="0">
                 <a:solidFill>
                   <a:srgbClr val="888888"/>
                 </a:solidFill>
@@ -4974,35 +5052,12 @@
               </a:defRPr>
             </a:pPr>
             <a:r>
-              <a:t>   But always mean-reverts to ~5.0. If regime changed, slope would stay shifted.</a:t>
-            </a:r>
-          </a:p>
-          <a:p>
-            <a:pPr>
-              <a:defRPr sz="400" b="0">
-                <a:solidFill>
-                  <a:srgbClr val="EEEEEE"/>
-                </a:solidFill>
-                <a:latin typeface="Calibri"/>
-              </a:defRPr>
-            </a:pPr>
-          </a:p>
-          <a:p>
-            <a:pPr>
-              <a:defRPr sz="1400" b="1">
-                <a:solidFill>
-                  <a:srgbClr val="5DADE2"/>
-                </a:solidFill>
-                <a:latin typeface="Calibri"/>
-              </a:defRPr>
-            </a:pPr>
-            <a:r>
-              <a:t>3. Bai-Perron structural breakpoints: 6 breaks found (2011-2020)</a:t>
+              <a:t>First real transaction: Satoshi → Hal Finney, Jan 12, 2009 (block 170)</a:t>
             </a:r>
           </a:p>
           <a:p>
             <a:pPr lvl="1">
-              <a:defRPr sz="1200" b="0">
+              <a:defRPr sz="1400" b="0">
                 <a:solidFill>
                   <a:srgbClr val="888888"/>
                 </a:solidFill>
@@ -5010,92 +5065,43 @@
               </a:defRPr>
             </a:pPr>
             <a:r>
-              <a:t>   All land at bubble peaks/troughs. Segment slopes 2.1-5.2 bracket 5.08.</a:t>
-            </a:r>
-          </a:p>
-          <a:p>
-            <a:pPr lvl="1">
-              <a:defRPr sz="1200" b="0">
-                <a:solidFill>
-                  <a:srgbClr val="888888"/>
-                </a:solidFill>
-                <a:latin typeface="Calibri"/>
-              </a:defRPr>
-            </a:pPr>
-            <a:r>
-              <a:t>   These are cycle boundaries, not permanent regime shifts.</a:t>
-            </a:r>
-          </a:p>
-          <a:p>
-            <a:pPr>
-              <a:defRPr sz="400" b="0">
-                <a:solidFill>
-                  <a:srgbClr val="EEEEEE"/>
-                </a:solidFill>
-                <a:latin typeface="Calibri"/>
-              </a:defRPr>
-            </a:pPr>
-          </a:p>
-          <a:p>
-            <a:pPr>
-              <a:defRPr sz="1400" b="1">
-                <a:solidFill>
-                  <a:srgbClr val="5DADE2"/>
-                </a:solidFill>
-                <a:latin typeface="Calibri"/>
-              </a:defRPr>
-            </a:pPr>
-            <a:r>
-              <a:t>4. Chow test: F-tests significant (p≈0) at each break</a:t>
-            </a:r>
-          </a:p>
-          <a:p>
-            <a:pPr lvl="1">
-              <a:defRPr sz="1200" b="0">
-                <a:solidFill>
-                  <a:srgbClr val="888888"/>
-                </a:solidFill>
-                <a:latin typeface="Calibri"/>
-              </a:defRPr>
-            </a:pPr>
-            <a:r>
-              <a:t>   Expected whenever bubbles temporarily alter the slope. Significance ≠ permanence.</a:t>
-            </a:r>
-          </a:p>
-          <a:p>
-            <a:pPr>
-              <a:defRPr sz="400" b="0">
-                <a:solidFill>
-                  <a:srgbClr val="EEEEEE"/>
-                </a:solidFill>
-                <a:latin typeface="Calibri"/>
-              </a:defRPr>
-            </a:pPr>
-          </a:p>
-          <a:p>
-            <a:pPr>
-              <a:defRPr sz="1400" b="1">
-                <a:solidFill>
-                  <a:srgbClr val="5DADE2"/>
-                </a:solidFill>
-                <a:latin typeface="Calibri"/>
-              </a:defRPr>
-            </a:pPr>
-            <a:r>
-              <a:t>5. CUSUM: residual sum wanders above/below zero in wave pattern</a:t>
-            </a:r>
-          </a:p>
-          <a:p>
-            <a:pPr lvl="1">
-              <a:defRPr sz="1200" b="0">
-                <a:solidFill>
-                  <a:srgbClr val="888888"/>
-                </a:solidFill>
-                <a:latin typeface="Calibri"/>
-              </a:defRPr>
-            </a:pPr>
-            <a:r>
-              <a:t>   Classic bubble oscillation. No sharp one-way departure = no true structural break.</a:t>
+              <a:t>First dollar rate: Oct 2009 (New Liberty Standard, 1,309 BTC = $1)</a:t>
+            </a:r>
+          </a:p>
+          <a:p>
+            <a:pPr>
+              <a:defRPr sz="800" b="0">
+                <a:solidFill>
+                  <a:srgbClr val="EEEEEE"/>
+                </a:solidFill>
+                <a:latin typeface="Calibri"/>
+              </a:defRPr>
+            </a:pPr>
+          </a:p>
+          <a:p>
+            <a:pPr>
+              <a:defRPr sz="1500" b="0">
+                <a:solidFill>
+                  <a:srgbClr val="EEEEEE"/>
+                </a:solidFill>
+                <a:latin typeface="Calibri"/>
+              </a:defRPr>
+            </a:pPr>
+            <a:r>
+              <a:t>Interpretation: the power law may reflect the moment Bitcoin transitions from</a:t>
+            </a:r>
+          </a:p>
+          <a:p>
+            <a:pPr>
+              <a:defRPr sz="1500" b="0">
+                <a:solidFill>
+                  <a:srgbClr val="EEEEEE"/>
+                </a:solidFill>
+                <a:latin typeface="Calibri"/>
+              </a:defRPr>
+            </a:pPr>
+            <a:r>
+              <a:t>"experiment" to "nascent monetary system" — even before anyone could price it</a:t>
             </a:r>
           </a:p>
         </p:txBody>
@@ -5200,45 +5206,21 @@
               </a:defRPr>
             </a:pPr>
             <a:r>
-              <a:t>Regime Analysis: Rolling Slopes + Structural Breaks</a:t>
-            </a:r>
-          </a:p>
-        </p:txBody>
-      </p:sp>
-      <p:pic>
-        <p:nvPicPr>
-          <p:cNvPr id="4" name="Picture 3" descr="regime_analysis.jpg"/>
-          <p:cNvPicPr>
-            <a:picLocks noChangeAspect="1"/>
-          </p:cNvPicPr>
-          <p:nvPr/>
-        </p:nvPicPr>
-        <p:blipFill>
-          <a:blip r:embed="rId2"/>
-          <a:stretch>
-            <a:fillRect/>
-          </a:stretch>
-        </p:blipFill>
-        <p:spPr>
-          <a:xfrm>
-            <a:off x="457200" y="1005840"/>
-            <a:ext cx="7315200" cy="9529665"/>
-          </a:xfrm>
-          <a:prstGeom prst="rect">
-            <a:avLst/>
-          </a:prstGeom>
-        </p:spPr>
-      </p:pic>
-      <p:sp>
-        <p:nvSpPr>
-          <p:cNvPr id="5" name="TextBox 4"/>
+              <a:t>Three Tests Converge on July 2009</a:t>
+            </a:r>
+          </a:p>
+        </p:txBody>
+      </p:sp>
+      <p:sp>
+        <p:nvSpPr>
+          <p:cNvPr id="4" name="TextBox 3"/>
           <p:cNvSpPr txBox="1"/>
           <p:nvPr/>
         </p:nvSpPr>
         <p:spPr>
           <a:xfrm>
-            <a:off x="8046720" y="1097280"/>
-            <a:ext cx="3840480" cy="5029200"/>
+            <a:off x="457200" y="1097280"/>
+            <a:ext cx="10515600" cy="5029200"/>
           </a:xfrm>
           <a:prstGeom prst="rect">
             <a:avLst/>
@@ -5252,17 +5234,17 @@
           <a:lstStyle/>
           <a:p>
             <a:pPr algn="l">
-              <a:defRPr sz="1300" b="0">
-                <a:solidFill>
-                  <a:srgbClr val="EEEEEE"/>
-                </a:solidFill>
-                <a:latin typeface="Calibri"/>
-              </a:defRPr>
-            </a:pPr>
-          </a:p>
-          <a:p>
-            <a:pPr>
-              <a:defRPr sz="1400" b="1">
+              <a:defRPr sz="1600" b="0">
+                <a:solidFill>
+                  <a:srgbClr val="EEEEEE"/>
+                </a:solidFill>
+                <a:latin typeface="Calibri"/>
+              </a:defRPr>
+            </a:pPr>
+          </a:p>
+          <a:p>
+            <a:pPr>
+              <a:defRPr sz="1800" b="1">
                 <a:solidFill>
                   <a:srgbClr val="F7931A"/>
                 </a:solidFill>
@@ -5270,46 +5252,43 @@
               </a:defRPr>
             </a:pPr>
             <a:r>
-              <a:t>Rolling 2yr OLS slope</a:t>
-            </a:r>
-          </a:p>
-          <a:p>
-            <a:pPr>
-              <a:defRPr sz="1300" b="0">
-                <a:solidFill>
-                  <a:srgbClr val="EEEEEE"/>
-                </a:solidFill>
-                <a:latin typeface="Calibri"/>
-              </a:defRPr>
-            </a:pPr>
-            <a:r>
-              <a:t>oscillates wildly with</a:t>
-            </a:r>
-          </a:p>
-          <a:p>
-            <a:pPr>
-              <a:defRPr sz="1300" b="0">
-                <a:solidFill>
-                  <a:srgbClr val="EEEEEE"/>
-                </a:solidFill>
-                <a:latin typeface="Calibri"/>
-              </a:defRPr>
-            </a:pPr>
-            <a:r>
-              <a:t>bubble cycles but always</a:t>
-            </a:r>
-          </a:p>
-          <a:p>
-            <a:pPr>
-              <a:defRPr sz="1300" b="0">
-                <a:solidFill>
-                  <a:srgbClr val="EEEEEE"/>
-                </a:solidFill>
-                <a:latin typeface="Calibri"/>
-              </a:defRPr>
-            </a:pPr>
-            <a:r>
-              <a:t>returns to β≈5.0</a:t>
+              <a:t>The optimal time origin was confirmed by three independent statistical tests:</a:t>
+            </a:r>
+          </a:p>
+          <a:p>
+            <a:pPr>
+              <a:defRPr sz="800" b="0">
+                <a:solidFill>
+                  <a:srgbClr val="EEEEEE"/>
+                </a:solidFill>
+                <a:latin typeface="Calibri"/>
+              </a:defRPr>
+            </a:pPr>
+          </a:p>
+          <a:p>
+            <a:pPr>
+              <a:defRPr sz="1800" b="1">
+                <a:solidFill>
+                  <a:srgbClr val="5DADE2"/>
+                </a:solidFill>
+                <a:latin typeface="Calibri"/>
+              </a:defRPr>
+            </a:pPr>
+            <a:r>
+              <a:t>1. Durbin-Watson test for autocorrelation in residuals</a:t>
+            </a:r>
+          </a:p>
+          <a:p>
+            <a:pPr lvl="1">
+              <a:defRPr sz="1400" b="0">
+                <a:solidFill>
+                  <a:srgbClr val="888888"/>
+                </a:solidFill>
+                <a:latin typeface="Calibri"/>
+              </a:defRPr>
+            </a:pPr>
+            <a:r>
+              <a:t>   Residuals closest to white noise at genesis ≈ July 2009</a:t>
             </a:r>
           </a:p>
           <a:p>
@@ -5324,54 +5303,28 @@
           </a:p>
           <a:p>
             <a:pPr>
-              <a:defRPr sz="1400" b="1">
-                <a:solidFill>
-                  <a:srgbClr val="E74C3C"/>
-                </a:solidFill>
-                <a:latin typeface="Calibri"/>
-              </a:defRPr>
-            </a:pPr>
-            <a:r>
-              <a:t>Bai-Perron breaks all</a:t>
-            </a:r>
-          </a:p>
-          <a:p>
-            <a:pPr>
-              <a:defRPr sz="1300" b="0">
-                <a:solidFill>
-                  <a:srgbClr val="EEEEEE"/>
-                </a:solidFill>
-                <a:latin typeface="Calibri"/>
-              </a:defRPr>
-            </a:pPr>
-            <a:r>
-              <a:t>coincide with cycle</a:t>
-            </a:r>
-          </a:p>
-          <a:p>
-            <a:pPr>
-              <a:defRPr sz="1300" b="0">
-                <a:solidFill>
-                  <a:srgbClr val="EEEEEE"/>
-                </a:solidFill>
-                <a:latin typeface="Calibri"/>
-              </a:defRPr>
-            </a:pPr>
-            <a:r>
-              <a:t>peaks and troughs —</a:t>
-            </a:r>
-          </a:p>
-          <a:p>
-            <a:pPr>
-              <a:defRPr sz="1300" b="0">
-                <a:solidFill>
-                  <a:srgbClr val="EEEEEE"/>
-                </a:solidFill>
-                <a:latin typeface="Calibri"/>
-              </a:defRPr>
-            </a:pPr>
-            <a:r>
-              <a:t>not permanent shifts</a:t>
+              <a:defRPr sz="1800" b="1">
+                <a:solidFill>
+                  <a:srgbClr val="5DADE2"/>
+                </a:solidFill>
+                <a:latin typeface="Calibri"/>
+              </a:defRPr>
+            </a:pPr>
+            <a:r>
+              <a:t>2. Out-of-sample RMSE (train/test split)</a:t>
+            </a:r>
+          </a:p>
+          <a:p>
+            <a:pPr lvl="1">
+              <a:defRPr sz="1400" b="0">
+                <a:solidFill>
+                  <a:srgbClr val="888888"/>
+                </a:solidFill>
+                <a:latin typeface="Calibri"/>
+              </a:defRPr>
+            </a:pPr>
+            <a:r>
+              <a:t>   Best predictive accuracy when genesis ≈ July 2009</a:t>
             </a:r>
           </a:p>
           <a:p>
@@ -5386,7 +5339,7 @@
           </a:p>
           <a:p>
             <a:pPr>
-              <a:defRPr sz="1400" b="1">
+              <a:defRPr sz="1800" b="1">
                 <a:solidFill>
                   <a:srgbClr val="5DADE2"/>
                 </a:solidFill>
@@ -5394,20 +5347,79 @@
               </a:defRPr>
             </a:pPr>
             <a:r>
-              <a:t>CUSUM shows oscillation,</a:t>
-            </a:r>
-          </a:p>
-          <a:p>
-            <a:pPr>
-              <a:defRPr sz="1300" b="0">
-                <a:solidFill>
-                  <a:srgbClr val="EEEEEE"/>
-                </a:solidFill>
-                <a:latin typeface="Calibri"/>
-              </a:defRPr>
-            </a:pPr>
-            <a:r>
-              <a:t>not departure</a:t>
+              <a:t>3. Slope stability across subsets</a:t>
+            </a:r>
+          </a:p>
+          <a:p>
+            <a:pPr lvl="1">
+              <a:defRPr sz="1400" b="0">
+                <a:solidFill>
+                  <a:srgbClr val="888888"/>
+                </a:solidFill>
+                <a:latin typeface="Calibri"/>
+              </a:defRPr>
+            </a:pPr>
+            <a:r>
+              <a:t>   Exponent most consistent when genesis ≈ July 2009</a:t>
+            </a:r>
+          </a:p>
+          <a:p>
+            <a:pPr>
+              <a:defRPr sz="800" b="0">
+                <a:solidFill>
+                  <a:srgbClr val="EEEEEE"/>
+                </a:solidFill>
+                <a:latin typeface="Calibri"/>
+              </a:defRPr>
+            </a:pPr>
+          </a:p>
+          <a:p>
+            <a:pPr>
+              <a:defRPr sz="1600" b="1">
+                <a:solidFill>
+                  <a:srgbClr val="2ECC71"/>
+                </a:solidFill>
+                <a:latin typeface="Calibri"/>
+              </a:defRPr>
+            </a:pPr>
+            <a:r>
+              <a:t>546 candidate dates tested — all three tests converge on the same narrow window</a:t>
+            </a:r>
+          </a:p>
+          <a:p>
+            <a:pPr>
+              <a:defRPr sz="600" b="0">
+                <a:solidFill>
+                  <a:srgbClr val="EEEEEE"/>
+                </a:solidFill>
+                <a:latin typeface="Calibri"/>
+              </a:defRPr>
+            </a:pPr>
+          </a:p>
+          <a:p>
+            <a:pPr>
+              <a:defRPr sz="1600" b="0">
+                <a:solidFill>
+                  <a:srgbClr val="EEEEEE"/>
+                </a:solidFill>
+                <a:latin typeface="Calibri"/>
+              </a:defRPr>
+            </a:pPr>
+            <a:r>
+              <a:t>Distinct from the Bitcoin genesis block (Jan 3, 2009) — this is a statistical</a:t>
+            </a:r>
+          </a:p>
+          <a:p>
+            <a:pPr>
+              <a:defRPr sz="1600" b="0">
+                <a:solidFill>
+                  <a:srgbClr val="EEEEEE"/>
+                </a:solidFill>
+                <a:latin typeface="Calibri"/>
+              </a:defRPr>
+            </a:pPr>
+            <a:r>
+              <a:t>property of the price data, not a specific economic event</a:t>
             </a:r>
           </a:p>
         </p:txBody>
@@ -5512,45 +5524,21 @@
               </a:defRPr>
             </a:pPr>
             <a:r>
-              <a:t>Conclusion: One Regime, One Power Law</a:t>
-            </a:r>
-          </a:p>
-        </p:txBody>
-      </p:sp>
-      <p:pic>
-        <p:nvPicPr>
-          <p:cNvPr id="4" name="Picture 3" descr="regime_analysis_table.jpg"/>
-          <p:cNvPicPr>
-            <a:picLocks noChangeAspect="1"/>
-          </p:cNvPicPr>
-          <p:nvPr/>
-        </p:nvPicPr>
-        <p:blipFill>
-          <a:blip r:embed="rId2"/>
-          <a:stretch>
-            <a:fillRect/>
-          </a:stretch>
-        </p:blipFill>
-        <p:spPr>
-          <a:xfrm>
-            <a:off x="457200" y="1005840"/>
-            <a:ext cx="6400800" cy="3072288"/>
-          </a:xfrm>
-          <a:prstGeom prst="rect">
-            <a:avLst/>
-          </a:prstGeom>
-        </p:spPr>
-      </p:pic>
-      <p:sp>
-        <p:nvSpPr>
-          <p:cNvPr id="5" name="TextBox 4"/>
+              <a:t>Is the Power Law a Single Regime?</a:t>
+            </a:r>
+          </a:p>
+        </p:txBody>
+      </p:sp>
+      <p:sp>
+        <p:nvSpPr>
+          <p:cNvPr id="4" name="TextBox 3"/>
           <p:cNvSpPr txBox="1"/>
           <p:nvPr/>
         </p:nvSpPr>
         <p:spPr>
           <a:xfrm>
-            <a:off x="7132320" y="1097280"/>
-            <a:ext cx="4754880" cy="5029200"/>
+            <a:off x="457200" y="1005840"/>
+            <a:ext cx="10972800" cy="5303520"/>
           </a:xfrm>
           <a:prstGeom prst="rect">
             <a:avLst/>
@@ -5564,38 +5552,38 @@
           <a:lstStyle/>
           <a:p>
             <a:pPr algn="l">
-              <a:defRPr sz="1400" b="0">
-                <a:solidFill>
-                  <a:srgbClr val="EEEEEE"/>
-                </a:solidFill>
-                <a:latin typeface="Calibri"/>
-              </a:defRPr>
-            </a:pPr>
-          </a:p>
-          <a:p>
-            <a:pPr>
-              <a:defRPr sz="1800" b="1">
-                <a:solidFill>
-                  <a:srgbClr val="2ECC71"/>
-                </a:solidFill>
-                <a:latin typeface="Calibri"/>
-              </a:defRPr>
-            </a:pPr>
-            <a:r>
-              <a:t>Bitcoin follows a single</a:t>
-            </a:r>
-          </a:p>
-          <a:p>
-            <a:pPr>
-              <a:defRPr sz="1800" b="1">
-                <a:solidFill>
-                  <a:srgbClr val="2ECC71"/>
-                </a:solidFill>
-                <a:latin typeface="Calibri"/>
-              </a:defRPr>
-            </a:pPr>
-            <a:r>
-              <a:t>power law regime</a:t>
+              <a:defRPr sz="1500" b="0">
+                <a:solidFill>
+                  <a:srgbClr val="EEEEEE"/>
+                </a:solidFill>
+                <a:latin typeface="Calibri"/>
+              </a:defRPr>
+            </a:pPr>
+          </a:p>
+          <a:p>
+            <a:pPr>
+              <a:defRPr sz="1600" b="0">
+                <a:solidFill>
+                  <a:srgbClr val="EEEEEE"/>
+                </a:solidFill>
+                <a:latin typeface="Calibri"/>
+              </a:defRPr>
+            </a:pPr>
+            <a:r>
+              <a:t>If residuals are autocorrelated (DW≈0.004), does that imply structural</a:t>
+            </a:r>
+          </a:p>
+          <a:p>
+            <a:pPr>
+              <a:defRPr sz="1600" b="0">
+                <a:solidFill>
+                  <a:srgbClr val="EEEEEE"/>
+                </a:solidFill>
+                <a:latin typeface="Calibri"/>
+              </a:defRPr>
+            </a:pPr>
+            <a:r>
+              <a:t>regime changes — different power law slopes in different eras?</a:t>
             </a:r>
           </a:p>
           <a:p>
@@ -5610,79 +5598,7 @@
           </a:p>
           <a:p>
             <a:pPr>
-              <a:defRPr sz="1400" b="0">
-                <a:solidFill>
-                  <a:srgbClr val="EEEEEE"/>
-                </a:solidFill>
-                <a:latin typeface="Calibri"/>
-              </a:defRPr>
-            </a:pPr>
-            <a:r>
-              <a:t>λ = 0 (Box-Cox)</a:t>
-            </a:r>
-          </a:p>
-          <a:p>
-            <a:pPr>
-              <a:defRPr sz="1400" b="0">
-                <a:solidFill>
-                  <a:srgbClr val="EEEEEE"/>
-                </a:solidFill>
-                <a:latin typeface="Calibri"/>
-              </a:defRPr>
-            </a:pPr>
-            <a:r>
-              <a:t>→ log-log is exact</a:t>
-            </a:r>
-          </a:p>
-          <a:p>
-            <a:pPr>
-              <a:defRPr sz="600" b="0">
-                <a:solidFill>
-                  <a:srgbClr val="EEEEEE"/>
-                </a:solidFill>
-                <a:latin typeface="Calibri"/>
-              </a:defRPr>
-            </a:pPr>
-          </a:p>
-          <a:p>
-            <a:pPr>
-              <a:defRPr sz="1400" b="0">
-                <a:solidFill>
-                  <a:srgbClr val="EEEEEE"/>
-                </a:solidFill>
-                <a:latin typeface="Calibri"/>
-              </a:defRPr>
-            </a:pPr>
-            <a:r>
-              <a:t>β ≈ 5.08 (full sample)</a:t>
-            </a:r>
-          </a:p>
-          <a:p>
-            <a:pPr>
-              <a:defRPr sz="1400" b="0">
-                <a:solidFill>
-                  <a:srgbClr val="EEEEEE"/>
-                </a:solidFill>
-                <a:latin typeface="Calibri"/>
-              </a:defRPr>
-            </a:pPr>
-            <a:r>
-              <a:t>→ same slope since 2010</a:t>
-            </a:r>
-          </a:p>
-          <a:p>
-            <a:pPr>
-              <a:defRPr sz="600" b="0">
-                <a:solidFill>
-                  <a:srgbClr val="EEEEEE"/>
-                </a:solidFill>
-                <a:latin typeface="Calibri"/>
-              </a:defRPr>
-            </a:pPr>
-          </a:p>
-          <a:p>
-            <a:pPr>
-              <a:defRPr sz="1400" b="0">
+              <a:defRPr sz="1600" b="1">
                 <a:solidFill>
                   <a:srgbClr val="F7931A"/>
                 </a:solidFill>
@@ -5690,108 +5606,200 @@
               </a:defRPr>
             </a:pPr>
             <a:r>
-              <a:t>DW ≈ 0 and structural</a:t>
-            </a:r>
-          </a:p>
-          <a:p>
-            <a:pPr>
-              <a:defRPr sz="1400" b="0">
-                <a:solidFill>
-                  <a:srgbClr val="F7931A"/>
-                </a:solidFill>
-                <a:latin typeface="Calibri"/>
-              </a:defRPr>
-            </a:pPr>
-            <a:r>
-              <a:t>breaks reflect cyclic</a:t>
-            </a:r>
-          </a:p>
-          <a:p>
-            <a:pPr>
-              <a:defRPr sz="1400" b="0">
-                <a:solidFill>
-                  <a:srgbClr val="F7931A"/>
-                </a:solidFill>
-                <a:latin typeface="Calibri"/>
-              </a:defRPr>
-            </a:pPr>
-            <a:r>
-              <a:t>bubble deviations, not</a:t>
-            </a:r>
-          </a:p>
-          <a:p>
-            <a:pPr>
-              <a:defRPr sz="1400" b="0">
-                <a:solidFill>
-                  <a:srgbClr val="F7931A"/>
-                </a:solidFill>
-                <a:latin typeface="Calibri"/>
-              </a:defRPr>
-            </a:pPr>
-            <a:r>
-              <a:t>permanent regime changes</a:t>
-            </a:r>
-          </a:p>
-          <a:p>
-            <a:pPr>
-              <a:defRPr sz="800" b="0">
-                <a:solidFill>
-                  <a:srgbClr val="EEEEEE"/>
-                </a:solidFill>
-                <a:latin typeface="Calibri"/>
-              </a:defRPr>
-            </a:pPr>
-          </a:p>
-          <a:p>
-            <a:pPr>
-              <a:defRPr sz="1400" b="0">
-                <a:solidFill>
-                  <a:srgbClr val="EEEEEE"/>
-                </a:solidFill>
-                <a:latin typeface="Calibri"/>
-              </a:defRPr>
-            </a:pPr>
-            <a:r>
-              <a:t>The slope oscillates with</a:t>
-            </a:r>
-          </a:p>
-          <a:p>
-            <a:pPr>
-              <a:defRPr sz="1400" b="0">
-                <a:solidFill>
-                  <a:srgbClr val="EEEEEE"/>
-                </a:solidFill>
-                <a:latin typeface="Calibri"/>
-              </a:defRPr>
-            </a:pPr>
-            <a:r>
-              <a:t>market cycles but always</a:t>
-            </a:r>
-          </a:p>
-          <a:p>
-            <a:pPr>
-              <a:defRPr sz="1400" b="0">
-                <a:solidFill>
-                  <a:srgbClr val="EEEEEE"/>
-                </a:solidFill>
-                <a:latin typeface="Calibri"/>
-              </a:defRPr>
-            </a:pPr>
-            <a:r>
-              <a:t>reverts to the same</a:t>
-            </a:r>
-          </a:p>
-          <a:p>
-            <a:pPr>
-              <a:defRPr sz="1400" b="0">
-                <a:solidFill>
-                  <a:srgbClr val="EEEEEE"/>
-                </a:solidFill>
-                <a:latin typeface="Calibri"/>
-              </a:defRPr>
-            </a:pPr>
-            <a:r>
-              <a:t>long-term trend.</a:t>
+              <a:t>Five econometric tests on all available data (2010-2026, N=5,714):</a:t>
+            </a:r>
+          </a:p>
+          <a:p>
+            <a:pPr>
+              <a:defRPr sz="400" b="0">
+                <a:solidFill>
+                  <a:srgbClr val="EEEEEE"/>
+                </a:solidFill>
+                <a:latin typeface="Calibri"/>
+              </a:defRPr>
+            </a:pPr>
+          </a:p>
+          <a:p>
+            <a:pPr>
+              <a:defRPr sz="1400" b="1">
+                <a:solidFill>
+                  <a:srgbClr val="5DADE2"/>
+                </a:solidFill>
+                <a:latin typeface="Calibri"/>
+              </a:defRPr>
+            </a:pPr>
+            <a:r>
+              <a:t>1. Box-Cox λ sweep: optimal λ=0.012 ≈ 0 (pure log-log)</a:t>
+            </a:r>
+          </a:p>
+          <a:p>
+            <a:pPr lvl="1">
+              <a:defRPr sz="1200" b="0">
+                <a:solidFill>
+                  <a:srgbClr val="888888"/>
+                </a:solidFill>
+                <a:latin typeface="Calibri"/>
+              </a:defRPr>
+            </a:pPr>
+            <a:r>
+              <a:t>   RMSE improves only 0.03% over λ=0. Power law IS the correct form.</a:t>
+            </a:r>
+          </a:p>
+          <a:p>
+            <a:pPr>
+              <a:defRPr sz="400" b="0">
+                <a:solidFill>
+                  <a:srgbClr val="EEEEEE"/>
+                </a:solidFill>
+                <a:latin typeface="Calibri"/>
+              </a:defRPr>
+            </a:pPr>
+          </a:p>
+          <a:p>
+            <a:pPr>
+              <a:defRPr sz="1400" b="1">
+                <a:solidFill>
+                  <a:srgbClr val="5DADE2"/>
+                </a:solidFill>
+                <a:latin typeface="Calibri"/>
+              </a:defRPr>
+            </a:pPr>
+            <a:r>
+              <a:t>2. Rolling regression (2yr window): slope oscillates ≈ −8 to +15</a:t>
+            </a:r>
+          </a:p>
+          <a:p>
+            <a:pPr lvl="1">
+              <a:defRPr sz="1200" b="0">
+                <a:solidFill>
+                  <a:srgbClr val="888888"/>
+                </a:solidFill>
+                <a:latin typeface="Calibri"/>
+              </a:defRPr>
+            </a:pPr>
+            <a:r>
+              <a:t>   But always mean-reverts to ~5.0. If regime changed, slope would stay shifted.</a:t>
+            </a:r>
+          </a:p>
+          <a:p>
+            <a:pPr>
+              <a:defRPr sz="400" b="0">
+                <a:solidFill>
+                  <a:srgbClr val="EEEEEE"/>
+                </a:solidFill>
+                <a:latin typeface="Calibri"/>
+              </a:defRPr>
+            </a:pPr>
+          </a:p>
+          <a:p>
+            <a:pPr>
+              <a:defRPr sz="1400" b="1">
+                <a:solidFill>
+                  <a:srgbClr val="5DADE2"/>
+                </a:solidFill>
+                <a:latin typeface="Calibri"/>
+              </a:defRPr>
+            </a:pPr>
+            <a:r>
+              <a:t>3. Bai-Perron structural breakpoints: 6 breaks found (2011-2020)</a:t>
+            </a:r>
+          </a:p>
+          <a:p>
+            <a:pPr lvl="1">
+              <a:defRPr sz="1200" b="0">
+                <a:solidFill>
+                  <a:srgbClr val="888888"/>
+                </a:solidFill>
+                <a:latin typeface="Calibri"/>
+              </a:defRPr>
+            </a:pPr>
+            <a:r>
+              <a:t>   All land at bubble peaks/troughs. Segment slopes 2.1-5.2 bracket 5.08.</a:t>
+            </a:r>
+          </a:p>
+          <a:p>
+            <a:pPr lvl="1">
+              <a:defRPr sz="1200" b="0">
+                <a:solidFill>
+                  <a:srgbClr val="888888"/>
+                </a:solidFill>
+                <a:latin typeface="Calibri"/>
+              </a:defRPr>
+            </a:pPr>
+            <a:r>
+              <a:t>   These are cycle boundaries, not permanent regime shifts.</a:t>
+            </a:r>
+          </a:p>
+          <a:p>
+            <a:pPr>
+              <a:defRPr sz="400" b="0">
+                <a:solidFill>
+                  <a:srgbClr val="EEEEEE"/>
+                </a:solidFill>
+                <a:latin typeface="Calibri"/>
+              </a:defRPr>
+            </a:pPr>
+          </a:p>
+          <a:p>
+            <a:pPr>
+              <a:defRPr sz="1400" b="1">
+                <a:solidFill>
+                  <a:srgbClr val="5DADE2"/>
+                </a:solidFill>
+                <a:latin typeface="Calibri"/>
+              </a:defRPr>
+            </a:pPr>
+            <a:r>
+              <a:t>4. Chow test: F-tests significant (p≈0) at each break</a:t>
+            </a:r>
+          </a:p>
+          <a:p>
+            <a:pPr lvl="1">
+              <a:defRPr sz="1200" b="0">
+                <a:solidFill>
+                  <a:srgbClr val="888888"/>
+                </a:solidFill>
+                <a:latin typeface="Calibri"/>
+              </a:defRPr>
+            </a:pPr>
+            <a:r>
+              <a:t>   Expected whenever bubbles temporarily alter the slope. Significance ≠ permanence.</a:t>
+            </a:r>
+          </a:p>
+          <a:p>
+            <a:pPr>
+              <a:defRPr sz="400" b="0">
+                <a:solidFill>
+                  <a:srgbClr val="EEEEEE"/>
+                </a:solidFill>
+                <a:latin typeface="Calibri"/>
+              </a:defRPr>
+            </a:pPr>
+          </a:p>
+          <a:p>
+            <a:pPr>
+              <a:defRPr sz="1400" b="1">
+                <a:solidFill>
+                  <a:srgbClr val="5DADE2"/>
+                </a:solidFill>
+                <a:latin typeface="Calibri"/>
+              </a:defRPr>
+            </a:pPr>
+            <a:r>
+              <a:t>5. CUSUM: residual sum wanders above/below zero in wave pattern</a:t>
+            </a:r>
+          </a:p>
+          <a:p>
+            <a:pPr lvl="1">
+              <a:defRPr sz="1200" b="0">
+                <a:solidFill>
+                  <a:srgbClr val="888888"/>
+                </a:solidFill>
+                <a:latin typeface="Calibri"/>
+              </a:defRPr>
+            </a:pPr>
+            <a:r>
+              <a:t>   Classic bubble oscillation. No sharp one-way departure = no true structural break.</a:t>
             </a:r>
           </a:p>
         </p:txBody>
@@ -5896,21 +5904,45 @@
               </a:defRPr>
             </a:pPr>
             <a:r>
-              <a:t>What's On Top of the Power Law?</a:t>
-            </a:r>
-          </a:p>
-        </p:txBody>
-      </p:sp>
-      <p:sp>
-        <p:nvSpPr>
-          <p:cNvPr id="4" name="TextBox 3"/>
+              <a:t>Regime Analysis: Rolling Slopes + Structural Breaks</a:t>
+            </a:r>
+          </a:p>
+        </p:txBody>
+      </p:sp>
+      <p:pic>
+        <p:nvPicPr>
+          <p:cNvPr id="4" name="Picture 3" descr="regime_analysis.jpg"/>
+          <p:cNvPicPr>
+            <a:picLocks noChangeAspect="1"/>
+          </p:cNvPicPr>
+          <p:nvPr/>
+        </p:nvPicPr>
+        <p:blipFill>
+          <a:blip r:embed="rId2"/>
+          <a:stretch>
+            <a:fillRect/>
+          </a:stretch>
+        </p:blipFill>
+        <p:spPr>
+          <a:xfrm>
+            <a:off x="457200" y="1005840"/>
+            <a:ext cx="7315200" cy="9529665"/>
+          </a:xfrm>
+          <a:prstGeom prst="rect">
+            <a:avLst/>
+          </a:prstGeom>
+        </p:spPr>
+      </p:pic>
+      <p:sp>
+        <p:nvSpPr>
+          <p:cNvPr id="5" name="TextBox 4"/>
           <p:cNvSpPr txBox="1"/>
           <p:nvPr/>
         </p:nvSpPr>
         <p:spPr>
           <a:xfrm>
-            <a:off x="731520" y="1097280"/>
-            <a:ext cx="10058400" cy="5029200"/>
+            <a:off x="8046720" y="1097280"/>
+            <a:ext cx="3840480" cy="5029200"/>
           </a:xfrm>
           <a:prstGeom prst="rect">
             <a:avLst/>
@@ -5924,63 +5956,17 @@
           <a:lstStyle/>
           <a:p>
             <a:pPr algn="l">
-              <a:defRPr sz="1800" b="0">
-                <a:solidFill>
-                  <a:srgbClr val="EEEEEE"/>
-                </a:solidFill>
-                <a:latin typeface="Calibri"/>
-              </a:defRPr>
-            </a:pPr>
-          </a:p>
-          <a:p>
-            <a:pPr>
-              <a:defRPr sz="2200" b="1">
-                <a:solidFill>
-                  <a:srgbClr val="EEEEEE"/>
-                </a:solidFill>
-                <a:latin typeface="Calibri"/>
-              </a:defRPr>
-            </a:pPr>
-            <a:r>
-              <a:t>Price = Power Law Trend + Oscillations + Noise</a:t>
-            </a:r>
-          </a:p>
-          <a:p>
-            <a:pPr>
-              <a:defRPr sz="1000" b="0">
-                <a:solidFill>
-                  <a:srgbClr val="EEEEEE"/>
-                </a:solidFill>
-                <a:latin typeface="Calibri"/>
-              </a:defRPr>
-            </a:pPr>
-          </a:p>
-          <a:p>
-            <a:pPr>
-              <a:defRPr sz="1800" b="0">
-                <a:solidFill>
-                  <a:srgbClr val="EEEEEE"/>
-                </a:solidFill>
-                <a:latin typeface="Calibri"/>
-              </a:defRPr>
-            </a:pPr>
-            <a:r>
-              <a:t>The central question: what are the oscillations, and can we predict them?</a:t>
-            </a:r>
-          </a:p>
-          <a:p>
-            <a:pPr>
-              <a:defRPr sz="1000" b="0">
-                <a:solidFill>
-                  <a:srgbClr val="EEEEEE"/>
-                </a:solidFill>
-                <a:latin typeface="Calibri"/>
-              </a:defRPr>
-            </a:pPr>
-          </a:p>
-          <a:p>
-            <a:pPr>
-              <a:defRPr sz="1800" b="1">
+              <a:defRPr sz="1300" b="0">
+                <a:solidFill>
+                  <a:srgbClr val="EEEEEE"/>
+                </a:solidFill>
+                <a:latin typeface="Calibri"/>
+              </a:defRPr>
+            </a:pPr>
+          </a:p>
+          <a:p>
+            <a:pPr>
+              <a:defRPr sz="1400" b="1">
                 <a:solidFill>
                   <a:srgbClr val="F7931A"/>
                 </a:solidFill>
@@ -5988,72 +5974,144 @@
               </a:defRPr>
             </a:pPr>
             <a:r>
-              <a:t>Investigation scope:</a:t>
-            </a:r>
-          </a:p>
-          <a:p>
-            <a:pPr lvl="1">
-              <a:defRPr sz="1600" b="0">
-                <a:solidFill>
-                  <a:srgbClr val="888888"/>
-                </a:solidFill>
-                <a:latin typeface="Calibri"/>
-              </a:defRPr>
-            </a:pPr>
-            <a:r>
-              <a:t>30+ model variants fitted via differential evolution</a:t>
-            </a:r>
-          </a:p>
-          <a:p>
-            <a:pPr lvl="1">
-              <a:defRPr sz="1600" b="0">
-                <a:solidFill>
-                  <a:srgbClr val="888888"/>
-                </a:solidFill>
-                <a:latin typeface="Calibri"/>
-              </a:defRPr>
-            </a:pPr>
-            <a:r>
-              <a:t>4 independent decomposition methods (PCA, EMD, DMD, sparse selection)</a:t>
-            </a:r>
-          </a:p>
-          <a:p>
-            <a:pPr lvl="1">
-              <a:defRPr sz="1600" b="0">
-                <a:solidFill>
-                  <a:srgbClr val="888888"/>
-                </a:solidFill>
-                <a:latin typeface="Calibri"/>
-              </a:defRPr>
-            </a:pPr>
-            <a:r>
-              <a:t>500+ basis functions tested (sinusoidal, triangle, flat-top, trapezoid, entropy-damped)</a:t>
-            </a:r>
-          </a:p>
-          <a:p>
-            <a:pPr lvl="1">
-              <a:defRPr sz="1600" b="0">
-                <a:solidFill>
-                  <a:srgbClr val="888888"/>
-                </a:solidFill>
-                <a:latin typeface="Calibri"/>
-              </a:defRPr>
-            </a:pPr>
-            <a:r>
-              <a:t>36 HybPPL configurations + 36 EPPL configurations pre-fitted</a:t>
-            </a:r>
-          </a:p>
-          <a:p>
-            <a:pPr lvl="1">
-              <a:defRPr sz="1600" b="0">
-                <a:solidFill>
-                  <a:srgbClr val="888888"/>
-                </a:solidFill>
-                <a:latin typeface="Calibri"/>
-              </a:defRPr>
-            </a:pPr>
-            <a:r>
-              <a:t>Non-sinusoidal wave shape analysis and bubble evolution study</a:t>
+              <a:t>Rolling 2yr OLS slope</a:t>
+            </a:r>
+          </a:p>
+          <a:p>
+            <a:pPr>
+              <a:defRPr sz="1300" b="0">
+                <a:solidFill>
+                  <a:srgbClr val="EEEEEE"/>
+                </a:solidFill>
+                <a:latin typeface="Calibri"/>
+              </a:defRPr>
+            </a:pPr>
+            <a:r>
+              <a:t>oscillates wildly with</a:t>
+            </a:r>
+          </a:p>
+          <a:p>
+            <a:pPr>
+              <a:defRPr sz="1300" b="0">
+                <a:solidFill>
+                  <a:srgbClr val="EEEEEE"/>
+                </a:solidFill>
+                <a:latin typeface="Calibri"/>
+              </a:defRPr>
+            </a:pPr>
+            <a:r>
+              <a:t>bubble cycles but always</a:t>
+            </a:r>
+          </a:p>
+          <a:p>
+            <a:pPr>
+              <a:defRPr sz="1300" b="0">
+                <a:solidFill>
+                  <a:srgbClr val="EEEEEE"/>
+                </a:solidFill>
+                <a:latin typeface="Calibri"/>
+              </a:defRPr>
+            </a:pPr>
+            <a:r>
+              <a:t>returns to β≈5.0</a:t>
+            </a:r>
+          </a:p>
+          <a:p>
+            <a:pPr>
+              <a:defRPr sz="600" b="0">
+                <a:solidFill>
+                  <a:srgbClr val="EEEEEE"/>
+                </a:solidFill>
+                <a:latin typeface="Calibri"/>
+              </a:defRPr>
+            </a:pPr>
+          </a:p>
+          <a:p>
+            <a:pPr>
+              <a:defRPr sz="1400" b="1">
+                <a:solidFill>
+                  <a:srgbClr val="E74C3C"/>
+                </a:solidFill>
+                <a:latin typeface="Calibri"/>
+              </a:defRPr>
+            </a:pPr>
+            <a:r>
+              <a:t>Bai-Perron breaks all</a:t>
+            </a:r>
+          </a:p>
+          <a:p>
+            <a:pPr>
+              <a:defRPr sz="1300" b="0">
+                <a:solidFill>
+                  <a:srgbClr val="EEEEEE"/>
+                </a:solidFill>
+                <a:latin typeface="Calibri"/>
+              </a:defRPr>
+            </a:pPr>
+            <a:r>
+              <a:t>coincide with cycle</a:t>
+            </a:r>
+          </a:p>
+          <a:p>
+            <a:pPr>
+              <a:defRPr sz="1300" b="0">
+                <a:solidFill>
+                  <a:srgbClr val="EEEEEE"/>
+                </a:solidFill>
+                <a:latin typeface="Calibri"/>
+              </a:defRPr>
+            </a:pPr>
+            <a:r>
+              <a:t>peaks and troughs —</a:t>
+            </a:r>
+          </a:p>
+          <a:p>
+            <a:pPr>
+              <a:defRPr sz="1300" b="0">
+                <a:solidFill>
+                  <a:srgbClr val="EEEEEE"/>
+                </a:solidFill>
+                <a:latin typeface="Calibri"/>
+              </a:defRPr>
+            </a:pPr>
+            <a:r>
+              <a:t>not permanent shifts</a:t>
+            </a:r>
+          </a:p>
+          <a:p>
+            <a:pPr>
+              <a:defRPr sz="600" b="0">
+                <a:solidFill>
+                  <a:srgbClr val="EEEEEE"/>
+                </a:solidFill>
+                <a:latin typeface="Calibri"/>
+              </a:defRPr>
+            </a:pPr>
+          </a:p>
+          <a:p>
+            <a:pPr>
+              <a:defRPr sz="1400" b="1">
+                <a:solidFill>
+                  <a:srgbClr val="5DADE2"/>
+                </a:solidFill>
+                <a:latin typeface="Calibri"/>
+              </a:defRPr>
+            </a:pPr>
+            <a:r>
+              <a:t>CUSUM shows oscillation,</a:t>
+            </a:r>
+          </a:p>
+          <a:p>
+            <a:pPr>
+              <a:defRPr sz="1300" b="0">
+                <a:solidFill>
+                  <a:srgbClr val="EEEEEE"/>
+                </a:solidFill>
+                <a:latin typeface="Calibri"/>
+              </a:defRPr>
+            </a:pPr>
+            <a:r>
+              <a:t>not departure</a:t>
             </a:r>
           </a:p>
         </p:txBody>
@@ -6158,14 +6216,14 @@
               </a:defRPr>
             </a:pPr>
             <a:r>
-              <a:t>Two Dominant Signals — Found Three Ways</a:t>
+              <a:t>Conclusion: One Regime, One Power Law</a:t>
             </a:r>
           </a:p>
         </p:txBody>
       </p:sp>
       <p:pic>
         <p:nvPicPr>
-          <p:cNvPr id="4" name="Picture 3" descr="three_methods.png"/>
+          <p:cNvPr id="4" name="Picture 3" descr="regime_analysis_table.jpg"/>
           <p:cNvPicPr>
             <a:picLocks noChangeAspect="1"/>
           </p:cNvPicPr>
@@ -6179,8 +6237,8 @@
         </p:blipFill>
         <p:spPr>
           <a:xfrm>
-            <a:off x="1371600" y="1097280"/>
-            <a:ext cx="9418320" cy="4492161"/>
+            <a:off x="457200" y="1005840"/>
+            <a:ext cx="6400800" cy="3072288"/>
           </a:xfrm>
           <a:prstGeom prst="rect">
             <a:avLst/>
@@ -6195,8 +6253,8 @@
         </p:nvSpPr>
         <p:spPr>
           <a:xfrm>
-            <a:off x="457200" y="5029200"/>
-            <a:ext cx="10972800" cy="1645920"/>
+            <a:off x="7132320" y="1097280"/>
+            <a:ext cx="4754880" cy="5029200"/>
           </a:xfrm>
           <a:prstGeom prst="rect">
             <a:avLst/>
@@ -6210,56 +6268,17 @@
           <a:lstStyle/>
           <a:p>
             <a:pPr algn="l">
-              <a:defRPr sz="1300" b="0">
-                <a:solidFill>
-                  <a:srgbClr val="EEEEEE"/>
-                </a:solidFill>
-                <a:latin typeface="Calibri"/>
-              </a:defRPr>
-            </a:pPr>
-          </a:p>
-          <a:p>
-            <a:pPr>
-              <a:defRPr sz="1300" b="0">
-                <a:solidFill>
-                  <a:srgbClr val="888888"/>
-                </a:solidFill>
-                <a:latin typeface="Calibri"/>
-              </a:defRPr>
-            </a:pPr>
-            <a:r>
-              <a:t>PCA: ω≈7.4 log-periodic + T≈3.6yr calendar — from 30 HybPPL model components</a:t>
-            </a:r>
-          </a:p>
-          <a:p>
-            <a:pPr>
-              <a:defRPr sz="1300" b="0">
-                <a:solidFill>
-                  <a:srgbClr val="888888"/>
-                </a:solidFill>
-                <a:latin typeface="Calibri"/>
-              </a:defRPr>
-            </a:pPr>
-            <a:r>
-              <a:t>EMD: T≈3.9yr (IMF 7) + T≈2.0yr (IMF 6) — assumption-free signal decomposition</a:t>
-            </a:r>
-          </a:p>
-          <a:p>
-            <a:pPr>
-              <a:defRPr sz="1300" b="0">
-                <a:solidFill>
-                  <a:srgbClr val="888888"/>
-                </a:solidFill>
-                <a:latin typeface="Calibri"/>
-              </a:defRPr>
-            </a:pPr>
-            <a:r>
-              <a:t>DMD: T≈4.0yr (nearly stable) + T≈2.0yr (slowly decaying) — eigenmode analysis</a:t>
-            </a:r>
-          </a:p>
-          <a:p>
-            <a:pPr>
-              <a:defRPr sz="1400" b="1">
+              <a:defRPr sz="1400" b="0">
+                <a:solidFill>
+                  <a:srgbClr val="EEEEEE"/>
+                </a:solidFill>
+                <a:latin typeface="Calibri"/>
+              </a:defRPr>
+            </a:pPr>
+          </a:p>
+          <a:p>
+            <a:pPr>
+              <a:defRPr sz="1800" b="1">
                 <a:solidFill>
                   <a:srgbClr val="2ECC71"/>
                 </a:solidFill>
@@ -6267,7 +6286,216 @@
               </a:defRPr>
             </a:pPr>
             <a:r>
-              <a:t>Three fundamentally different mathematical frameworks converge on the same two signals</a:t>
+              <a:t>Bitcoin follows a single</a:t>
+            </a:r>
+          </a:p>
+          <a:p>
+            <a:pPr>
+              <a:defRPr sz="1800" b="1">
+                <a:solidFill>
+                  <a:srgbClr val="2ECC71"/>
+                </a:solidFill>
+                <a:latin typeface="Calibri"/>
+              </a:defRPr>
+            </a:pPr>
+            <a:r>
+              <a:t>power law regime</a:t>
+            </a:r>
+          </a:p>
+          <a:p>
+            <a:pPr>
+              <a:defRPr sz="800" b="0">
+                <a:solidFill>
+                  <a:srgbClr val="EEEEEE"/>
+                </a:solidFill>
+                <a:latin typeface="Calibri"/>
+              </a:defRPr>
+            </a:pPr>
+          </a:p>
+          <a:p>
+            <a:pPr>
+              <a:defRPr sz="1400" b="0">
+                <a:solidFill>
+                  <a:srgbClr val="EEEEEE"/>
+                </a:solidFill>
+                <a:latin typeface="Calibri"/>
+              </a:defRPr>
+            </a:pPr>
+            <a:r>
+              <a:t>λ = 0 (Box-Cox)</a:t>
+            </a:r>
+          </a:p>
+          <a:p>
+            <a:pPr>
+              <a:defRPr sz="1400" b="0">
+                <a:solidFill>
+                  <a:srgbClr val="EEEEEE"/>
+                </a:solidFill>
+                <a:latin typeface="Calibri"/>
+              </a:defRPr>
+            </a:pPr>
+            <a:r>
+              <a:t>→ log-log is exact</a:t>
+            </a:r>
+          </a:p>
+          <a:p>
+            <a:pPr>
+              <a:defRPr sz="600" b="0">
+                <a:solidFill>
+                  <a:srgbClr val="EEEEEE"/>
+                </a:solidFill>
+                <a:latin typeface="Calibri"/>
+              </a:defRPr>
+            </a:pPr>
+          </a:p>
+          <a:p>
+            <a:pPr>
+              <a:defRPr sz="1400" b="0">
+                <a:solidFill>
+                  <a:srgbClr val="EEEEEE"/>
+                </a:solidFill>
+                <a:latin typeface="Calibri"/>
+              </a:defRPr>
+            </a:pPr>
+            <a:r>
+              <a:t>β ≈ 5.08 (full sample)</a:t>
+            </a:r>
+          </a:p>
+          <a:p>
+            <a:pPr>
+              <a:defRPr sz="1400" b="0">
+                <a:solidFill>
+                  <a:srgbClr val="EEEEEE"/>
+                </a:solidFill>
+                <a:latin typeface="Calibri"/>
+              </a:defRPr>
+            </a:pPr>
+            <a:r>
+              <a:t>→ same slope since 2010</a:t>
+            </a:r>
+          </a:p>
+          <a:p>
+            <a:pPr>
+              <a:defRPr sz="600" b="0">
+                <a:solidFill>
+                  <a:srgbClr val="EEEEEE"/>
+                </a:solidFill>
+                <a:latin typeface="Calibri"/>
+              </a:defRPr>
+            </a:pPr>
+          </a:p>
+          <a:p>
+            <a:pPr>
+              <a:defRPr sz="1400" b="0">
+                <a:solidFill>
+                  <a:srgbClr val="F7931A"/>
+                </a:solidFill>
+                <a:latin typeface="Calibri"/>
+              </a:defRPr>
+            </a:pPr>
+            <a:r>
+              <a:t>DW ≈ 0 and structural</a:t>
+            </a:r>
+          </a:p>
+          <a:p>
+            <a:pPr>
+              <a:defRPr sz="1400" b="0">
+                <a:solidFill>
+                  <a:srgbClr val="F7931A"/>
+                </a:solidFill>
+                <a:latin typeface="Calibri"/>
+              </a:defRPr>
+            </a:pPr>
+            <a:r>
+              <a:t>breaks reflect cyclic</a:t>
+            </a:r>
+          </a:p>
+          <a:p>
+            <a:pPr>
+              <a:defRPr sz="1400" b="0">
+                <a:solidFill>
+                  <a:srgbClr val="F7931A"/>
+                </a:solidFill>
+                <a:latin typeface="Calibri"/>
+              </a:defRPr>
+            </a:pPr>
+            <a:r>
+              <a:t>bubble deviations, not</a:t>
+            </a:r>
+          </a:p>
+          <a:p>
+            <a:pPr>
+              <a:defRPr sz="1400" b="0">
+                <a:solidFill>
+                  <a:srgbClr val="F7931A"/>
+                </a:solidFill>
+                <a:latin typeface="Calibri"/>
+              </a:defRPr>
+            </a:pPr>
+            <a:r>
+              <a:t>permanent regime changes</a:t>
+            </a:r>
+          </a:p>
+          <a:p>
+            <a:pPr>
+              <a:defRPr sz="800" b="0">
+                <a:solidFill>
+                  <a:srgbClr val="EEEEEE"/>
+                </a:solidFill>
+                <a:latin typeface="Calibri"/>
+              </a:defRPr>
+            </a:pPr>
+          </a:p>
+          <a:p>
+            <a:pPr>
+              <a:defRPr sz="1400" b="0">
+                <a:solidFill>
+                  <a:srgbClr val="EEEEEE"/>
+                </a:solidFill>
+                <a:latin typeface="Calibri"/>
+              </a:defRPr>
+            </a:pPr>
+            <a:r>
+              <a:t>The slope oscillates with</a:t>
+            </a:r>
+          </a:p>
+          <a:p>
+            <a:pPr>
+              <a:defRPr sz="1400" b="0">
+                <a:solidFill>
+                  <a:srgbClr val="EEEEEE"/>
+                </a:solidFill>
+                <a:latin typeface="Calibri"/>
+              </a:defRPr>
+            </a:pPr>
+            <a:r>
+              <a:t>market cycles but always</a:t>
+            </a:r>
+          </a:p>
+          <a:p>
+            <a:pPr>
+              <a:defRPr sz="1400" b="0">
+                <a:solidFill>
+                  <a:srgbClr val="EEEEEE"/>
+                </a:solidFill>
+                <a:latin typeface="Calibri"/>
+              </a:defRPr>
+            </a:pPr>
+            <a:r>
+              <a:t>reverts to the same</a:t>
+            </a:r>
+          </a:p>
+          <a:p>
+            <a:pPr>
+              <a:defRPr sz="1400" b="0">
+                <a:solidFill>
+                  <a:srgbClr val="EEEEEE"/>
+                </a:solidFill>
+                <a:latin typeface="Calibri"/>
+              </a:defRPr>
+            </a:pPr>
+            <a:r>
+              <a:t>long-term trend.</a:t>
             </a:r>
           </a:p>
         </p:txBody>
@@ -6372,7 +6600,7 @@
               </a:defRPr>
             </a:pPr>
             <a:r>
-              <a:t>The Hybrid Periodic Power Law Model Family</a:t>
+              <a:t>What's On Top of the Power Law?</a:t>
             </a:r>
           </a:p>
         </p:txBody>
@@ -6385,8 +6613,8 @@
         </p:nvSpPr>
         <p:spPr>
           <a:xfrm>
-            <a:off x="457200" y="1097280"/>
-            <a:ext cx="10972800" cy="5486400"/>
+            <a:off x="731520" y="1097280"/>
+            <a:ext cx="10058400" cy="5029200"/>
           </a:xfrm>
           <a:prstGeom prst="rect">
             <a:avLst/>
@@ -6400,89 +6628,115 @@
           <a:lstStyle/>
           <a:p>
             <a:pPr algn="l">
+              <a:defRPr sz="1800" b="0">
+                <a:solidFill>
+                  <a:srgbClr val="EEEEEE"/>
+                </a:solidFill>
+                <a:latin typeface="Calibri"/>
+              </a:defRPr>
+            </a:pPr>
+          </a:p>
+          <a:p>
+            <a:pPr>
+              <a:defRPr sz="2200" b="1">
+                <a:solidFill>
+                  <a:srgbClr val="EEEEEE"/>
+                </a:solidFill>
+                <a:latin typeface="Calibri"/>
+              </a:defRPr>
+            </a:pPr>
+            <a:r>
+              <a:t>Price = Power Law Trend + Oscillations + Noise</a:t>
+            </a:r>
+          </a:p>
+          <a:p>
+            <a:pPr>
+              <a:defRPr sz="1000" b="0">
+                <a:solidFill>
+                  <a:srgbClr val="EEEEEE"/>
+                </a:solidFill>
+                <a:latin typeface="Calibri"/>
+              </a:defRPr>
+            </a:pPr>
+          </a:p>
+          <a:p>
+            <a:pPr>
+              <a:defRPr sz="1800" b="0">
+                <a:solidFill>
+                  <a:srgbClr val="EEEEEE"/>
+                </a:solidFill>
+                <a:latin typeface="Calibri"/>
+              </a:defRPr>
+            </a:pPr>
+            <a:r>
+              <a:t>The central question: what are the oscillations, and can we predict them?</a:t>
+            </a:r>
+          </a:p>
+          <a:p>
+            <a:pPr>
+              <a:defRPr sz="1000" b="0">
+                <a:solidFill>
+                  <a:srgbClr val="EEEEEE"/>
+                </a:solidFill>
+                <a:latin typeface="Calibri"/>
+              </a:defRPr>
+            </a:pPr>
+          </a:p>
+          <a:p>
+            <a:pPr>
+              <a:defRPr sz="1800" b="1">
+                <a:solidFill>
+                  <a:srgbClr val="F7931A"/>
+                </a:solidFill>
+                <a:latin typeface="Calibri"/>
+              </a:defRPr>
+            </a:pPr>
+            <a:r>
+              <a:t>Investigation scope:</a:t>
+            </a:r>
+          </a:p>
+          <a:p>
+            <a:pPr lvl="1">
               <a:defRPr sz="1600" b="0">
                 <a:solidFill>
-                  <a:srgbClr val="EEEEEE"/>
-                </a:solidFill>
-                <a:latin typeface="Calibri"/>
-              </a:defRPr>
-            </a:pPr>
-          </a:p>
-          <a:p>
-            <a:pPr>
-              <a:defRPr sz="1600" b="1">
-                <a:solidFill>
-                  <a:srgbClr val="F7931A"/>
-                </a:solidFill>
-                <a:latin typeface="Calibri"/>
-              </a:defRPr>
-            </a:pPr>
-            <a:r>
-              <a:t>log₁₀(price) = A + B·log₁₀(t) + C₁·t⁻ᴰ·cos(ω_log·ln(t)+φ₁) + C₂·cos(ω_cal·t+φ₂)</a:t>
-            </a:r>
-          </a:p>
-          <a:p>
-            <a:pPr>
-              <a:defRPr sz="800" b="0">
-                <a:solidFill>
-                  <a:srgbClr val="EEEEEE"/>
-                </a:solidFill>
-                <a:latin typeface="Calibri"/>
-              </a:defRPr>
-            </a:pPr>
-          </a:p>
-          <a:p>
-            <a:pPr>
+                  <a:srgbClr val="888888"/>
+                </a:solidFill>
+                <a:latin typeface="Calibri"/>
+              </a:defRPr>
+            </a:pPr>
+            <a:r>
+              <a:t>30+ model variants fitted via differential evolution</a:t>
+            </a:r>
+          </a:p>
+          <a:p>
+            <a:pPr lvl="1">
               <a:defRPr sz="1600" b="0">
                 <a:solidFill>
-                  <a:srgbClr val="EEEEEE"/>
-                </a:solidFill>
-                <a:latin typeface="Calibri"/>
-              </a:defRPr>
-            </a:pPr>
-            <a:r>
-              <a:t>Log-periodic component (ω≈7.4):  fractal self-similarity, damped</a:t>
-            </a:r>
-          </a:p>
-          <a:p>
-            <a:pPr>
+                  <a:srgbClr val="888888"/>
+                </a:solidFill>
+                <a:latin typeface="Calibri"/>
+              </a:defRPr>
+            </a:pPr>
+            <a:r>
+              <a:t>4 independent decomposition methods (PCA, EMD, DMD, sparse selection)</a:t>
+            </a:r>
+          </a:p>
+          <a:p>
+            <a:pPr lvl="1">
               <a:defRPr sz="1600" b="0">
                 <a:solidFill>
-                  <a:srgbClr val="EEEEEE"/>
-                </a:solidFill>
-                <a:latin typeface="Calibri"/>
-              </a:defRPr>
-            </a:pPr>
-            <a:r>
-              <a:t>Calendar component (T≈3.6yr):  halving cycle, undamped — persists indefinitely</a:t>
-            </a:r>
-          </a:p>
-          <a:p>
-            <a:pPr>
-              <a:defRPr sz="800" b="0">
-                <a:solidFill>
-                  <a:srgbClr val="EEEEEE"/>
-                </a:solidFill>
-                <a:latin typeface="Calibri"/>
-              </a:defRPr>
-            </a:pPr>
-          </a:p>
-          <a:p>
-            <a:pPr>
-              <a:defRPr sz="1600" b="1">
-                <a:solidFill>
-                  <a:srgbClr val="F7931A"/>
-                </a:solidFill>
-                <a:latin typeface="Calibri"/>
-              </a:defRPr>
-            </a:pPr>
-            <a:r>
-              <a:t>Extended to 2nd harmonics:</a:t>
+                  <a:srgbClr val="888888"/>
+                </a:solidFill>
+                <a:latin typeface="Calibri"/>
+              </a:defRPr>
+            </a:pPr>
+            <a:r>
+              <a:t>500+ basis functions tested (sinusoidal, triangle, flat-top, trapezoid, entropy-damped)</a:t>
             </a:r>
           </a:p>
           <a:p>
             <a:pPr lvl="1">
-              <a:defRPr sz="1400" b="0">
+              <a:defRPr sz="1600" b="0">
                 <a:solidFill>
                   <a:srgbClr val="888888"/>
                 </a:solidFill>
@@ -6490,12 +6744,12 @@
               </a:defRPr>
             </a:pPr>
             <a:r>
-              <a:t>Hyb2L (+2nd log, ω≈16):  R²=0.991, 13 params</a:t>
+              <a:t>36 HybPPL configurations + 36 EPPL configurations pre-fitted</a:t>
             </a:r>
           </a:p>
           <a:p>
             <a:pPr lvl="1">
-              <a:defRPr sz="1400" b="0">
+              <a:defRPr sz="1600" b="0">
                 <a:solidFill>
                   <a:srgbClr val="888888"/>
                 </a:solidFill>
@@ -6503,56 +6757,7 @@
               </a:defRPr>
             </a:pPr>
             <a:r>
-              <a:t>Hyb2C (+2nd calendar, T≈1.9yr):  R²=0.991, 12 params — sub-halving rhythm</a:t>
-            </a:r>
-          </a:p>
-          <a:p>
-            <a:pPr lvl="1">
-              <a:defRPr sz="1400" b="0">
-                <a:solidFill>
-                  <a:srgbClr val="888888"/>
-                </a:solidFill>
-                <a:latin typeface="Calibri"/>
-              </a:defRPr>
-            </a:pPr>
-            <a:r>
-              <a:t>Hyb2B (both 2nd harmonics):  R²=0.993, 16 params — best parametric model</a:t>
-            </a:r>
-          </a:p>
-          <a:p>
-            <a:pPr lvl="1">
-              <a:defRPr sz="1400" b="0">
-                <a:solidFill>
-                  <a:srgbClr val="E74C3C"/>
-                </a:solidFill>
-                <a:latin typeface="Calibri"/>
-              </a:defRPr>
-            </a:pPr>
-            <a:r>
-              <a:t>Hyb4D (all damped):  R²=0.992, 18 params — worse! Calendar terms want to be undamped</a:t>
-            </a:r>
-          </a:p>
-          <a:p>
-            <a:pPr>
-              <a:defRPr sz="800" b="0">
-                <a:solidFill>
-                  <a:srgbClr val="EEEEEE"/>
-                </a:solidFill>
-                <a:latin typeface="Calibri"/>
-              </a:defRPr>
-            </a:pPr>
-          </a:p>
-          <a:p>
-            <a:pPr>
-              <a:defRPr sz="1600" b="1">
-                <a:solidFill>
-                  <a:srgbClr val="2ECC71"/>
-                </a:solidFill>
-                <a:latin typeface="Calibri"/>
-              </a:defRPr>
-            </a:pPr>
-            <a:r>
-              <a:t>Key finding: the halving cycle should NOT be damped — it's structural, not speculative</a:t>
+              <a:t>Non-sinusoidal wave shape analysis and bubble evolution study</a:t>
             </a:r>
           </a:p>
         </p:txBody>
@@ -6858,14 +7063,14 @@
               </a:defRPr>
             </a:pPr>
             <a:r>
-              <a:t>PCA: Optimal Compression in 7 Parameters</a:t>
+              <a:t>Two Dominant Signals — Found Three Ways</a:t>
             </a:r>
           </a:p>
         </p:txBody>
       </p:sp>
       <p:pic>
         <p:nvPicPr>
-          <p:cNvPr id="4" name="Picture 3" descr="pca_variance.png"/>
+          <p:cNvPr id="4" name="Picture 3" descr="three_methods.png"/>
           <p:cNvPicPr>
             <a:picLocks noChangeAspect="1"/>
           </p:cNvPicPr>
@@ -6880,7 +7085,7 @@
         <p:spPr>
           <a:xfrm>
             <a:off x="1371600" y="1097280"/>
-            <a:ext cx="9418320" cy="5176813"/>
+            <a:ext cx="9418320" cy="4492161"/>
           </a:xfrm>
           <a:prstGeom prst="rect">
             <a:avLst/>
@@ -6895,8 +7100,8 @@
         </p:nvSpPr>
         <p:spPr>
           <a:xfrm>
-            <a:off x="457200" y="5303520"/>
-            <a:ext cx="10972800" cy="1371600"/>
+            <a:off x="457200" y="5029200"/>
+            <a:ext cx="10972800" cy="1645920"/>
           </a:xfrm>
           <a:prstGeom prst="rect">
             <a:avLst/>
@@ -6928,20 +7133,33 @@
               </a:defRPr>
             </a:pPr>
             <a:r>
-              <a:t>30 component curves from 6 HybPPL models → SVD → 6 orthogonal principal components</a:t>
-            </a:r>
-          </a:p>
-          <a:p>
-            <a:pPr>
-              <a:defRPr sz="1300" b="1">
-                <a:solidFill>
-                  <a:srgbClr val="EEEEEE"/>
-                </a:solidFill>
-                <a:latin typeface="Calibri"/>
-              </a:defRPr>
-            </a:pPr>
-            <a:r>
-              <a:t>PC1 (97.2%): power law trend  |  PC2 (1.5%): halving cycle  |  PC3 (1.0%): log-periodic</a:t>
+              <a:t>PCA: ω≈7.4 log-periodic + T≈3.6yr calendar — from 30 HybPPL model components</a:t>
+            </a:r>
+          </a:p>
+          <a:p>
+            <a:pPr>
+              <a:defRPr sz="1300" b="0">
+                <a:solidFill>
+                  <a:srgbClr val="888888"/>
+                </a:solidFill>
+                <a:latin typeface="Calibri"/>
+              </a:defRPr>
+            </a:pPr>
+            <a:r>
+              <a:t>EMD: T≈3.9yr (IMF 7) + T≈2.0yr (IMF 6) — assumption-free signal decomposition</a:t>
+            </a:r>
+          </a:p>
+          <a:p>
+            <a:pPr>
+              <a:defRPr sz="1300" b="0">
+                <a:solidFill>
+                  <a:srgbClr val="888888"/>
+                </a:solidFill>
+                <a:latin typeface="Calibri"/>
+              </a:defRPr>
+            </a:pPr>
+            <a:r>
+              <a:t>DMD: T≈4.0yr (nearly stable) + T≈2.0yr (slowly decaying) — eigenmode analysis</a:t>
             </a:r>
           </a:p>
           <a:p>
@@ -6954,7 +7172,7 @@
               </a:defRPr>
             </a:pPr>
             <a:r>
-              <a:t>R²=0.993 with 7 params — beats 16-param Hyb2B on BIC (-23,776 vs -23,203)</a:t>
+              <a:t>Three fundamentally different mathematical frameworks converge on the same two signals</a:t>
             </a:r>
           </a:p>
         </p:txBody>
@@ -7059,7 +7277,7 @@
               </a:defRPr>
             </a:pPr>
             <a:r>
-              <a:t>Synthetic Basis Search: Can We Beat Curated Components?</a:t>
+              <a:t>The Hybrid Periodic Power Law Model Family</a:t>
             </a:r>
           </a:p>
         </p:txBody>
@@ -7073,7 +7291,7 @@
         <p:spPr>
           <a:xfrm>
             <a:off x="457200" y="1097280"/>
-            <a:ext cx="10515600" cy="5029200"/>
+            <a:ext cx="10972800" cy="5486400"/>
           </a:xfrm>
           <a:prstGeom prst="rect">
             <a:avLst/>
@@ -7097,7 +7315,7 @@
           </a:p>
           <a:p>
             <a:pPr>
-              <a:defRPr sz="1800" b="1">
+              <a:defRPr sz="1600" b="1">
                 <a:solidFill>
                   <a:srgbClr val="F7931A"/>
                 </a:solidFill>
@@ -7105,7 +7323,66 @@
               </a:defRPr>
             </a:pPr>
             <a:r>
-              <a:t>Tested 224 candidate basis functions:</a:t>
+              <a:t>log₁₀(price) = A + B·log₁₀(t) + C₁·t⁻ᴰ·cos(ω_log·ln(t)+φ₁) + C₂·cos(ω_cal·t+φ₂)</a:t>
+            </a:r>
+          </a:p>
+          <a:p>
+            <a:pPr>
+              <a:defRPr sz="800" b="0">
+                <a:solidFill>
+                  <a:srgbClr val="EEEEEE"/>
+                </a:solidFill>
+                <a:latin typeface="Calibri"/>
+              </a:defRPr>
+            </a:pPr>
+          </a:p>
+          <a:p>
+            <a:pPr>
+              <a:defRPr sz="1600" b="0">
+                <a:solidFill>
+                  <a:srgbClr val="EEEEEE"/>
+                </a:solidFill>
+                <a:latin typeface="Calibri"/>
+              </a:defRPr>
+            </a:pPr>
+            <a:r>
+              <a:t>Log-periodic component (ω≈7.4):  fractal self-similarity, damped</a:t>
+            </a:r>
+          </a:p>
+          <a:p>
+            <a:pPr>
+              <a:defRPr sz="1600" b="0">
+                <a:solidFill>
+                  <a:srgbClr val="EEEEEE"/>
+                </a:solidFill>
+                <a:latin typeface="Calibri"/>
+              </a:defRPr>
+            </a:pPr>
+            <a:r>
+              <a:t>Calendar component (T≈3.6yr):  halving cycle, undamped — persists indefinitely</a:t>
+            </a:r>
+          </a:p>
+          <a:p>
+            <a:pPr>
+              <a:defRPr sz="800" b="0">
+                <a:solidFill>
+                  <a:srgbClr val="EEEEEE"/>
+                </a:solidFill>
+                <a:latin typeface="Calibri"/>
+              </a:defRPr>
+            </a:pPr>
+          </a:p>
+          <a:p>
+            <a:pPr>
+              <a:defRPr sz="1600" b="1">
+                <a:solidFill>
+                  <a:srgbClr val="F7931A"/>
+                </a:solidFill>
+                <a:latin typeface="Calibri"/>
+              </a:defRPr>
+            </a:pPr>
+            <a:r>
+              <a:t>Extended to 2nd harmonics:</a:t>
             </a:r>
           </a:p>
           <a:p>
@@ -7118,7 +7395,7 @@
               </a:defRPr>
             </a:pPr>
             <a:r>
-              <a:t>Polynomials: log₁₀(t)ⁿ, tᵅ — useless (R²=0.964 max, can't represent oscillations)</a:t>
+              <a:t>Hyb2L (+2nd log, ω≈16):  R²=0.991, 13 params</a:t>
             </a:r>
           </a:p>
           <a:p>
@@ -7131,7 +7408,7 @@
               </a:defRPr>
             </a:pPr>
             <a:r>
-              <a:t>Generic sin/cos at frequency grids (log-time + calendar-time)</a:t>
+              <a:t>Hyb2C (+2nd calendar, T≈1.9yr):  R²=0.991, 12 params — sub-halving rhythm</a:t>
             </a:r>
           </a:p>
           <a:p>
@@ -7144,33 +7421,20 @@
               </a:defRPr>
             </a:pPr>
             <a:r>
-              <a:t>Damped variants: t⁻ᴰ·cos(...) at D=0.3, 0.7, 1.0</a:t>
+              <a:t>Hyb2B (both 2nd harmonics):  R²=0.993, 16 params — best parametric model</a:t>
             </a:r>
           </a:p>
           <a:p>
             <a:pPr lvl="1">
               <a:defRPr sz="1400" b="0">
                 <a:solidFill>
-                  <a:srgbClr val="888888"/>
-                </a:solidFill>
-                <a:latin typeface="Calibri"/>
-              </a:defRPr>
-            </a:pPr>
-            <a:r>
-              <a:t>Gompertz saturation curves (27 variants)</a:t>
-            </a:r>
-          </a:p>
-          <a:p>
-            <a:pPr lvl="1">
-              <a:defRPr sz="1400" b="0">
-                <a:solidFill>
-                  <a:srgbClr val="888888"/>
-                </a:solidFill>
-                <a:latin typeface="Calibri"/>
-              </a:defRPr>
-            </a:pPr>
-            <a:r>
-              <a:t>Broken power law pieces (4 breakpoints)</a:t>
+                  <a:srgbClr val="E74C3C"/>
+                </a:solidFill>
+                <a:latin typeface="Calibri"/>
+              </a:defRPr>
+            </a:pPr>
+            <a:r>
+              <a:t>Hyb4D (all damped):  R²=0.992, 18 params — worse! Calendar terms want to be undamped</a:t>
             </a:r>
           </a:p>
           <a:p>
@@ -7185,7 +7449,7 @@
           </a:p>
           <a:p>
             <a:pPr>
-              <a:defRPr sz="1800" b="1">
+              <a:defRPr sz="1600" b="1">
                 <a:solidFill>
                   <a:srgbClr val="2ECC71"/>
                 </a:solidFill>
@@ -7193,69 +7457,7 @@
               </a:defRPr>
             </a:pPr>
             <a:r>
-              <a:t>Result: the curated HybPPL basis wins convincingly</a:t>
-            </a:r>
-          </a:p>
-          <a:p>
-            <a:pPr lvl="1">
-              <a:defRPr sz="1400" b="0">
-                <a:solidFill>
-                  <a:srgbClr val="EEEEEE"/>
-                </a:solidFill>
-                <a:latin typeface="Calibri"/>
-              </a:defRPr>
-            </a:pPr>
-            <a:r>
-              <a:t>Generic dictionary needs k=24 (25 params) to beat curated k=6 (7 params)</a:t>
-            </a:r>
-          </a:p>
-          <a:p>
-            <a:pPr lvl="1">
-              <a:defRPr sz="1400" b="0">
-                <a:solidFill>
-                  <a:srgbClr val="EEEEEE"/>
-                </a:solidFill>
-                <a:latin typeface="Calibri"/>
-              </a:defRPr>
-            </a:pPr>
-            <a:r>
-              <a:t>At equal k=6: dictionary R²=0.951 vs curated 0.993 — dramatically worse</a:t>
-            </a:r>
-          </a:p>
-          <a:p>
-            <a:pPr>
-              <a:defRPr sz="800" b="0">
-                <a:solidFill>
-                  <a:srgbClr val="EEEEEE"/>
-                </a:solidFill>
-                <a:latin typeface="Calibri"/>
-              </a:defRPr>
-            </a:pPr>
-          </a:p>
-          <a:p>
-            <a:pPr>
-              <a:defRPr sz="1400" b="0">
-                <a:solidFill>
-                  <a:srgbClr val="888888"/>
-                </a:solidFill>
-                <a:latin typeface="Calibri"/>
-              </a:defRPr>
-            </a:pPr>
-            <a:r>
-              <a:t>Why: DE-fitted ω≈7.42 and D≈0.71 can't be matched by a frequency grid</a:t>
-            </a:r>
-          </a:p>
-          <a:p>
-            <a:pPr>
-              <a:defRPr sz="1400" b="0">
-                <a:solidFill>
-                  <a:srgbClr val="888888"/>
-                </a:solidFill>
-                <a:latin typeface="Calibri"/>
-              </a:defRPr>
-            </a:pPr>
-            <a:r>
-              <a:t>Nearby-but-wrong frequencies waste PCA dimensions</a:t>
+              <a:t>Key finding: the halving cycle should NOT be damped — it's structural, not speculative</a:t>
             </a:r>
           </a:p>
         </p:txBody>
@@ -7360,14 +7562,14 @@
               </a:defRPr>
             </a:pPr>
             <a:r>
-              <a:t>The Entropy Discovery: Shannon Meets Bitcoin</a:t>
+              <a:t>PCA: Optimal Compression in 7 Parameters</a:t>
             </a:r>
           </a:p>
         </p:txBody>
       </p:sp>
       <p:pic>
         <p:nvPicPr>
-          <p:cNvPr id="4" name="Picture 3" descr="entropy_envelope.png"/>
+          <p:cNvPr id="4" name="Picture 3" descr="pca_variance.png"/>
           <p:cNvPicPr>
             <a:picLocks noChangeAspect="1"/>
           </p:cNvPicPr>
@@ -7382,7 +7584,7 @@
         <p:spPr>
           <a:xfrm>
             <a:off x="1371600" y="1097280"/>
-            <a:ext cx="9418320" cy="5261383"/>
+            <a:ext cx="9418320" cy="5176813"/>
           </a:xfrm>
           <a:prstGeom prst="rect">
             <a:avLst/>
@@ -7422,33 +7624,33 @@
           </a:p>
           <a:p>
             <a:pPr>
+              <a:defRPr sz="1300" b="0">
+                <a:solidFill>
+                  <a:srgbClr val="888888"/>
+                </a:solidFill>
+                <a:latin typeface="Calibri"/>
+              </a:defRPr>
+            </a:pPr>
+            <a:r>
+              <a:t>30 component curves from 6 HybPPL models → SVD → 6 orthogonal principal components</a:t>
+            </a:r>
+          </a:p>
+          <a:p>
+            <a:pPr>
               <a:defRPr sz="1300" b="1">
                 <a:solidFill>
-                  <a:srgbClr val="F7931A"/>
-                </a:solidFill>
-                <a:latin typeface="Calibri"/>
-              </a:defRPr>
-            </a:pPr>
-            <a:r>
-              <a:t>E(w·t) = max(-w·t·ln(w·t), 0)/(1/e) — the Shannon entropy function</a:t>
-            </a:r>
-          </a:p>
-          <a:p>
-            <a:pPr>
-              <a:defRPr sz="1300" b="0">
-                <a:solidFill>
-                  <a:srgbClr val="EEEEEE"/>
-                </a:solidFill>
-                <a:latin typeface="Calibri"/>
-              </a:defRPr>
-            </a:pPr>
-            <a:r>
-              <a:t>Peaks at 37% of adoption lifecycle (maximum uncertainty), zero at 100% (resolved)</a:t>
-            </a:r>
-          </a:p>
-          <a:p>
-            <a:pPr>
-              <a:defRPr sz="1300" b="1">
+                  <a:srgbClr val="EEEEEE"/>
+                </a:solidFill>
+                <a:latin typeface="Calibri"/>
+              </a:defRPr>
+            </a:pPr>
+            <a:r>
+              <a:t>PC1 (97.2%): power law trend  |  PC2 (1.5%): halving cycle  |  PC3 (1.0%): log-periodic</a:t>
+            </a:r>
+          </a:p>
+          <a:p>
+            <a:pPr>
+              <a:defRPr sz="1400" b="1">
                 <a:solidFill>
                   <a:srgbClr val="2ECC71"/>
                 </a:solidFill>
@@ -7456,7 +7658,7 @@
               </a:defRPr>
             </a:pPr>
             <a:r>
-              <a:t>EPPL beats HybPPL on BIC at same param count: -21,065 vs -20,814 (9p)</a:t>
+              <a:t>R²=0.993 with 7 params — beats 16-param Hyb2B on BIC (-23,776 vs -23,203)</a:t>
             </a:r>
           </a:p>
         </p:txBody>
@@ -7561,7 +7763,7 @@
               </a:defRPr>
             </a:pPr>
             <a:r>
-              <a:t>What the Entropy Parameters Say</a:t>
+              <a:t>Synthetic Basis Search: Can We Beat Curated Components?</a:t>
             </a:r>
           </a:p>
         </p:txBody>
@@ -7607,11 +7809,11 @@
               </a:defRPr>
             </a:pPr>
             <a:r>
-              <a:t>w·t = 0.37 at t=3.5yr (2013) — exactly 1/e, maximum entropy</a:t>
-            </a:r>
-          </a:p>
-          <a:p>
-            <a:pPr>
+              <a:t>Tested 224 candidate basis functions:</a:t>
+            </a:r>
+          </a:p>
+          <a:p>
+            <a:pPr lvl="1">
               <a:defRPr sz="1400" b="0">
                 <a:solidFill>
                   <a:srgbClr val="888888"/>
@@ -7620,7 +7822,59 @@
               </a:defRPr>
             </a:pPr>
             <a:r>
-              <a:t>Peak speculative uncertainty. "Will Bitcoin survive?" is maximally uncertain.</a:t>
+              <a:t>Polynomials: log₁₀(t)ⁿ, tᵅ — useless (R²=0.964 max, can't represent oscillations)</a:t>
+            </a:r>
+          </a:p>
+          <a:p>
+            <a:pPr lvl="1">
+              <a:defRPr sz="1400" b="0">
+                <a:solidFill>
+                  <a:srgbClr val="888888"/>
+                </a:solidFill>
+                <a:latin typeface="Calibri"/>
+              </a:defRPr>
+            </a:pPr>
+            <a:r>
+              <a:t>Generic sin/cos at frequency grids (log-time + calendar-time)</a:t>
+            </a:r>
+          </a:p>
+          <a:p>
+            <a:pPr lvl="1">
+              <a:defRPr sz="1400" b="0">
+                <a:solidFill>
+                  <a:srgbClr val="888888"/>
+                </a:solidFill>
+                <a:latin typeface="Calibri"/>
+              </a:defRPr>
+            </a:pPr>
+            <a:r>
+              <a:t>Damped variants: t⁻ᴰ·cos(...) at D=0.3, 0.7, 1.0</a:t>
+            </a:r>
+          </a:p>
+          <a:p>
+            <a:pPr lvl="1">
+              <a:defRPr sz="1400" b="0">
+                <a:solidFill>
+                  <a:srgbClr val="888888"/>
+                </a:solidFill>
+                <a:latin typeface="Calibri"/>
+              </a:defRPr>
+            </a:pPr>
+            <a:r>
+              <a:t>Gompertz saturation curves (27 variants)</a:t>
+            </a:r>
+          </a:p>
+          <a:p>
+            <a:pPr lvl="1">
+              <a:defRPr sz="1400" b="0">
+                <a:solidFill>
+                  <a:srgbClr val="888888"/>
+                </a:solidFill>
+                <a:latin typeface="Calibri"/>
+              </a:defRPr>
+            </a:pPr>
+            <a:r>
+              <a:t>Broken power law pieces (4 breakpoints)</a:t>
             </a:r>
           </a:p>
           <a:p>
@@ -7637,49 +7891,62 @@
             <a:pPr>
               <a:defRPr sz="1800" b="1">
                 <a:solidFill>
-                  <a:srgbClr val="E74C3C"/>
-                </a:solidFill>
-                <a:latin typeface="Calibri"/>
-              </a:defRPr>
-            </a:pPr>
-            <a:r>
-              <a:t>w·t = 1.0 at t=9.5yr (2019) — adoption resolved</a:t>
-            </a:r>
-          </a:p>
-          <a:p>
-            <a:pPr>
+                  <a:srgbClr val="2ECC71"/>
+                </a:solidFill>
+                <a:latin typeface="Calibri"/>
+              </a:defRPr>
+            </a:pPr>
+            <a:r>
+              <a:t>Result: the curated HybPPL basis wins convincingly</a:t>
+            </a:r>
+          </a:p>
+          <a:p>
+            <a:pPr lvl="1">
               <a:defRPr sz="1400" b="0">
                 <a:solidFill>
+                  <a:srgbClr val="EEEEEE"/>
+                </a:solidFill>
+                <a:latin typeface="Calibri"/>
+              </a:defRPr>
+            </a:pPr>
+            <a:r>
+              <a:t>Generic dictionary needs k=24 (25 params) to beat curated k=6 (7 params)</a:t>
+            </a:r>
+          </a:p>
+          <a:p>
+            <a:pPr lvl="1">
+              <a:defRPr sz="1400" b="0">
+                <a:solidFill>
+                  <a:srgbClr val="EEEEEE"/>
+                </a:solidFill>
+                <a:latin typeface="Calibri"/>
+              </a:defRPr>
+            </a:pPr>
+            <a:r>
+              <a:t>At equal k=6: dictionary R²=0.951 vs curated 0.993 — dramatically worse</a:t>
+            </a:r>
+          </a:p>
+          <a:p>
+            <a:pPr>
+              <a:defRPr sz="800" b="0">
+                <a:solidFill>
+                  <a:srgbClr val="EEEEEE"/>
+                </a:solidFill>
+                <a:latin typeface="Calibri"/>
+              </a:defRPr>
+            </a:pPr>
+          </a:p>
+          <a:p>
+            <a:pPr>
+              <a:defRPr sz="1400" b="0">
+                <a:solidFill>
                   <a:srgbClr val="888888"/>
                 </a:solidFill>
                 <a:latin typeface="Calibri"/>
               </a:defRPr>
             </a:pPr>
             <a:r>
-              <a:t>Log-periodic oscillations go to zero. The speculative era ends.</a:t>
-            </a:r>
-          </a:p>
-          <a:p>
-            <a:pPr>
-              <a:defRPr sz="800" b="0">
-                <a:solidFill>
-                  <a:srgbClr val="EEEEEE"/>
-                </a:solidFill>
-                <a:latin typeface="Calibri"/>
-              </a:defRPr>
-            </a:pPr>
-          </a:p>
-          <a:p>
-            <a:pPr>
-              <a:defRPr sz="1800" b="1">
-                <a:solidFill>
-                  <a:srgbClr val="5DADE2"/>
-                </a:solidFill>
-                <a:latin typeface="Calibri"/>
-              </a:defRPr>
-            </a:pPr>
-            <a:r>
-              <a:t>w·t = 1.68 at t=16yr (now) — well past the zero crossing</a:t>
+              <a:t>Why: DE-fitted ω≈7.42 and D≈0.71 can't be matched by a frequency grid</a:t>
             </a:r>
           </a:p>
           <a:p>
@@ -7692,56 +7959,7 @@
               </a:defRPr>
             </a:pPr>
             <a:r>
-              <a:t>Current price dynamics driven by halving cycle, not speculation.</a:t>
-            </a:r>
-          </a:p>
-          <a:p>
-            <a:pPr>
-              <a:defRPr sz="800" b="0">
-                <a:solidFill>
-                  <a:srgbClr val="EEEEEE"/>
-                </a:solidFill>
-                <a:latin typeface="Calibri"/>
-              </a:defRPr>
-            </a:pPr>
-          </a:p>
-          <a:p>
-            <a:pPr>
-              <a:defRPr sz="1800" b="0">
-                <a:solidFill>
-                  <a:srgbClr val="EEEEEE"/>
-                </a:solidFill>
-                <a:latin typeface="Calibri"/>
-              </a:defRPr>
-            </a:pPr>
-            <a:r>
-              <a:t>The log-periodic signal was an artifact of the "will it survive?" era.</a:t>
-            </a:r>
-          </a:p>
-          <a:p>
-            <a:pPr>
-              <a:defRPr sz="1400" b="0">
-                <a:solidFill>
-                  <a:srgbClr val="888888"/>
-                </a:solidFill>
-                <a:latin typeface="Calibri"/>
-              </a:defRPr>
-            </a:pPr>
-            <a:r>
-              <a:t>The mathematical form is literally the entropy function, and the fitted parameters</a:t>
-            </a:r>
-          </a:p>
-          <a:p>
-            <a:pPr>
-              <a:defRPr sz="1400" b="0">
-                <a:solidFill>
-                  <a:srgbClr val="888888"/>
-                </a:solidFill>
-                <a:latin typeface="Calibri"/>
-              </a:defRPr>
-            </a:pPr>
-            <a:r>
-              <a:t>put maximum entropy right at the peak of early Bitcoin speculation.</a:t>
+              <a:t>Nearby-but-wrong frequencies waste PCA dimensions</a:t>
             </a:r>
           </a:p>
         </p:txBody>
@@ -7846,14 +8064,14 @@
               </a:defRPr>
             </a:pPr>
             <a:r>
-              <a:t>Bitcoin Cycles Aren't Smooth Sinusoids</a:t>
+              <a:t>The Entropy Discovery: Shannon Meets Bitcoin</a:t>
             </a:r>
           </a:p>
         </p:txBody>
       </p:sp>
       <p:pic>
         <p:nvPicPr>
-          <p:cNvPr id="4" name="Picture 3" descr="wave_shapes.png"/>
+          <p:cNvPr id="4" name="Picture 3" descr="entropy_envelope.png"/>
           <p:cNvPicPr>
             <a:picLocks noChangeAspect="1"/>
           </p:cNvPicPr>
@@ -7868,7 +8086,7 @@
         <p:spPr>
           <a:xfrm>
             <a:off x="1371600" y="1097280"/>
-            <a:ext cx="9418320" cy="4335157"/>
+            <a:ext cx="9418320" cy="5261383"/>
           </a:xfrm>
           <a:prstGeom prst="rect">
             <a:avLst/>
@@ -7883,8 +8101,8 @@
         </p:nvSpPr>
         <p:spPr>
           <a:xfrm>
-            <a:off x="457200" y="4846320"/>
-            <a:ext cx="10972800" cy="1828800"/>
+            <a:off x="457200" y="5303520"/>
+            <a:ext cx="10972800" cy="1371600"/>
           </a:xfrm>
           <a:prstGeom prst="rect">
             <a:avLst/>
@@ -7908,7 +8126,33 @@
           </a:p>
           <a:p>
             <a:pPr>
-              <a:defRPr sz="1400" b="1">
+              <a:defRPr sz="1300" b="1">
+                <a:solidFill>
+                  <a:srgbClr val="F7931A"/>
+                </a:solidFill>
+                <a:latin typeface="Calibri"/>
+              </a:defRPr>
+            </a:pPr>
+            <a:r>
+              <a:t>E(w·t) = max(-w·t·ln(w·t), 0)/(1/e) — the Shannon entropy function</a:t>
+            </a:r>
+          </a:p>
+          <a:p>
+            <a:pPr>
+              <a:defRPr sz="1300" b="0">
+                <a:solidFill>
+                  <a:srgbClr val="EEEEEE"/>
+                </a:solidFill>
+                <a:latin typeface="Calibri"/>
+              </a:defRPr>
+            </a:pPr>
+            <a:r>
+              <a:t>Peaks at 37% of adoption lifecycle (maximum uncertainty), zero at 100% (resolved)</a:t>
+            </a:r>
+          </a:p>
+          <a:p>
+            <a:pPr>
+              <a:defRPr sz="1300" b="1">
                 <a:solidFill>
                   <a:srgbClr val="2ECC71"/>
                 </a:solidFill>
@@ -7916,46 +8160,7 @@
               </a:defRPr>
             </a:pPr>
             <a:r>
-              <a:t>Triangle + flat-top waves beat sinusoidal by ~1,000 BIC (with 1 extra param)</a:t>
-            </a:r>
-          </a:p>
-          <a:p>
-            <a:pPr>
-              <a:defRPr sz="1300" b="0">
-                <a:solidFill>
-                  <a:srgbClr val="888888"/>
-                </a:solidFill>
-                <a:latin typeface="Calibri"/>
-              </a:defRPr>
-            </a:pPr>
-            <a:r>
-              <a:t>Mixed-shape dictionary (5 wave types × 2 time bases): R²=0.997 at 27 params</a:t>
-            </a:r>
-          </a:p>
-          <a:p>
-            <a:pPr>
-              <a:defRPr sz="1300" b="0">
-                <a:solidFill>
-                  <a:srgbClr val="888888"/>
-                </a:solidFill>
-                <a:latin typeface="Calibri"/>
-              </a:defRPr>
-            </a:pPr>
-            <a:r>
-              <a:t>Flat-top dominates selection (10/25 terms) — Bitcoin has plateau-like peaks</a:t>
-            </a:r>
-          </a:p>
-          <a:p>
-            <a:pPr>
-              <a:defRPr sz="1300" b="0">
-                <a:solidFill>
-                  <a:srgbClr val="EEEEEE"/>
-                </a:solidFill>
-                <a:latin typeface="Calibri"/>
-              </a:defRPr>
-            </a:pPr>
-            <a:r>
-              <a:t>Triangle wave at ω=7.4 was #1 novel selection — log-periodic peaks are sharper than sinusoidal</a:t>
+              <a:t>EPPL beats HybPPL on BIC at same param count: -21,065 vs -20,814 (9p)</a:t>
             </a:r>
           </a:p>
         </p:txBody>
@@ -8060,45 +8265,21 @@
               </a:defRPr>
             </a:pPr>
             <a:r>
-              <a:t>Bubble Shapes Are Maturing</a:t>
-            </a:r>
-          </a:p>
-        </p:txBody>
-      </p:sp>
-      <p:pic>
-        <p:nvPicPr>
-          <p:cNvPr id="4" name="Picture 3" descr="bubble_evolution.png"/>
-          <p:cNvPicPr>
-            <a:picLocks noChangeAspect="1"/>
-          </p:cNvPicPr>
-          <p:nvPr/>
-        </p:nvPicPr>
-        <p:blipFill>
-          <a:blip r:embed="rId2"/>
-          <a:stretch>
-            <a:fillRect/>
-          </a:stretch>
-        </p:blipFill>
-        <p:spPr>
-          <a:xfrm>
-            <a:off x="1371600" y="1097280"/>
-            <a:ext cx="9418320" cy="5283583"/>
-          </a:xfrm>
-          <a:prstGeom prst="rect">
-            <a:avLst/>
-          </a:prstGeom>
-        </p:spPr>
-      </p:pic>
-      <p:sp>
-        <p:nvSpPr>
-          <p:cNvPr id="5" name="TextBox 4"/>
+              <a:t>What the Entropy Parameters Say</a:t>
+            </a:r>
+          </a:p>
+        </p:txBody>
+      </p:sp>
+      <p:sp>
+        <p:nvSpPr>
+          <p:cNvPr id="4" name="TextBox 3"/>
           <p:cNvSpPr txBox="1"/>
           <p:nvPr/>
         </p:nvSpPr>
         <p:spPr>
           <a:xfrm>
-            <a:off x="457200" y="5303520"/>
-            <a:ext cx="10972800" cy="1371600"/>
+            <a:off x="457200" y="1097280"/>
+            <a:ext cx="10515600" cy="5029200"/>
           </a:xfrm>
           <a:prstGeom prst="rect">
             <a:avLst/>
@@ -8112,43 +8293,30 @@
           <a:lstStyle/>
           <a:p>
             <a:pPr algn="l">
-              <a:defRPr sz="1300" b="0">
-                <a:solidFill>
-                  <a:srgbClr val="EEEEEE"/>
-                </a:solidFill>
-                <a:latin typeface="Calibri"/>
-              </a:defRPr>
-            </a:pPr>
-          </a:p>
-          <a:p>
-            <a:pPr>
-              <a:defRPr sz="1400" b="1">
-                <a:solidFill>
-                  <a:srgbClr val="EEEEEE"/>
-                </a:solidFill>
-                <a:latin typeface="Calibri"/>
-              </a:defRPr>
-            </a:pPr>
-            <a:r>
-              <a:t>Duration widening: 0.87yr (2011) → 5.39yr (2024) — statistically significant (p=0.012)</a:t>
-            </a:r>
-          </a:p>
-          <a:p>
-            <a:pPr>
-              <a:defRPr sz="1400" b="1">
-                <a:solidFill>
-                  <a:srgbClr val="EEEEEE"/>
-                </a:solidFill>
-                <a:latin typeface="Calibri"/>
-              </a:defRPr>
-            </a:pPr>
-            <a:r>
-              <a:t>Amplitude shrinking: each cycle ~20% smaller (p=0.016)</a:t>
-            </a:r>
-          </a:p>
-          <a:p>
-            <a:pPr>
-              <a:defRPr sz="1300" b="0">
+              <a:defRPr sz="1600" b="0">
+                <a:solidFill>
+                  <a:srgbClr val="EEEEEE"/>
+                </a:solidFill>
+                <a:latin typeface="Calibri"/>
+              </a:defRPr>
+            </a:pPr>
+          </a:p>
+          <a:p>
+            <a:pPr>
+              <a:defRPr sz="1800" b="1">
+                <a:solidFill>
+                  <a:srgbClr val="F7931A"/>
+                </a:solidFill>
+                <a:latin typeface="Calibri"/>
+              </a:defRPr>
+            </a:pPr>
+            <a:r>
+              <a:t>w·t = 0.37 at t=3.5yr (2013) — exactly 1/e, maximum entropy</a:t>
+            </a:r>
+          </a:p>
+          <a:p>
+            <a:pPr>
+              <a:defRPr sz="1400" b="0">
                 <a:solidFill>
                   <a:srgbClr val="888888"/>
                 </a:solidFill>
@@ -8156,7 +8324,128 @@
               </a:defRPr>
             </a:pPr>
             <a:r>
-              <a:t>Interpretation: as participant base grows, speculative excess distributes over longer periods</a:t>
+              <a:t>Peak speculative uncertainty. "Will Bitcoin survive?" is maximally uncertain.</a:t>
+            </a:r>
+          </a:p>
+          <a:p>
+            <a:pPr>
+              <a:defRPr sz="800" b="0">
+                <a:solidFill>
+                  <a:srgbClr val="EEEEEE"/>
+                </a:solidFill>
+                <a:latin typeface="Calibri"/>
+              </a:defRPr>
+            </a:pPr>
+          </a:p>
+          <a:p>
+            <a:pPr>
+              <a:defRPr sz="1800" b="1">
+                <a:solidFill>
+                  <a:srgbClr val="E74C3C"/>
+                </a:solidFill>
+                <a:latin typeface="Calibri"/>
+              </a:defRPr>
+            </a:pPr>
+            <a:r>
+              <a:t>w·t = 1.0 at t=9.5yr (2019) — adoption resolved</a:t>
+            </a:r>
+          </a:p>
+          <a:p>
+            <a:pPr>
+              <a:defRPr sz="1400" b="0">
+                <a:solidFill>
+                  <a:srgbClr val="888888"/>
+                </a:solidFill>
+                <a:latin typeface="Calibri"/>
+              </a:defRPr>
+            </a:pPr>
+            <a:r>
+              <a:t>Log-periodic oscillations go to zero. The speculative era ends.</a:t>
+            </a:r>
+          </a:p>
+          <a:p>
+            <a:pPr>
+              <a:defRPr sz="800" b="0">
+                <a:solidFill>
+                  <a:srgbClr val="EEEEEE"/>
+                </a:solidFill>
+                <a:latin typeface="Calibri"/>
+              </a:defRPr>
+            </a:pPr>
+          </a:p>
+          <a:p>
+            <a:pPr>
+              <a:defRPr sz="1800" b="1">
+                <a:solidFill>
+                  <a:srgbClr val="5DADE2"/>
+                </a:solidFill>
+                <a:latin typeface="Calibri"/>
+              </a:defRPr>
+            </a:pPr>
+            <a:r>
+              <a:t>w·t = 1.68 at t=16yr (now) — well past the zero crossing</a:t>
+            </a:r>
+          </a:p>
+          <a:p>
+            <a:pPr>
+              <a:defRPr sz="1400" b="0">
+                <a:solidFill>
+                  <a:srgbClr val="888888"/>
+                </a:solidFill>
+                <a:latin typeface="Calibri"/>
+              </a:defRPr>
+            </a:pPr>
+            <a:r>
+              <a:t>Current price dynamics driven by halving cycle, not speculation.</a:t>
+            </a:r>
+          </a:p>
+          <a:p>
+            <a:pPr>
+              <a:defRPr sz="800" b="0">
+                <a:solidFill>
+                  <a:srgbClr val="EEEEEE"/>
+                </a:solidFill>
+                <a:latin typeface="Calibri"/>
+              </a:defRPr>
+            </a:pPr>
+          </a:p>
+          <a:p>
+            <a:pPr>
+              <a:defRPr sz="1800" b="0">
+                <a:solidFill>
+                  <a:srgbClr val="EEEEEE"/>
+                </a:solidFill>
+                <a:latin typeface="Calibri"/>
+              </a:defRPr>
+            </a:pPr>
+            <a:r>
+              <a:t>The log-periodic signal was an artifact of the "will it survive?" era.</a:t>
+            </a:r>
+          </a:p>
+          <a:p>
+            <a:pPr>
+              <a:defRPr sz="1400" b="0">
+                <a:solidFill>
+                  <a:srgbClr val="888888"/>
+                </a:solidFill>
+                <a:latin typeface="Calibri"/>
+              </a:defRPr>
+            </a:pPr>
+            <a:r>
+              <a:t>The mathematical form is literally the entropy function, and the fitted parameters</a:t>
+            </a:r>
+          </a:p>
+          <a:p>
+            <a:pPr>
+              <a:defRPr sz="1400" b="0">
+                <a:solidFill>
+                  <a:srgbClr val="888888"/>
+                </a:solidFill>
+                <a:latin typeface="Calibri"/>
+              </a:defRPr>
+            </a:pPr>
+            <a:r>
+              <a:t>put maximum entropy right at the peak of early Bitcoin speculation.</a:t>
             </a:r>
           </a:p>
         </p:txBody>
@@ -8261,14 +8550,14 @@
               </a:defRPr>
             </a:pPr>
             <a:r>
-              <a:t>Greedy Select: Entropy Damping Dominates</a:t>
+              <a:t>Bitcoin Cycles Aren't Smooth Sinusoids</a:t>
             </a:r>
           </a:p>
         </p:txBody>
       </p:sp>
       <p:pic>
         <p:nvPicPr>
-          <p:cNvPr id="4" name="Picture 3" descr="greedy_damping.png"/>
+          <p:cNvPr id="4" name="Picture 3" descr="wave_shapes.png"/>
           <p:cNvPicPr>
             <a:picLocks noChangeAspect="1"/>
           </p:cNvPicPr>
@@ -8283,7 +8572,7 @@
         <p:spPr>
           <a:xfrm>
             <a:off x="1371600" y="1097280"/>
-            <a:ext cx="9418320" cy="6397349"/>
+            <a:ext cx="9418320" cy="4335157"/>
           </a:xfrm>
           <a:prstGeom prst="rect">
             <a:avLst/>
@@ -8298,8 +8587,8 @@
         </p:nvSpPr>
         <p:spPr>
           <a:xfrm>
-            <a:off x="457200" y="5029200"/>
-            <a:ext cx="10972800" cy="1645920"/>
+            <a:off x="457200" y="4846320"/>
+            <a:ext cx="10972800" cy="1828800"/>
           </a:xfrm>
           <a:prstGeom prst="rect">
             <a:avLst/>
@@ -8323,6 +8612,19 @@
           </a:p>
           <a:p>
             <a:pPr>
+              <a:defRPr sz="1400" b="1">
+                <a:solidFill>
+                  <a:srgbClr val="2ECC71"/>
+                </a:solidFill>
+                <a:latin typeface="Calibri"/>
+              </a:defRPr>
+            </a:pPr>
+            <a:r>
+              <a:t>Triangle + flat-top waves beat sinusoidal by ~1,000 BIC (with 1 extra param)</a:t>
+            </a:r>
+          </a:p>
+          <a:p>
+            <a:pPr>
               <a:defRPr sz="1300" b="0">
                 <a:solidFill>
                   <a:srgbClr val="888888"/>
@@ -8331,33 +8633,33 @@
               </a:defRPr>
             </a:pPr>
             <a:r>
-              <a:t>467-function dictionary: entropy-damped, power-law-damped, undamped, EPPL components</a:t>
-            </a:r>
-          </a:p>
-          <a:p>
-            <a:pPr>
-              <a:defRPr sz="1400" b="1">
-                <a:solidFill>
-                  <a:srgbClr val="F7931A"/>
-                </a:solidFill>
-                <a:latin typeface="Calibri"/>
-              </a:defRPr>
-            </a:pPr>
-            <a:r>
-              <a:t>Entropy selected 16 of 24 terms. Power-law selected ZERO when entropy available.</a:t>
-            </a:r>
-          </a:p>
-          <a:p>
-            <a:pPr>
-              <a:defRPr sz="1400" b="1">
-                <a:solidFill>
-                  <a:srgbClr val="2ECC71"/>
-                </a:solidFill>
-                <a:latin typeface="Calibri"/>
-              </a:defRPr>
-            </a:pPr>
-            <a:r>
-              <a:t>7-param model: R²=0.9935, BIC=-23,886 — best BIC at 7 params across ALL models</a:t>
+              <a:t>Mixed-shape dictionary (5 wave types × 2 time bases): R²=0.997 at 27 params</a:t>
+            </a:r>
+          </a:p>
+          <a:p>
+            <a:pPr>
+              <a:defRPr sz="1300" b="0">
+                <a:solidFill>
+                  <a:srgbClr val="888888"/>
+                </a:solidFill>
+                <a:latin typeface="Calibri"/>
+              </a:defRPr>
+            </a:pPr>
+            <a:r>
+              <a:t>Flat-top dominates selection (10/25 terms) — Bitcoin has plateau-like peaks</a:t>
+            </a:r>
+          </a:p>
+          <a:p>
+            <a:pPr>
+              <a:defRPr sz="1300" b="0">
+                <a:solidFill>
+                  <a:srgbClr val="EEEEEE"/>
+                </a:solidFill>
+                <a:latin typeface="Calibri"/>
+              </a:defRPr>
+            </a:pPr>
+            <a:r>
+              <a:t>Triangle wave at ω=7.4 was #1 novel selection — log-periodic peaks are sharper than sinusoidal</a:t>
             </a:r>
           </a:p>
         </p:txBody>
@@ -8462,14 +8764,14 @@
               </a:defRPr>
             </a:pPr>
             <a:r>
-              <a:t>Model Comparison: BIC Efficiency</a:t>
+              <a:t>Bubble Shapes Are Maturing</a:t>
             </a:r>
           </a:p>
         </p:txBody>
       </p:sp>
       <p:pic>
         <p:nvPicPr>
-          <p:cNvPr id="4" name="Picture 3" descr="model_comparison.png"/>
+          <p:cNvPr id="4" name="Picture 3" descr="bubble_evolution.png"/>
           <p:cNvPicPr>
             <a:picLocks noChangeAspect="1"/>
           </p:cNvPicPr>
@@ -8484,7 +8786,7 @@
         <p:spPr>
           <a:xfrm>
             <a:off x="1371600" y="1097280"/>
-            <a:ext cx="9418320" cy="4851862"/>
+            <a:ext cx="9418320" cy="5283583"/>
           </a:xfrm>
           <a:prstGeom prst="rect">
             <a:avLst/>
@@ -8499,8 +8801,8 @@
         </p:nvSpPr>
         <p:spPr>
           <a:xfrm>
-            <a:off x="457200" y="5486400"/>
-            <a:ext cx="10972800" cy="1097280"/>
+            <a:off x="457200" y="5303520"/>
+            <a:ext cx="10972800" cy="1371600"/>
           </a:xfrm>
           <a:prstGeom prst="rect">
             <a:avLst/>
@@ -8524,6 +8826,32 @@
           </a:p>
           <a:p>
             <a:pPr>
+              <a:defRPr sz="1400" b="1">
+                <a:solidFill>
+                  <a:srgbClr val="EEEEEE"/>
+                </a:solidFill>
+                <a:latin typeface="Calibri"/>
+              </a:defRPr>
+            </a:pPr>
+            <a:r>
+              <a:t>Duration widening: 0.87yr (2011) → 5.39yr (2024) — statistically significant (p=0.012)</a:t>
+            </a:r>
+          </a:p>
+          <a:p>
+            <a:pPr>
+              <a:defRPr sz="1400" b="1">
+                <a:solidFill>
+                  <a:srgbClr val="EEEEEE"/>
+                </a:solidFill>
+                <a:latin typeface="Calibri"/>
+              </a:defRPr>
+            </a:pPr>
+            <a:r>
+              <a:t>Amplitude shrinking: each cycle ~20% smaller (p=0.016)</a:t>
+            </a:r>
+          </a:p>
+          <a:p>
+            <a:pPr>
               <a:defRPr sz="1300" b="0">
                 <a:solidFill>
                   <a:srgbClr val="888888"/>
@@ -8532,20 +8860,7 @@
               </a:defRPr>
             </a:pPr>
             <a:r>
-              <a:t>BIC penalizes extra parameters — lower BIC = better fit per parameter</a:t>
-            </a:r>
-          </a:p>
-          <a:p>
-            <a:pPr>
-              <a:defRPr sz="1400" b="1">
-                <a:solidFill>
-                  <a:srgbClr val="2ECC71"/>
-                </a:solidFill>
-                <a:latin typeface="Calibri"/>
-              </a:defRPr>
-            </a:pPr>
-            <a:r>
-              <a:t>Greedy v2 (7p) beats PCA (7p) and EPPL 2+2 (16p) — entropy basis is most efficient</a:t>
+              <a:t>Interpretation: as participant base grows, speculative excess distributes over longer periods</a:t>
             </a:r>
           </a:p>
         </p:txBody>
@@ -8650,21 +8965,45 @@
               </a:defRPr>
             </a:pPr>
             <a:r>
-              <a:t>Implications for Bitcoin's Future</a:t>
-            </a:r>
-          </a:p>
-        </p:txBody>
-      </p:sp>
-      <p:sp>
-        <p:nvSpPr>
-          <p:cNvPr id="4" name="TextBox 3"/>
+              <a:t>Greedy Select: Entropy Damping Dominates</a:t>
+            </a:r>
+          </a:p>
+        </p:txBody>
+      </p:sp>
+      <p:pic>
+        <p:nvPicPr>
+          <p:cNvPr id="4" name="Picture 3" descr="greedy_damping.png"/>
+          <p:cNvPicPr>
+            <a:picLocks noChangeAspect="1"/>
+          </p:cNvPicPr>
+          <p:nvPr/>
+        </p:nvPicPr>
+        <p:blipFill>
+          <a:blip r:embed="rId2"/>
+          <a:stretch>
+            <a:fillRect/>
+          </a:stretch>
+        </p:blipFill>
+        <p:spPr>
+          <a:xfrm>
+            <a:off x="1371600" y="1097280"/>
+            <a:ext cx="9418320" cy="6397349"/>
+          </a:xfrm>
+          <a:prstGeom prst="rect">
+            <a:avLst/>
+          </a:prstGeom>
+        </p:spPr>
+      </p:pic>
+      <p:sp>
+        <p:nvSpPr>
+          <p:cNvPr id="5" name="TextBox 4"/>
           <p:cNvSpPr txBox="1"/>
           <p:nvPr/>
         </p:nvSpPr>
         <p:spPr>
           <a:xfrm>
-            <a:off x="457200" y="1097280"/>
-            <a:ext cx="10515600" cy="5029200"/>
+            <a:off x="457200" y="5029200"/>
+            <a:ext cx="10972800" cy="1645920"/>
           </a:xfrm>
           <a:prstGeom prst="rect">
             <a:avLst/>
@@ -8678,63 +9017,30 @@
           <a:lstStyle/>
           <a:p>
             <a:pPr algn="l">
-              <a:defRPr sz="1800" b="0">
-                <a:solidFill>
-                  <a:srgbClr val="EEEEEE"/>
-                </a:solidFill>
-                <a:latin typeface="Calibri"/>
-              </a:defRPr>
-            </a:pPr>
-          </a:p>
-          <a:p>
-            <a:pPr>
-              <a:defRPr sz="2000" b="1">
-                <a:solidFill>
-                  <a:srgbClr val="EEEEEE"/>
-                </a:solidFill>
-                <a:latin typeface="Calibri"/>
-              </a:defRPr>
-            </a:pPr>
-            <a:r>
-              <a:t>The power law trend (β≈5.1) continues — this is structural</a:t>
-            </a:r>
-          </a:p>
-          <a:p>
-            <a:pPr>
-              <a:defRPr sz="600" b="0">
-                <a:solidFill>
-                  <a:srgbClr val="EEEEEE"/>
-                </a:solidFill>
-                <a:latin typeface="Calibri"/>
-              </a:defRPr>
-            </a:pPr>
-          </a:p>
-          <a:p>
-            <a:pPr>
-              <a:defRPr sz="2000" b="1">
-                <a:solidFill>
-                  <a:srgbClr val="5DADE2"/>
-                </a:solidFill>
-                <a:latin typeface="Calibri"/>
-              </a:defRPr>
-            </a:pPr>
-            <a:r>
-              <a:t>The halving cycle (~3.6yr) persists undamped — expect continued cyclicality</a:t>
-            </a:r>
-          </a:p>
-          <a:p>
-            <a:pPr>
-              <a:defRPr sz="600" b="0">
-                <a:solidFill>
-                  <a:srgbClr val="EEEEEE"/>
-                </a:solidFill>
-                <a:latin typeface="Calibri"/>
-              </a:defRPr>
-            </a:pPr>
-          </a:p>
-          <a:p>
-            <a:pPr>
-              <a:defRPr sz="2000" b="1">
+              <a:defRPr sz="1300" b="0">
+                <a:solidFill>
+                  <a:srgbClr val="EEEEEE"/>
+                </a:solidFill>
+                <a:latin typeface="Calibri"/>
+              </a:defRPr>
+            </a:pPr>
+          </a:p>
+          <a:p>
+            <a:pPr>
+              <a:defRPr sz="1300" b="0">
+                <a:solidFill>
+                  <a:srgbClr val="888888"/>
+                </a:solidFill>
+                <a:latin typeface="Calibri"/>
+              </a:defRPr>
+            </a:pPr>
+            <a:r>
+              <a:t>467-function dictionary: entropy-damped, power-law-damped, undamped, EPPL components</a:t>
+            </a:r>
+          </a:p>
+          <a:p>
+            <a:pPr>
+              <a:defRPr sz="1400" b="1">
                 <a:solidFill>
                   <a:srgbClr val="F7931A"/>
                 </a:solidFill>
@@ -8742,79 +9048,20 @@
               </a:defRPr>
             </a:pPr>
             <a:r>
-              <a:t>But: each cycle is 20% smaller in amplitude and wider in duration</a:t>
-            </a:r>
-          </a:p>
-          <a:p>
-            <a:pPr>
-              <a:defRPr sz="600" b="0">
-                <a:solidFill>
-                  <a:srgbClr val="EEEEEE"/>
-                </a:solidFill>
-                <a:latin typeface="Calibri"/>
-              </a:defRPr>
-            </a:pPr>
-          </a:p>
-          <a:p>
-            <a:pPr>
-              <a:defRPr sz="2000" b="1">
-                <a:solidFill>
-                  <a:srgbClr val="E74C3C"/>
-                </a:solidFill>
-                <a:latin typeface="Calibri"/>
-              </a:defRPr>
-            </a:pPr>
-            <a:r>
-              <a:t>The era of 10×+ speculative spikes is over</a:t>
-            </a:r>
-          </a:p>
-          <a:p>
-            <a:pPr lvl="1">
-              <a:defRPr sz="1600" b="0">
-                <a:solidFill>
-                  <a:srgbClr val="888888"/>
-                </a:solidFill>
-                <a:latin typeface="Calibri"/>
-              </a:defRPr>
-            </a:pPr>
-            <a:r>
-              <a:t>Entropy says adoption uncertainty is resolved</a:t>
-            </a:r>
-          </a:p>
-          <a:p>
-            <a:pPr>
-              <a:defRPr sz="600" b="0">
-                <a:solidFill>
-                  <a:srgbClr val="EEEEEE"/>
-                </a:solidFill>
-                <a:latin typeface="Calibri"/>
-              </a:defRPr>
-            </a:pPr>
-          </a:p>
-          <a:p>
-            <a:pPr>
-              <a:defRPr sz="1800" b="0">
-                <a:solidFill>
-                  <a:srgbClr val="EEEEEE"/>
-                </a:solidFill>
-                <a:latin typeface="Calibri"/>
-              </a:defRPr>
-            </a:pPr>
-            <a:r>
-              <a:t>Future cycles resemble normal asset class behavior with halving-driven periodicity</a:t>
-            </a:r>
-          </a:p>
-          <a:p>
-            <a:pPr lvl="1">
-              <a:defRPr sz="1600" b="0">
-                <a:solidFill>
-                  <a:srgbClr val="888888"/>
-                </a:solidFill>
-                <a:latin typeface="Calibri"/>
-              </a:defRPr>
-            </a:pPr>
-            <a:r>
-              <a:t>Projected: Cycle 7 (~2032) peak ~$465K, Cycle 8 (~2035) peak ~$818K</a:t>
+              <a:t>Entropy selected 16 of 24 terms. Power-law selected ZERO when entropy available.</a:t>
+            </a:r>
+          </a:p>
+          <a:p>
+            <a:pPr>
+              <a:defRPr sz="1400" b="1">
+                <a:solidFill>
+                  <a:srgbClr val="2ECC71"/>
+                </a:solidFill>
+                <a:latin typeface="Calibri"/>
+              </a:defRPr>
+            </a:pPr>
+            <a:r>
+              <a:t>7-param model: R²=0.9935, BIC=-23,886 — best BIC at 7 params across ALL models</a:t>
             </a:r>
           </a:p>
         </p:txBody>
@@ -8919,21 +9166,45 @@
               </a:defRPr>
             </a:pPr>
             <a:r>
-              <a:t>Tools and Reproducibility</a:t>
-            </a:r>
-          </a:p>
-        </p:txBody>
-      </p:sp>
-      <p:sp>
-        <p:nvSpPr>
-          <p:cNvPr id="4" name="TextBox 3"/>
+              <a:t>Model Comparison: BIC Efficiency</a:t>
+            </a:r>
+          </a:p>
+        </p:txBody>
+      </p:sp>
+      <p:pic>
+        <p:nvPicPr>
+          <p:cNvPr id="4" name="Picture 3" descr="model_comparison.png"/>
+          <p:cNvPicPr>
+            <a:picLocks noChangeAspect="1"/>
+          </p:cNvPicPr>
+          <p:nvPr/>
+        </p:nvPicPr>
+        <p:blipFill>
+          <a:blip r:embed="rId2"/>
+          <a:stretch>
+            <a:fillRect/>
+          </a:stretch>
+        </p:blipFill>
+        <p:spPr>
+          <a:xfrm>
+            <a:off x="1371600" y="1097280"/>
+            <a:ext cx="9418320" cy="4851862"/>
+          </a:xfrm>
+          <a:prstGeom prst="rect">
+            <a:avLst/>
+          </a:prstGeom>
+        </p:spPr>
+      </p:pic>
+      <p:sp>
+        <p:nvSpPr>
+          <p:cNvPr id="5" name="TextBox 4"/>
           <p:cNvSpPr txBox="1"/>
           <p:nvPr/>
         </p:nvSpPr>
         <p:spPr>
           <a:xfrm>
-            <a:off x="457200" y="1097280"/>
-            <a:ext cx="10515600" cy="5029200"/>
+            <a:off x="457200" y="5486400"/>
+            <a:ext cx="10972800" cy="1097280"/>
           </a:xfrm>
           <a:prstGeom prst="rect">
             <a:avLst/>
@@ -8947,30 +9218,17 @@
           <a:lstStyle/>
           <a:p>
             <a:pPr algn="l">
-              <a:defRPr sz="1800" b="0">
-                <a:solidFill>
-                  <a:srgbClr val="EEEEEE"/>
-                </a:solidFill>
-                <a:latin typeface="Calibri"/>
-              </a:defRPr>
-            </a:pPr>
-          </a:p>
-          <a:p>
-            <a:pPr>
-              <a:defRPr sz="2200" b="1">
-                <a:solidFill>
-                  <a:srgbClr val="F7931A"/>
-                </a:solidFill>
-                <a:latin typeface="Calibri"/>
-              </a:defRPr>
-            </a:pPr>
-            <a:r>
-              <a:t>Interactive exploration: quantoshi.xyz</a:t>
-            </a:r>
-          </a:p>
-          <a:p>
-            <a:pPr lvl="1">
-              <a:defRPr sz="1500" b="0">
+              <a:defRPr sz="1300" b="0">
+                <a:solidFill>
+                  <a:srgbClr val="EEEEEE"/>
+                </a:solidFill>
+                <a:latin typeface="Calibri"/>
+              </a:defRPr>
+            </a:pPr>
+          </a:p>
+          <a:p>
+            <a:pPr>
+              <a:defRPr sz="1300" b="0">
                 <a:solidFill>
                   <a:srgbClr val="888888"/>
                 </a:solidFill>
@@ -8978,120 +9236,12 @@
               </a:defRPr>
             </a:pPr>
             <a:r>
-              <a:t>9 tabs: Price &amp; Model Overlays, CAGR Heatmap, DCA, Retirement, Supercharger,</a:t>
-            </a:r>
-          </a:p>
-          <a:p>
-            <a:pPr lvl="1">
-              <a:defRPr sz="1500" b="0">
-                <a:solidFill>
-                  <a:srgbClr val="888888"/>
-                </a:solidFill>
-                <a:latin typeface="Calibri"/>
-              </a:defRPr>
-            </a:pPr>
-            <a:r>
-              <a:t>Citadel Planner, Stack Tracker, Model Info, FAQ</a:t>
-            </a:r>
-          </a:p>
-          <a:p>
-            <a:pPr>
-              <a:defRPr sz="800" b="0">
-                <a:solidFill>
-                  <a:srgbClr val="EEEEEE"/>
-                </a:solidFill>
-                <a:latin typeface="Calibri"/>
-              </a:defRPr>
-            </a:pPr>
-          </a:p>
-          <a:p>
-            <a:pPr>
-              <a:defRPr sz="1800" b="0">
-                <a:solidFill>
-                  <a:srgbClr val="EEEEEE"/>
-                </a:solidFill>
-                <a:latin typeface="Calibri"/>
-              </a:defRPr>
-            </a:pPr>
-            <a:r>
-              <a:t>Configuration panels: HybPPL (36 configs), EPPL (36 configs), LPPL (10 variants)</a:t>
-            </a:r>
-          </a:p>
-          <a:p>
-            <a:pPr lvl="1">
-              <a:defRPr sz="1500" b="0">
-                <a:solidFill>
-                  <a:srgbClr val="888888"/>
-                </a:solidFill>
-                <a:latin typeface="Calibri"/>
-              </a:defRPr>
-            </a:pPr>
-            <a:r>
-              <a:t>Two-model comparison (A/B) for side-by-side exploration</a:t>
-            </a:r>
-          </a:p>
-          <a:p>
-            <a:pPr>
-              <a:defRPr sz="800" b="0">
-                <a:solidFill>
-                  <a:srgbClr val="EEEEEE"/>
-                </a:solidFill>
-                <a:latin typeface="Calibri"/>
-              </a:defRPr>
-            </a:pPr>
-          </a:p>
-          <a:p>
-            <a:pPr>
-              <a:defRPr sz="1800" b="0">
-                <a:solidFill>
-                  <a:srgbClr val="EEEEEE"/>
-                </a:solidFill>
-                <a:latin typeface="Calibri"/>
-              </a:defRPr>
-            </a:pPr>
-            <a:r>
-              <a:t>Static analysis pages:</a:t>
-            </a:r>
-          </a:p>
-          <a:p>
-            <a:pPr lvl="1">
-              <a:defRPr sz="1500" b="0">
-                <a:solidFill>
-                  <a:srgbClr val="888888"/>
-                </a:solidFill>
-                <a:latin typeface="Calibri"/>
-              </a:defRPr>
-            </a:pPr>
-            <a:r>
-              <a:t>/B: Sensitivity sweep  |  /D: Residual FFT  |  /G: Wave basis comparison</a:t>
-            </a:r>
-          </a:p>
-          <a:p>
-            <a:pPr lvl="1">
-              <a:defRPr sz="1500" b="0">
-                <a:solidFill>
-                  <a:srgbClr val="888888"/>
-                </a:solidFill>
-                <a:latin typeface="Calibri"/>
-              </a:defRPr>
-            </a:pPr>
-            <a:r>
-              <a:t>/H: Genesis date sweep  |  /E: Regime shift analysis</a:t>
-            </a:r>
-          </a:p>
-          <a:p>
-            <a:pPr>
-              <a:defRPr sz="800" b="0">
-                <a:solidFill>
-                  <a:srgbClr val="EEEEEE"/>
-                </a:solidFill>
-                <a:latin typeface="Calibri"/>
-              </a:defRPr>
-            </a:pPr>
-          </a:p>
-          <a:p>
-            <a:pPr>
-              <a:defRPr sz="1800" b="1">
+              <a:t>BIC penalizes extra parameters — lower BIC = better fit per parameter</a:t>
+            </a:r>
+          </a:p>
+          <a:p>
+            <a:pPr>
+              <a:defRPr sz="1400" b="1">
                 <a:solidFill>
                   <a:srgbClr val="2ECC71"/>
                 </a:solidFill>
@@ -9099,20 +9249,7 @@
               </a:defRPr>
             </a:pPr>
             <a:r>
-              <a:t>Open source: github.com/bg002h/quantoshi</a:t>
-            </a:r>
-          </a:p>
-          <a:p>
-            <a:pPr lvl="1">
-              <a:defRPr sz="1500" b="0">
-                <a:solidFill>
-                  <a:srgbClr val="888888"/>
-                </a:solidFill>
-                <a:latin typeface="Calibri"/>
-              </a:defRPr>
-            </a:pPr>
-            <a:r>
-              <a:t>Model Info tab (/8): complete formulas, coefficients, methodology for every model</a:t>
+              <a:t>Greedy v2 (7p) beats PCA (7p) and EPPL 2+2 (16p) — entropy basis is most efficient</a:t>
             </a:r>
           </a:p>
         </p:txBody>
@@ -10114,14 +10251,14 @@
         </p:nvSpPr>
         <p:spPr>
           <a:xfrm>
-            <a:off x="0" y="2926080"/>
-            <a:ext cx="12191695" cy="45720"/>
+            <a:off x="0" y="0"/>
+            <a:ext cx="12191695" cy="822960"/>
           </a:xfrm>
           <a:prstGeom prst="rect">
             <a:avLst/>
           </a:prstGeom>
           <a:solidFill>
-            <a:srgbClr val="F7931A"/>
+            <a:srgbClr val="16213E"/>
           </a:solidFill>
           <a:ln>
             <a:noFill/>
@@ -10157,8 +10294,8 @@
         </p:nvSpPr>
         <p:spPr>
           <a:xfrm>
-            <a:off x="914400" y="1371600"/>
-            <a:ext cx="10058400" cy="1371600"/>
+            <a:off x="457200" y="91440"/>
+            <a:ext cx="10972800" cy="640080"/>
           </a:xfrm>
           <a:prstGeom prst="rect">
             <a:avLst/>
@@ -10171,16 +10308,16 @@
           </a:bodyPr>
           <a:lstStyle/>
           <a:p>
-            <a:pPr algn="ctr">
-              <a:defRPr sz="3600" b="1">
-                <a:solidFill>
-                  <a:srgbClr val="EEEEEE"/>
-                </a:solidFill>
-                <a:latin typeface="Calibri"/>
-              </a:defRPr>
-            </a:pPr>
-            <a:r>
-              <a:t>Summary: Three Sentences</a:t>
+            <a:pPr algn="l">
+              <a:defRPr sz="2800" b="1">
+                <a:solidFill>
+                  <a:srgbClr val="F7931A"/>
+                </a:solidFill>
+                <a:latin typeface="Calibri"/>
+              </a:defRPr>
+            </a:pPr>
+            <a:r>
+              <a:t>Implications for Bitcoin's Future</a:t>
             </a:r>
           </a:p>
         </p:txBody>
@@ -10193,8 +10330,8 @@
         </p:nvSpPr>
         <p:spPr>
           <a:xfrm>
-            <a:off x="731520" y="1828800"/>
-            <a:ext cx="10515600" cy="4114800"/>
+            <a:off x="457200" y="1097280"/>
+            <a:ext cx="10515600" cy="5029200"/>
           </a:xfrm>
           <a:prstGeom prst="rect">
             <a:avLst/>
@@ -10208,17 +10345,7 @@
           <a:lstStyle/>
           <a:p>
             <a:pPr algn="l">
-              <a:defRPr sz="2000" b="0">
-                <a:solidFill>
-                  <a:srgbClr val="EEEEEE"/>
-                </a:solidFill>
-                <a:latin typeface="Calibri"/>
-              </a:defRPr>
-            </a:pPr>
-          </a:p>
-          <a:p>
-            <a:pPr>
-              <a:defRPr sz="800" b="0">
+              <a:defRPr sz="1800" b="0">
                 <a:solidFill>
                   <a:srgbClr val="EEEEEE"/>
                 </a:solidFill>
@@ -10236,25 +10363,12 @@
               </a:defRPr>
             </a:pPr>
             <a:r>
-              <a:t>1.  Bitcoin has exactly two oscillatory structures — a log-periodic speculative signal</a:t>
-            </a:r>
-          </a:p>
-          <a:p>
-            <a:pPr>
-              <a:defRPr sz="2000" b="0">
-                <a:solidFill>
-                  <a:srgbClr val="EEEEEE"/>
-                </a:solidFill>
-                <a:latin typeface="Calibri"/>
-              </a:defRPr>
-            </a:pPr>
-            <a:r>
-              <a:t>     and a calendar halving cycle — confirmed independently by PCA, EMD, and DMD.</a:t>
-            </a:r>
-          </a:p>
-          <a:p>
-            <a:pPr>
-              <a:defRPr sz="1200" b="0">
+              <a:t>The power law trend (β≈5.1) continues — this is structural</a:t>
+            </a:r>
+          </a:p>
+          <a:p>
+            <a:pPr>
+              <a:defRPr sz="600" b="0">
                 <a:solidFill>
                   <a:srgbClr val="EEEEEE"/>
                 </a:solidFill>
@@ -10266,31 +10380,41 @@
             <a:pPr>
               <a:defRPr sz="2000" b="1">
                 <a:solidFill>
+                  <a:srgbClr val="5DADE2"/>
+                </a:solidFill>
+                <a:latin typeface="Calibri"/>
+              </a:defRPr>
+            </a:pPr>
+            <a:r>
+              <a:t>The halving cycle (~3.6yr) persists undamped — expect continued cyclicality</a:t>
+            </a:r>
+          </a:p>
+          <a:p>
+            <a:pPr>
+              <a:defRPr sz="600" b="0">
+                <a:solidFill>
+                  <a:srgbClr val="EEEEEE"/>
+                </a:solidFill>
+                <a:latin typeface="Calibri"/>
+              </a:defRPr>
+            </a:pPr>
+          </a:p>
+          <a:p>
+            <a:pPr>
+              <a:defRPr sz="2000" b="1">
+                <a:solidFill>
                   <a:srgbClr val="F7931A"/>
                 </a:solidFill>
                 <a:latin typeface="Calibri"/>
               </a:defRPr>
             </a:pPr>
             <a:r>
-              <a:t>2.  The speculative signal peaked in 2013 and is now extinct, as captured by</a:t>
-            </a:r>
-          </a:p>
-          <a:p>
-            <a:pPr>
-              <a:defRPr sz="2000" b="0">
-                <a:solidFill>
-                  <a:srgbClr val="F7931A"/>
-                </a:solidFill>
-                <a:latin typeface="Calibri"/>
-              </a:defRPr>
-            </a:pPr>
-            <a:r>
-              <a:t>     Shannon entropy damping — the first information-theoretic model of Bitcoin.</a:t>
-            </a:r>
-          </a:p>
-          <a:p>
-            <a:pPr>
-              <a:defRPr sz="1200" b="0">
+              <a:t>But: each cycle is 20% smaller in amplitude and wider in duration</a:t>
+            </a:r>
+          </a:p>
+          <a:p>
+            <a:pPr>
+              <a:defRPr sz="600" b="0">
                 <a:solidFill>
                   <a:srgbClr val="EEEEEE"/>
                 </a:solidFill>
@@ -10302,26 +10426,62 @@
             <a:pPr>
               <a:defRPr sz="2000" b="1">
                 <a:solidFill>
-                  <a:srgbClr val="5DADE2"/>
-                </a:solidFill>
-                <a:latin typeface="Calibri"/>
-              </a:defRPr>
-            </a:pPr>
-            <a:r>
-              <a:t>3.  Future price behavior: power law trend + flattening, amplitude-shrinking</a:t>
-            </a:r>
-          </a:p>
-          <a:p>
-            <a:pPr>
-              <a:defRPr sz="2000" b="0">
-                <a:solidFill>
-                  <a:srgbClr val="5DADE2"/>
-                </a:solidFill>
-                <a:latin typeface="Calibri"/>
-              </a:defRPr>
-            </a:pPr>
-            <a:r>
-              <a:t>     halving cycle — the mathematical signature of market maturation.</a:t>
+                  <a:srgbClr val="E74C3C"/>
+                </a:solidFill>
+                <a:latin typeface="Calibri"/>
+              </a:defRPr>
+            </a:pPr>
+            <a:r>
+              <a:t>The era of 10×+ speculative spikes is over</a:t>
+            </a:r>
+          </a:p>
+          <a:p>
+            <a:pPr lvl="1">
+              <a:defRPr sz="1600" b="0">
+                <a:solidFill>
+                  <a:srgbClr val="888888"/>
+                </a:solidFill>
+                <a:latin typeface="Calibri"/>
+              </a:defRPr>
+            </a:pPr>
+            <a:r>
+              <a:t>Entropy says adoption uncertainty is resolved</a:t>
+            </a:r>
+          </a:p>
+          <a:p>
+            <a:pPr>
+              <a:defRPr sz="600" b="0">
+                <a:solidFill>
+                  <a:srgbClr val="EEEEEE"/>
+                </a:solidFill>
+                <a:latin typeface="Calibri"/>
+              </a:defRPr>
+            </a:pPr>
+          </a:p>
+          <a:p>
+            <a:pPr>
+              <a:defRPr sz="1800" b="0">
+                <a:solidFill>
+                  <a:srgbClr val="EEEEEE"/>
+                </a:solidFill>
+                <a:latin typeface="Calibri"/>
+              </a:defRPr>
+            </a:pPr>
+            <a:r>
+              <a:t>Future cycles resemble normal asset class behavior with halving-driven periodicity</a:t>
+            </a:r>
+          </a:p>
+          <a:p>
+            <a:pPr lvl="1">
+              <a:defRPr sz="1600" b="0">
+                <a:solidFill>
+                  <a:srgbClr val="888888"/>
+                </a:solidFill>
+                <a:latin typeface="Calibri"/>
+              </a:defRPr>
+            </a:pPr>
+            <a:r>
+              <a:t>Projected: Cycle 7 (~2032) peak ~$465K, Cycle 8 (~2035) peak ~$818K</a:t>
             </a:r>
           </a:p>
         </p:txBody>
@@ -10426,7 +10586,7 @@
               </a:defRPr>
             </a:pPr>
             <a:r>
-              <a:t>Model Robustness: Frequency, Volatility, Scale</a:t>
+              <a:t>Tools and Reproducibility</a:t>
             </a:r>
           </a:p>
         </p:txBody>
@@ -10439,8 +10599,8 @@
         </p:nvSpPr>
         <p:spPr>
           <a:xfrm>
-            <a:off x="274320" y="1005840"/>
-            <a:ext cx="11430000" cy="5486400"/>
+            <a:off x="457200" y="1097280"/>
+            <a:ext cx="10515600" cy="5029200"/>
           </a:xfrm>
           <a:prstGeom prst="rect">
             <a:avLst/>
@@ -10454,17 +10614,151 @@
           <a:lstStyle/>
           <a:p>
             <a:pPr algn="l">
-              <a:defRPr sz="1400" b="0">
-                <a:solidFill>
-                  <a:srgbClr val="EEEEEE"/>
-                </a:solidFill>
-                <a:latin typeface="Calibri"/>
-              </a:defRPr>
-            </a:pPr>
-          </a:p>
-          <a:p>
-            <a:pPr>
-              <a:defRPr sz="1600" b="1">
+              <a:defRPr sz="1800" b="0">
+                <a:solidFill>
+                  <a:srgbClr val="EEEEEE"/>
+                </a:solidFill>
+                <a:latin typeface="Calibri"/>
+              </a:defRPr>
+            </a:pPr>
+          </a:p>
+          <a:p>
+            <a:pPr>
+              <a:defRPr sz="2200" b="1">
+                <a:solidFill>
+                  <a:srgbClr val="F7931A"/>
+                </a:solidFill>
+                <a:latin typeface="Calibri"/>
+              </a:defRPr>
+            </a:pPr>
+            <a:r>
+              <a:t>Interactive exploration: quantoshi.xyz</a:t>
+            </a:r>
+          </a:p>
+          <a:p>
+            <a:pPr lvl="1">
+              <a:defRPr sz="1500" b="0">
+                <a:solidFill>
+                  <a:srgbClr val="888888"/>
+                </a:solidFill>
+                <a:latin typeface="Calibri"/>
+              </a:defRPr>
+            </a:pPr>
+            <a:r>
+              <a:t>9 tabs: Price &amp; Model Overlays, CAGR Heatmap, DCA, Retirement, Supercharger,</a:t>
+            </a:r>
+          </a:p>
+          <a:p>
+            <a:pPr lvl="1">
+              <a:defRPr sz="1500" b="0">
+                <a:solidFill>
+                  <a:srgbClr val="888888"/>
+                </a:solidFill>
+                <a:latin typeface="Calibri"/>
+              </a:defRPr>
+            </a:pPr>
+            <a:r>
+              <a:t>Citadel Planner, Stack Tracker, Model Info, FAQ</a:t>
+            </a:r>
+          </a:p>
+          <a:p>
+            <a:pPr>
+              <a:defRPr sz="800" b="0">
+                <a:solidFill>
+                  <a:srgbClr val="EEEEEE"/>
+                </a:solidFill>
+                <a:latin typeface="Calibri"/>
+              </a:defRPr>
+            </a:pPr>
+          </a:p>
+          <a:p>
+            <a:pPr>
+              <a:defRPr sz="1800" b="0">
+                <a:solidFill>
+                  <a:srgbClr val="EEEEEE"/>
+                </a:solidFill>
+                <a:latin typeface="Calibri"/>
+              </a:defRPr>
+            </a:pPr>
+            <a:r>
+              <a:t>Configuration panels: HybPPL (36 configs), EPPL (36 configs), LPPL (10 variants)</a:t>
+            </a:r>
+          </a:p>
+          <a:p>
+            <a:pPr lvl="1">
+              <a:defRPr sz="1500" b="0">
+                <a:solidFill>
+                  <a:srgbClr val="888888"/>
+                </a:solidFill>
+                <a:latin typeface="Calibri"/>
+              </a:defRPr>
+            </a:pPr>
+            <a:r>
+              <a:t>Two-model comparison (A/B) for side-by-side exploration</a:t>
+            </a:r>
+          </a:p>
+          <a:p>
+            <a:pPr>
+              <a:defRPr sz="800" b="0">
+                <a:solidFill>
+                  <a:srgbClr val="EEEEEE"/>
+                </a:solidFill>
+                <a:latin typeface="Calibri"/>
+              </a:defRPr>
+            </a:pPr>
+          </a:p>
+          <a:p>
+            <a:pPr>
+              <a:defRPr sz="1800" b="0">
+                <a:solidFill>
+                  <a:srgbClr val="EEEEEE"/>
+                </a:solidFill>
+                <a:latin typeface="Calibri"/>
+              </a:defRPr>
+            </a:pPr>
+            <a:r>
+              <a:t>Static analysis pages:</a:t>
+            </a:r>
+          </a:p>
+          <a:p>
+            <a:pPr lvl="1">
+              <a:defRPr sz="1500" b="0">
+                <a:solidFill>
+                  <a:srgbClr val="888888"/>
+                </a:solidFill>
+                <a:latin typeface="Calibri"/>
+              </a:defRPr>
+            </a:pPr>
+            <a:r>
+              <a:t>/B: Sensitivity sweep  |  /D: Residual FFT  |  /G: Wave basis comparison</a:t>
+            </a:r>
+          </a:p>
+          <a:p>
+            <a:pPr lvl="1">
+              <a:defRPr sz="1500" b="0">
+                <a:solidFill>
+                  <a:srgbClr val="888888"/>
+                </a:solidFill>
+                <a:latin typeface="Calibri"/>
+              </a:defRPr>
+            </a:pPr>
+            <a:r>
+              <a:t>/H: Genesis date sweep  |  /E: Regime shift analysis</a:t>
+            </a:r>
+          </a:p>
+          <a:p>
+            <a:pPr>
+              <a:defRPr sz="800" b="0">
+                <a:solidFill>
+                  <a:srgbClr val="EEEEEE"/>
+                </a:solidFill>
+                <a:latin typeface="Calibri"/>
+              </a:defRPr>
+            </a:pPr>
+          </a:p>
+          <a:p>
+            <a:pPr>
+              <a:defRPr sz="1800" b="1">
                 <a:solidFill>
                   <a:srgbClr val="2ECC71"/>
                 </a:solidFill>
@@ -10472,12 +10766,12 @@
               </a:defRPr>
             </a:pPr>
             <a:r>
-              <a:t>Time-varying frequency: ω₁ = -0.056 ≈ 0</a:t>
+              <a:t>Open source: github.com/bg002h/quantoshi</a:t>
             </a:r>
           </a:p>
           <a:p>
             <a:pPr lvl="1">
-              <a:defRPr sz="1300" b="0">
+              <a:defRPr sz="1500" b="0">
                 <a:solidFill>
                   <a:srgbClr val="888888"/>
                 </a:solidFill>
@@ -10485,118 +10779,7 @@
               </a:defRPr>
             </a:pPr>
             <a:r>
-              <a:t>The log-periodic frequency is constant — not drifting. Fixed-ω assumption validated.</a:t>
-            </a:r>
-          </a:p>
-          <a:p>
-            <a:pPr>
-              <a:defRPr sz="600" b="0">
-                <a:solidFill>
-                  <a:srgbClr val="EEEEEE"/>
-                </a:solidFill>
-                <a:latin typeface="Calibri"/>
-              </a:defRPr>
-            </a:pPr>
-          </a:p>
-          <a:p>
-            <a:pPr>
-              <a:defRPr sz="1600" b="1">
-                <a:solidFill>
-                  <a:srgbClr val="5DADE2"/>
-                </a:solidFill>
-                <a:latin typeface="Calibri"/>
-              </a:defRPr>
-            </a:pPr>
-            <a:r>
-              <a:t>Heteroscedastic volatility: σ(t) = 0.077·t⁻⁰·¹⁹</a:t>
-            </a:r>
-          </a:p>
-          <a:p>
-            <a:pPr lvl="1">
-              <a:defRPr sz="1300" b="0">
-                <a:solidFill>
-                  <a:srgbClr val="888888"/>
-                </a:solidFill>
-                <a:latin typeface="Calibri"/>
-              </a:defRPr>
-            </a:pPr>
-            <a:r>
-              <a:t>Windowed σ: 0.150 (2010-13) → 0.109 (2013-17) → 0.139 (2017-21) → 0.092 (2021-26)</a:t>
-            </a:r>
-          </a:p>
-          <a:p>
-            <a:pPr lvl="1">
-              <a:defRPr sz="1300" b="0">
-                <a:solidFill>
-                  <a:srgbClr val="888888"/>
-                </a:solidFill>
-                <a:latin typeface="Calibri"/>
-              </a:defRPr>
-            </a:pPr>
-            <a:r>
-              <a:t>Early era is 1.5× more volatile — should use time-dependent quantile bands</a:t>
-            </a:r>
-          </a:p>
-          <a:p>
-            <a:pPr>
-              <a:defRPr sz="600" b="0">
-                <a:solidFill>
-                  <a:srgbClr val="EEEEEE"/>
-                </a:solidFill>
-                <a:latin typeface="Calibri"/>
-              </a:defRPr>
-            </a:pPr>
-          </a:p>
-          <a:p>
-            <a:pPr>
-              <a:defRPr sz="1600" b="1">
-                <a:solidFill>
-                  <a:srgbClr val="F7931A"/>
-                </a:solidFill>
-                <a:latin typeface="Calibri"/>
-              </a:defRPr>
-            </a:pPr>
-            <a:r>
-              <a:t>Multi-scale self-similarity:</a:t>
-            </a:r>
-          </a:p>
-          <a:p>
-            <a:pPr lvl="1">
-              <a:defRPr sz="1300" b="0">
-                <a:solidFill>
-                  <a:srgbClr val="EEEEEE"/>
-                </a:solidFill>
-                <a:latin typeface="Calibri"/>
-              </a:defRPr>
-            </a:pPr>
-            <a:r>
-              <a:t>Daily β=5.08  |  Weekly β=5.09  |  Monthly β=5.12  |  Quarterly β=5.18  |  Yearly β=5.34</a:t>
-            </a:r>
-          </a:p>
-          <a:p>
-            <a:pPr lvl="1">
-              <a:defRPr sz="1300" b="0">
-                <a:solidFill>
-                  <a:srgbClr val="2ECC71"/>
-                </a:solidFill>
-                <a:latin typeface="Calibri"/>
-              </a:defRPr>
-            </a:pPr>
-            <a:r>
-              <a:t>R² &gt; 0.96 at every resolution. The power law holds from daily to yearly.</a:t>
-            </a:r>
-          </a:p>
-          <a:p>
-            <a:pPr lvl="1">
-              <a:defRPr sz="1300" b="0">
-                <a:solidFill>
-                  <a:srgbClr val="888888"/>
-                </a:solidFill>
-                <a:latin typeface="Calibri"/>
-              </a:defRPr>
-            </a:pPr>
-            <a:r>
-              <a:t>Slight β increase at coarser scales: aggregation removes downside volatility.</a:t>
+              <a:t>Model Info tab (/8): complete formulas, coefficients, methodology for every model</a:t>
             </a:r>
           </a:p>
         </p:txBody>
@@ -10635,14 +10818,14 @@
         </p:nvSpPr>
         <p:spPr>
           <a:xfrm>
-            <a:off x="0" y="0"/>
-            <a:ext cx="12191695" cy="822960"/>
+            <a:off x="0" y="2926080"/>
+            <a:ext cx="12191695" cy="45720"/>
           </a:xfrm>
           <a:prstGeom prst="rect">
             <a:avLst/>
           </a:prstGeom>
           <a:solidFill>
-            <a:srgbClr val="16213E"/>
+            <a:srgbClr val="F7931A"/>
           </a:solidFill>
           <a:ln>
             <a:noFill/>
@@ -10678,8 +10861,8 @@
         </p:nvSpPr>
         <p:spPr>
           <a:xfrm>
-            <a:off x="457200" y="91440"/>
-            <a:ext cx="10972800" cy="640080"/>
+            <a:off x="914400" y="1371600"/>
+            <a:ext cx="10058400" cy="1371600"/>
           </a:xfrm>
           <a:prstGeom prst="rect">
             <a:avLst/>
@@ -10692,16 +10875,16 @@
           </a:bodyPr>
           <a:lstStyle/>
           <a:p>
-            <a:pPr algn="l">
-              <a:defRPr sz="2800" b="1">
-                <a:solidFill>
-                  <a:srgbClr val="F7931A"/>
-                </a:solidFill>
-                <a:latin typeface="Calibri"/>
-              </a:defRPr>
-            </a:pPr>
-            <a:r>
-              <a:t>Cross-Validation: Which Models Generalize?</a:t>
+            <a:pPr algn="ctr">
+              <a:defRPr sz="3600" b="1">
+                <a:solidFill>
+                  <a:srgbClr val="EEEEEE"/>
+                </a:solidFill>
+                <a:latin typeface="Calibri"/>
+              </a:defRPr>
+            </a:pPr>
+            <a:r>
+              <a:t>Summary: Three Sentences</a:t>
             </a:r>
           </a:p>
         </p:txBody>
@@ -10714,8 +10897,8 @@
         </p:nvSpPr>
         <p:spPr>
           <a:xfrm>
-            <a:off x="274320" y="1005840"/>
-            <a:ext cx="11430000" cy="5486400"/>
+            <a:off x="731520" y="1828800"/>
+            <a:ext cx="10515600" cy="4114800"/>
           </a:xfrm>
           <a:prstGeom prst="rect">
             <a:avLst/>
@@ -10729,40 +10912,63 @@
           <a:lstStyle/>
           <a:p>
             <a:pPr algn="l">
-              <a:defRPr sz="1400" b="0">
-                <a:solidFill>
-                  <a:srgbClr val="EEEEEE"/>
-                </a:solidFill>
-                <a:latin typeface="Calibri"/>
-              </a:defRPr>
-            </a:pPr>
-          </a:p>
-          <a:p>
-            <a:pPr>
-              <a:defRPr sz="1600" b="1">
-                <a:solidFill>
-                  <a:srgbClr val="EEEEEE"/>
-                </a:solidFill>
-                <a:latin typeface="Calibri"/>
-              </a:defRPr>
-            </a:pPr>
-            <a:r>
-              <a:t>Test R² across 5 cutoff dates (train before, test after):</a:t>
-            </a:r>
-          </a:p>
-          <a:p>
-            <a:pPr>
-              <a:defRPr sz="400" b="0">
-                <a:solidFill>
-                  <a:srgbClr val="EEEEEE"/>
-                </a:solidFill>
-                <a:latin typeface="Calibri"/>
-              </a:defRPr>
-            </a:pPr>
-          </a:p>
-          <a:p>
-            <a:pPr>
-              <a:defRPr sz="1300" b="1">
+              <a:defRPr sz="2000" b="0">
+                <a:solidFill>
+                  <a:srgbClr val="EEEEEE"/>
+                </a:solidFill>
+                <a:latin typeface="Calibri"/>
+              </a:defRPr>
+            </a:pPr>
+          </a:p>
+          <a:p>
+            <a:pPr>
+              <a:defRPr sz="800" b="0">
+                <a:solidFill>
+                  <a:srgbClr val="EEEEEE"/>
+                </a:solidFill>
+                <a:latin typeface="Calibri"/>
+              </a:defRPr>
+            </a:pPr>
+          </a:p>
+          <a:p>
+            <a:pPr>
+              <a:defRPr sz="2000" b="1">
+                <a:solidFill>
+                  <a:srgbClr val="EEEEEE"/>
+                </a:solidFill>
+                <a:latin typeface="Calibri"/>
+              </a:defRPr>
+            </a:pPr>
+            <a:r>
+              <a:t>1.  Bitcoin has exactly two oscillatory structures — a log-periodic speculative signal</a:t>
+            </a:r>
+          </a:p>
+          <a:p>
+            <a:pPr>
+              <a:defRPr sz="2000" b="0">
+                <a:solidFill>
+                  <a:srgbClr val="EEEEEE"/>
+                </a:solidFill>
+                <a:latin typeface="Calibri"/>
+              </a:defRPr>
+            </a:pPr>
+            <a:r>
+              <a:t>     and a calendar halving cycle — confirmed independently by PCA, EMD, and DMD.</a:t>
+            </a:r>
+          </a:p>
+          <a:p>
+            <a:pPr>
+              <a:defRPr sz="1200" b="0">
+                <a:solidFill>
+                  <a:srgbClr val="EEEEEE"/>
+                </a:solidFill>
+                <a:latin typeface="Calibri"/>
+              </a:defRPr>
+            </a:pPr>
+          </a:p>
+          <a:p>
+            <a:pPr>
+              <a:defRPr sz="2000" b="1">
                 <a:solidFill>
                   <a:srgbClr val="F7931A"/>
                 </a:solidFill>
@@ -10770,144 +10976,56 @@
               </a:defRPr>
             </a:pPr>
             <a:r>
-              <a:t>Model            2020-26  2021-26  2022-26  2023-26  2024-26</a:t>
-            </a:r>
-          </a:p>
-          <a:p>
-            <a:pPr>
-              <a:defRPr sz="1100" b="0">
-                <a:solidFill>
-                  <a:srgbClr val="888888"/>
-                </a:solidFill>
-                <a:latin typeface="Calibri"/>
-              </a:defRPr>
-            </a:pPr>
-            <a:r>
-              <a:t>─────────────────────────────────────────────────────────────</a:t>
-            </a:r>
-          </a:p>
-          <a:p>
-            <a:pPr>
-              <a:defRPr sz="1300" b="0">
-                <a:solidFill>
-                  <a:srgbClr val="EEEEEE"/>
-                </a:solidFill>
-                <a:latin typeface="Calibri"/>
-              </a:defRPr>
-            </a:pPr>
-            <a:r>
-              <a:t>Power Law (3p)    0.60     0.08     0.57     0.64     0.35</a:t>
-            </a:r>
-          </a:p>
-          <a:p>
-            <a:pPr>
-              <a:defRPr sz="1300" b="0">
-                <a:solidFill>
-                  <a:srgbClr val="EEEEEE"/>
-                </a:solidFill>
-                <a:latin typeface="Calibri"/>
-              </a:defRPr>
-            </a:pPr>
-            <a:r>
-              <a:t>HybPPL (9p)       0.42     0.19     0.71     0.63     0.42</a:t>
-            </a:r>
-          </a:p>
-          <a:p>
-            <a:pPr>
-              <a:defRPr sz="1300" b="1">
-                <a:solidFill>
-                  <a:srgbClr val="2ECC71"/>
-                </a:solidFill>
-                <a:latin typeface="Calibri"/>
-              </a:defRPr>
-            </a:pPr>
-            <a:r>
-              <a:t>EPPL 1d+1u (9p)   0.62     0.64     0.71     0.65    -0.43</a:t>
-            </a:r>
-          </a:p>
-          <a:p>
-            <a:pPr>
-              <a:defRPr sz="600" b="0">
-                <a:solidFill>
-                  <a:srgbClr val="EEEEEE"/>
-                </a:solidFill>
-                <a:latin typeface="Calibri"/>
-              </a:defRPr>
-            </a:pPr>
-          </a:p>
-          <a:p>
-            <a:pPr>
-              <a:defRPr sz="1600" b="1">
-                <a:solidFill>
-                  <a:srgbClr val="2ECC71"/>
-                </a:solidFill>
-                <a:latin typeface="Calibri"/>
-              </a:defRPr>
-            </a:pPr>
-            <a:r>
-              <a:t>Key finding: EPPL generalizes best across most splits</a:t>
-            </a:r>
-          </a:p>
-          <a:p>
-            <a:pPr lvl="1">
-              <a:defRPr sz="1300" b="0">
-                <a:solidFill>
-                  <a:srgbClr val="888888"/>
-                </a:solidFill>
-                <a:latin typeface="Calibri"/>
-              </a:defRPr>
-            </a:pPr>
-            <a:r>
-              <a:t>The entropy zero-crossing prevents dead oscillations from propagating forward</a:t>
-            </a:r>
-          </a:p>
-          <a:p>
-            <a:pPr lvl="1">
-              <a:defRPr sz="1300" b="0">
-                <a:solidFill>
-                  <a:srgbClr val="E74C3C"/>
-                </a:solidFill>
-                <a:latin typeface="Calibri"/>
-              </a:defRPr>
-            </a:pPr>
-            <a:r>
-              <a:t>HybPPL collapses at 2021 cutoff (0.19) — power-law-damped oscillations persist too long</a:t>
-            </a:r>
-          </a:p>
-          <a:p>
-            <a:pPr>
-              <a:defRPr sz="600" b="0">
-                <a:solidFill>
-                  <a:srgbClr val="EEEEEE"/>
-                </a:solidFill>
-                <a:latin typeface="Calibri"/>
-              </a:defRPr>
-            </a:pPr>
-          </a:p>
-          <a:p>
-            <a:pPr>
-              <a:defRPr sz="1600" b="1">
-                <a:solidFill>
-                  <a:srgbClr val="E74C3C"/>
-                </a:solidFill>
-                <a:latin typeface="Calibri"/>
-              </a:defRPr>
-            </a:pPr>
-            <a:r>
-              <a:t>All models overfit: train R²≈0.99 vs test R²≈0.64</a:t>
-            </a:r>
-          </a:p>
-          <a:p>
-            <a:pPr lvl="1">
-              <a:defRPr sz="1300" b="0">
-                <a:solidFill>
-                  <a:srgbClr val="888888"/>
-                </a:solidFill>
-                <a:latin typeface="Calibri"/>
-              </a:defRPr>
-            </a:pPr>
-            <a:r>
-              <a:t>Post-2023 ETF dynamics don't follow historical oscillatory patterns</a:t>
+              <a:t>2.  The speculative signal peaked in 2013 and is now extinct, as captured by</a:t>
+            </a:r>
+          </a:p>
+          <a:p>
+            <a:pPr>
+              <a:defRPr sz="2000" b="0">
+                <a:solidFill>
+                  <a:srgbClr val="F7931A"/>
+                </a:solidFill>
+                <a:latin typeface="Calibri"/>
+              </a:defRPr>
+            </a:pPr>
+            <a:r>
+              <a:t>     Shannon entropy damping — the first information-theoretic model of Bitcoin.</a:t>
+            </a:r>
+          </a:p>
+          <a:p>
+            <a:pPr>
+              <a:defRPr sz="1200" b="0">
+                <a:solidFill>
+                  <a:srgbClr val="EEEEEE"/>
+                </a:solidFill>
+                <a:latin typeface="Calibri"/>
+              </a:defRPr>
+            </a:pPr>
+          </a:p>
+          <a:p>
+            <a:pPr>
+              <a:defRPr sz="2000" b="1">
+                <a:solidFill>
+                  <a:srgbClr val="5DADE2"/>
+                </a:solidFill>
+                <a:latin typeface="Calibri"/>
+              </a:defRPr>
+            </a:pPr>
+            <a:r>
+              <a:t>3.  Future price behavior: power law trend + flattening, amplitude-shrinking</a:t>
+            </a:r>
+          </a:p>
+          <a:p>
+            <a:pPr>
+              <a:defRPr sz="2000" b="0">
+                <a:solidFill>
+                  <a:srgbClr val="5DADE2"/>
+                </a:solidFill>
+                <a:latin typeface="Calibri"/>
+              </a:defRPr>
+            </a:pPr>
+            <a:r>
+              <a:t>     halving cycle — the mathematical signature of market maturation.</a:t>
             </a:r>
           </a:p>
         </p:txBody>
@@ -11012,7 +11130,7 @@
               </a:defRPr>
             </a:pPr>
             <a:r>
-              <a:t>Asymmetric Damping + Quantile-Specific Oscillations</a:t>
+              <a:t>Model Robustness: Frequency, Volatility, Scale</a:t>
             </a:r>
           </a:p>
         </p:txBody>
@@ -11052,26 +11170,49 @@
             <a:pPr>
               <a:defRPr sz="1600" b="1">
                 <a:solidFill>
-                  <a:srgbClr val="F7931A"/>
-                </a:solidFill>
-                <a:latin typeface="Calibri"/>
-              </a:defRPr>
-            </a:pPr>
-            <a:r>
-              <a:t>Asymmetric oscillations: falls damp 3.5× faster than rises</a:t>
+                  <a:srgbClr val="2ECC71"/>
+                </a:solidFill>
+                <a:latin typeface="Calibri"/>
+              </a:defRPr>
+            </a:pPr>
+            <a:r>
+              <a:t>Time-varying frequency: ω₁ = -0.056 ≈ 0</a:t>
             </a:r>
           </a:p>
           <a:p>
             <a:pPr lvl="1">
               <a:defRPr sz="1300" b="0">
                 <a:solidFill>
-                  <a:srgbClr val="EEEEEE"/>
-                </a:solidFill>
-                <a:latin typeface="Calibri"/>
-              </a:defRPr>
-            </a:pPr>
-            <a:r>
-              <a:t>D_rise = 0.56  vs  D_fall = 2.00  (hit constraint bound)</a:t>
+                  <a:srgbClr val="888888"/>
+                </a:solidFill>
+                <a:latin typeface="Calibri"/>
+              </a:defRPr>
+            </a:pPr>
+            <a:r>
+              <a:t>The log-periodic frequency is constant — not drifting. Fixed-ω assumption validated.</a:t>
+            </a:r>
+          </a:p>
+          <a:p>
+            <a:pPr>
+              <a:defRPr sz="600" b="0">
+                <a:solidFill>
+                  <a:srgbClr val="EEEEEE"/>
+                </a:solidFill>
+                <a:latin typeface="Calibri"/>
+              </a:defRPr>
+            </a:pPr>
+          </a:p>
+          <a:p>
+            <a:pPr>
+              <a:defRPr sz="1600" b="1">
+                <a:solidFill>
+                  <a:srgbClr val="5DADE2"/>
+                </a:solidFill>
+                <a:latin typeface="Calibri"/>
+              </a:defRPr>
+            </a:pPr>
+            <a:r>
+              <a:t>Heteroscedastic volatility: σ(t) = 0.077·t⁻⁰·¹⁹</a:t>
             </a:r>
           </a:p>
           <a:p>
@@ -11084,141 +11225,82 @@
               </a:defRPr>
             </a:pPr>
             <a:r>
-              <a:t>FOMO builds slowly, panic resolves quickly — BIC improves by 120</a:t>
-            </a:r>
-          </a:p>
-          <a:p>
-            <a:pPr>
-              <a:defRPr sz="800" b="0">
-                <a:solidFill>
-                  <a:srgbClr val="EEEEEE"/>
-                </a:solidFill>
-                <a:latin typeface="Calibri"/>
-              </a:defRPr>
-            </a:pPr>
-          </a:p>
-          <a:p>
-            <a:pPr>
-              <a:defRPr sz="1600" b="1">
-                <a:solidFill>
-                  <a:srgbClr val="5DADE2"/>
-                </a:solidFill>
-                <a:latin typeface="Calibri"/>
-              </a:defRPr>
-            </a:pPr>
-            <a:r>
-              <a:t>Quantile-specific structure:</a:t>
-            </a:r>
-          </a:p>
-          <a:p>
-            <a:pPr lvl="1">
-              <a:defRPr sz="1400" b="0">
-                <a:solidFill>
-                  <a:srgbClr val="EEEEEE"/>
-                </a:solidFill>
-                <a:latin typeface="Calibri"/>
-              </a:defRPr>
-            </a:pPr>
-            <a:r>
-              <a:t>Log-periodic amplitude scales with quantile:</a:t>
+              <a:t>Windowed σ: 0.150 (2010-13) → 0.109 (2013-17) → 0.139 (2017-21) → 0.092 (2021-26)</a:t>
             </a:r>
           </a:p>
           <a:p>
             <a:pPr lvl="1">
               <a:defRPr sz="1300" b="0">
                 <a:solidFill>
-                  <a:srgbClr val="EEEEEE"/>
-                </a:solidFill>
-                <a:latin typeface="Calibri"/>
-              </a:defRPr>
-            </a:pPr>
-            <a:r>
-              <a:t>   Q5% (floor): C=0.07  →  Q50%: C=0.15  →  Q95% (peaks): C=0.27</a:t>
+                  <a:srgbClr val="888888"/>
+                </a:solidFill>
+                <a:latin typeface="Calibri"/>
+              </a:defRPr>
+            </a:pPr>
+            <a:r>
+              <a:t>Early era is 1.5× more volatile — should use time-dependent quantile bands</a:t>
+            </a:r>
+          </a:p>
+          <a:p>
+            <a:pPr>
+              <a:defRPr sz="600" b="0">
+                <a:solidFill>
+                  <a:srgbClr val="EEEEEE"/>
+                </a:solidFill>
+                <a:latin typeface="Calibri"/>
+              </a:defRPr>
+            </a:pPr>
+          </a:p>
+          <a:p>
+            <a:pPr>
+              <a:defRPr sz="1600" b="1">
+                <a:solidFill>
+                  <a:srgbClr val="F7931A"/>
+                </a:solidFill>
+                <a:latin typeface="Calibri"/>
+              </a:defRPr>
+            </a:pPr>
+            <a:r>
+              <a:t>Multi-scale self-similarity:</a:t>
             </a:r>
           </a:p>
           <a:p>
             <a:pPr lvl="1">
               <a:defRPr sz="1300" b="0">
                 <a:solidFill>
-                  <a:srgbClr val="2ECC71"/>
-                </a:solidFill>
-                <a:latin typeface="Calibri"/>
-              </a:defRPr>
-            </a:pPr>
-            <a:r>
-              <a:t>   Upper quantiles oscillate 4× larger than the floor</a:t>
-            </a:r>
-          </a:p>
-          <a:p>
-            <a:pPr>
-              <a:defRPr sz="400" b="0">
-                <a:solidFill>
-                  <a:srgbClr val="EEEEEE"/>
-                </a:solidFill>
-                <a:latin typeface="Calibri"/>
-              </a:defRPr>
-            </a:pPr>
-          </a:p>
-          <a:p>
-            <a:pPr lvl="1">
-              <a:defRPr sz="1400" b="0">
-                <a:solidFill>
-                  <a:srgbClr val="EEEEEE"/>
-                </a:solidFill>
-                <a:latin typeface="Calibri"/>
-              </a:defRPr>
-            </a:pPr>
-            <a:r>
-              <a:t>Power law slope varies by quantile:</a:t>
+                  <a:srgbClr val="EEEEEE"/>
+                </a:solidFill>
+                <a:latin typeface="Calibri"/>
+              </a:defRPr>
+            </a:pPr>
+            <a:r>
+              <a:t>Daily β=5.08  |  Weekly β=5.09  |  Monthly β=5.12  |  Quarterly β=5.18  |  Yearly β=5.34</a:t>
             </a:r>
           </a:p>
           <a:p>
             <a:pPr lvl="1">
               <a:defRPr sz="1300" b="0">
                 <a:solidFill>
-                  <a:srgbClr val="EEEEEE"/>
-                </a:solidFill>
-                <a:latin typeface="Calibri"/>
-              </a:defRPr>
-            </a:pPr>
-            <a:r>
-              <a:t>   Q5%: β=5.41 (steep floor)  →  Q95%: β=4.87 (flatter peaks)</a:t>
+                  <a:srgbClr val="2ECC71"/>
+                </a:solidFill>
+                <a:latin typeface="Calibri"/>
+              </a:defRPr>
+            </a:pPr>
+            <a:r>
+              <a:t>R² &gt; 0.96 at every resolution. The power law holds from daily to yearly.</a:t>
             </a:r>
           </a:p>
           <a:p>
             <a:pPr lvl="1">
               <a:defRPr sz="1300" b="0">
                 <a:solidFill>
-                  <a:srgbClr val="2ECC71"/>
-                </a:solidFill>
-                <a:latin typeface="Calibri"/>
-              </a:defRPr>
-            </a:pPr>
-            <a:r>
-              <a:t>   The floor grows faster than the peaks — volatility compression</a:t>
-            </a:r>
-          </a:p>
-          <a:p>
-            <a:pPr>
-              <a:defRPr sz="400" b="0">
-                <a:solidFill>
-                  <a:srgbClr val="EEEEEE"/>
-                </a:solidFill>
-                <a:latin typeface="Calibri"/>
-              </a:defRPr>
-            </a:pPr>
-          </a:p>
-          <a:p>
-            <a:pPr lvl="1">
-              <a:defRPr sz="1300" b="0">
-                <a:solidFill>
                   <a:srgbClr val="888888"/>
                 </a:solidFill>
                 <a:latin typeface="Calibri"/>
               </a:defRPr>
             </a:pPr>
             <a:r>
-              <a:t>Calendar oscillation amplitude is roughly constant (~0.24) across all quantiles</a:t>
+              <a:t>Slight β increase at coarser scales: aggregation removes downside volatility.</a:t>
             </a:r>
           </a:p>
         </p:txBody>
@@ -11323,45 +11405,21 @@
               </a:defRPr>
             </a:pPr>
             <a:r>
-              <a:t>Wavelet Scalogram</a:t>
-            </a:r>
-          </a:p>
-        </p:txBody>
-      </p:sp>
-      <p:pic>
-        <p:nvPicPr>
-          <p:cNvPr id="4" name="Picture 3" descr="wavelet_scalogram.png"/>
-          <p:cNvPicPr>
-            <a:picLocks noChangeAspect="1"/>
-          </p:cNvPicPr>
-          <p:nvPr/>
-        </p:nvPicPr>
-        <p:blipFill>
-          <a:blip r:embed="rId2"/>
-          <a:stretch>
-            <a:fillRect/>
-          </a:stretch>
-        </p:blipFill>
-        <p:spPr>
-          <a:xfrm>
-            <a:off x="1371600" y="1097280"/>
-            <a:ext cx="9418320" cy="4852482"/>
-          </a:xfrm>
-          <a:prstGeom prst="rect">
-            <a:avLst/>
-          </a:prstGeom>
-        </p:spPr>
-      </p:pic>
-      <p:sp>
-        <p:nvSpPr>
-          <p:cNvPr id="5" name="TextBox 4"/>
+              <a:t>Cross-Validation: Which Models Generalize?</a:t>
+            </a:r>
+          </a:p>
+        </p:txBody>
+      </p:sp>
+      <p:sp>
+        <p:nvSpPr>
+          <p:cNvPr id="4" name="TextBox 3"/>
           <p:cNvSpPr txBox="1"/>
           <p:nvPr/>
         </p:nvSpPr>
         <p:spPr>
           <a:xfrm>
-            <a:off x="457200" y="5303520"/>
-            <a:ext cx="10972800" cy="1371600"/>
+            <a:off x="274320" y="1005840"/>
+            <a:ext cx="11430000" cy="5486400"/>
           </a:xfrm>
           <a:prstGeom prst="rect">
             <a:avLst/>
@@ -11375,6 +11433,65 @@
           <a:lstStyle/>
           <a:p>
             <a:pPr algn="l">
+              <a:defRPr sz="1400" b="0">
+                <a:solidFill>
+                  <a:srgbClr val="EEEEEE"/>
+                </a:solidFill>
+                <a:latin typeface="Calibri"/>
+              </a:defRPr>
+            </a:pPr>
+          </a:p>
+          <a:p>
+            <a:pPr>
+              <a:defRPr sz="1600" b="1">
+                <a:solidFill>
+                  <a:srgbClr val="EEEEEE"/>
+                </a:solidFill>
+                <a:latin typeface="Calibri"/>
+              </a:defRPr>
+            </a:pPr>
+            <a:r>
+              <a:t>Test R² across 5 cutoff dates (train before, test after):</a:t>
+            </a:r>
+          </a:p>
+          <a:p>
+            <a:pPr>
+              <a:defRPr sz="400" b="0">
+                <a:solidFill>
+                  <a:srgbClr val="EEEEEE"/>
+                </a:solidFill>
+                <a:latin typeface="Calibri"/>
+              </a:defRPr>
+            </a:pPr>
+          </a:p>
+          <a:p>
+            <a:pPr>
+              <a:defRPr sz="1300" b="1">
+                <a:solidFill>
+                  <a:srgbClr val="F7931A"/>
+                </a:solidFill>
+                <a:latin typeface="Calibri"/>
+              </a:defRPr>
+            </a:pPr>
+            <a:r>
+              <a:t>Model            2020-26  2021-26  2022-26  2023-26  2024-26</a:t>
+            </a:r>
+          </a:p>
+          <a:p>
+            <a:pPr>
+              <a:defRPr sz="1100" b="0">
+                <a:solidFill>
+                  <a:srgbClr val="888888"/>
+                </a:solidFill>
+                <a:latin typeface="Calibri"/>
+              </a:defRPr>
+            </a:pPr>
+            <a:r>
+              <a:t>─────────────────────────────────────────────────────────────</a:t>
+            </a:r>
+          </a:p>
+          <a:p>
+            <a:pPr>
               <a:defRPr sz="1300" b="0">
                 <a:solidFill>
                   <a:srgbClr val="EEEEEE"/>
@@ -11382,10 +11499,26 @@
                 <a:latin typeface="Calibri"/>
               </a:defRPr>
             </a:pPr>
-          </a:p>
-          <a:p>
-            <a:pPr>
-              <a:defRPr sz="1400" b="1">
+            <a:r>
+              <a:t>Power Law (3p)    0.60     0.08     0.57     0.64     0.35</a:t>
+            </a:r>
+          </a:p>
+          <a:p>
+            <a:pPr>
+              <a:defRPr sz="1300" b="0">
+                <a:solidFill>
+                  <a:srgbClr val="EEEEEE"/>
+                </a:solidFill>
+                <a:latin typeface="Calibri"/>
+              </a:defRPr>
+            </a:pPr>
+            <a:r>
+              <a:t>HybPPL (9p)       0.42     0.19     0.71     0.63     0.42</a:t>
+            </a:r>
+          </a:p>
+          <a:p>
+            <a:pPr>
+              <a:defRPr sz="1300" b="1">
                 <a:solidFill>
                   <a:srgbClr val="2ECC71"/>
                 </a:solidFill>
@@ -11393,11 +11526,34 @@
               </a:defRPr>
             </a:pPr>
             <a:r>
-              <a:t>Halving cycle (T≈3.6yr) overwhelmingly dominant across all time and scale</a:t>
-            </a:r>
-          </a:p>
-          <a:p>
-            <a:pPr>
+              <a:t>EPPL 1d+1u (9p)   0.62     0.64     0.71     0.65    -0.43</a:t>
+            </a:r>
+          </a:p>
+          <a:p>
+            <a:pPr>
+              <a:defRPr sz="600" b="0">
+                <a:solidFill>
+                  <a:srgbClr val="EEEEEE"/>
+                </a:solidFill>
+                <a:latin typeface="Calibri"/>
+              </a:defRPr>
+            </a:pPr>
+          </a:p>
+          <a:p>
+            <a:pPr>
+              <a:defRPr sz="1600" b="1">
+                <a:solidFill>
+                  <a:srgbClr val="2ECC71"/>
+                </a:solidFill>
+                <a:latin typeface="Calibri"/>
+              </a:defRPr>
+            </a:pPr>
+            <a:r>
+              <a:t>Key finding: EPPL generalizes best across most splits</a:t>
+            </a:r>
+          </a:p>
+          <a:p>
+            <a:pPr lvl="1">
               <a:defRPr sz="1300" b="0">
                 <a:solidFill>
                   <a:srgbClr val="888888"/>
@@ -11406,20 +11562,56 @@
               </a:defRPr>
             </a:pPr>
             <a:r>
-              <a:t>Early era power is 2× late era — oscillations fading (supports entropy model)</a:t>
-            </a:r>
-          </a:p>
-          <a:p>
-            <a:pPr>
+              <a:t>The entropy zero-crossing prevents dead oscillations from propagating forward</a:t>
+            </a:r>
+          </a:p>
+          <a:p>
+            <a:pPr lvl="1">
               <a:defRPr sz="1300" b="0">
                 <a:solidFill>
-                  <a:srgbClr val="EEEEEE"/>
-                </a:solidFill>
-                <a:latin typeface="Calibri"/>
-              </a:defRPr>
-            </a:pPr>
-            <a:r>
-              <a:t>Log-periodic invisible: it's a chirp in calendar time (T varies from 1.7yr to 13.6yr with t)</a:t>
+                  <a:srgbClr val="E74C3C"/>
+                </a:solidFill>
+                <a:latin typeface="Calibri"/>
+              </a:defRPr>
+            </a:pPr>
+            <a:r>
+              <a:t>HybPPL collapses at 2021 cutoff (0.19) — power-law-damped oscillations persist too long</a:t>
+            </a:r>
+          </a:p>
+          <a:p>
+            <a:pPr>
+              <a:defRPr sz="600" b="0">
+                <a:solidFill>
+                  <a:srgbClr val="EEEEEE"/>
+                </a:solidFill>
+                <a:latin typeface="Calibri"/>
+              </a:defRPr>
+            </a:pPr>
+          </a:p>
+          <a:p>
+            <a:pPr>
+              <a:defRPr sz="1600" b="1">
+                <a:solidFill>
+                  <a:srgbClr val="E74C3C"/>
+                </a:solidFill>
+                <a:latin typeface="Calibri"/>
+              </a:defRPr>
+            </a:pPr>
+            <a:r>
+              <a:t>All models overfit: train R²≈0.99 vs test R²≈0.64</a:t>
+            </a:r>
+          </a:p>
+          <a:p>
+            <a:pPr lvl="1">
+              <a:defRPr sz="1300" b="0">
+                <a:solidFill>
+                  <a:srgbClr val="888888"/>
+                </a:solidFill>
+                <a:latin typeface="Calibri"/>
+              </a:defRPr>
+            </a:pPr>
+            <a:r>
+              <a:t>Post-2023 ETF dynamics don't follow historical oscillatory patterns</a:t>
             </a:r>
           </a:p>
         </p:txBody>
@@ -11524,7 +11716,7 @@
               </a:defRPr>
             </a:pPr>
             <a:r>
-              <a:t>Symbolic Regression: Machine Discovers the Power Law</a:t>
+              <a:t>Asymmetric Damping + Quantile-Specific Oscillations</a:t>
             </a:r>
           </a:p>
         </p:txBody>
@@ -11562,28 +11754,28 @@
           </a:p>
           <a:p>
             <a:pPr>
-              <a:defRPr sz="1600" b="0">
-                <a:solidFill>
-                  <a:srgbClr val="EEEEEE"/>
-                </a:solidFill>
-                <a:latin typeface="Calibri"/>
-              </a:defRPr>
-            </a:pPr>
-            <a:r>
-              <a:t>PySR (genetic programming) searched for log₁₀(price) = f(t)</a:t>
+              <a:defRPr sz="1600" b="1">
+                <a:solidFill>
+                  <a:srgbClr val="F7931A"/>
+                </a:solidFill>
+                <a:latin typeface="Calibri"/>
+              </a:defRPr>
+            </a:pPr>
+            <a:r>
+              <a:t>Asymmetric oscillations: falls damp 3.5× faster than rises</a:t>
             </a:r>
           </a:p>
           <a:p>
             <a:pPr lvl="1">
               <a:defRPr sz="1300" b="0">
                 <a:solidFill>
-                  <a:srgbClr val="888888"/>
-                </a:solidFill>
-                <a:latin typeface="Calibri"/>
-              </a:defRPr>
-            </a:pPr>
-            <a:r>
-              <a:t>Available operations: +, -, ×, ÷, log, cos, sin, exp</a:t>
+                  <a:srgbClr val="EEEEEE"/>
+                </a:solidFill>
+                <a:latin typeface="Calibri"/>
+              </a:defRPr>
+            </a:pPr>
+            <a:r>
+              <a:t>D_rise = 0.56  vs  D_fall = 2.00  (hit constraint bound)</a:t>
             </a:r>
           </a:p>
           <a:p>
@@ -11596,12 +11788,12 @@
               </a:defRPr>
             </a:pPr>
             <a:r>
-              <a:t>500 subsampled points, 40 iterations, complexity up to 25</a:t>
-            </a:r>
-          </a:p>
-          <a:p>
-            <a:pPr>
-              <a:defRPr sz="600" b="0">
+              <a:t>FOMO builds slowly, panic resolves quickly — BIC improves by 120</a:t>
+            </a:r>
+          </a:p>
+          <a:p>
+            <a:pPr>
+              <a:defRPr sz="800" b="0">
                 <a:solidFill>
                   <a:srgbClr val="EEEEEE"/>
                 </a:solidFill>
@@ -11613,40 +11805,17 @@
             <a:pPr>
               <a:defRPr sz="1600" b="1">
                 <a:solidFill>
-                  <a:srgbClr val="F7931A"/>
-                </a:solidFill>
-                <a:latin typeface="Calibri"/>
-              </a:defRPr>
-            </a:pPr>
-            <a:r>
-              <a:t>Best equation (complexity=6):</a:t>
-            </a:r>
-          </a:p>
-          <a:p>
-            <a:pPr>
-              <a:defRPr sz="1500" b="1">
-                <a:solidFill>
-                  <a:srgbClr val="2ECC71"/>
-                </a:solidFill>
-                <a:latin typeface="Calibri"/>
-              </a:defRPr>
-            </a:pPr>
-            <a:r>
-              <a:t>   log₁₀(price) = 2.174·ln(t) − 1.097  =  5.01·log₁₀(t) − 1.10</a:t>
-            </a:r>
-          </a:p>
-          <a:p>
-            <a:pPr>
-              <a:defRPr sz="400" b="0">
-                <a:solidFill>
-                  <a:srgbClr val="EEEEEE"/>
-                </a:solidFill>
-                <a:latin typeface="Calibri"/>
-              </a:defRPr>
-            </a:pPr>
-          </a:p>
-          <a:p>
-            <a:pPr>
+                  <a:srgbClr val="5DADE2"/>
+                </a:solidFill>
+                <a:latin typeface="Calibri"/>
+              </a:defRPr>
+            </a:pPr>
+            <a:r>
+              <a:t>Quantile-specific structure:</a:t>
+            </a:r>
+          </a:p>
+          <a:p>
+            <a:pPr lvl="1">
               <a:defRPr sz="1400" b="0">
                 <a:solidFill>
                   <a:srgbClr val="EEEEEE"/>
@@ -11655,92 +11824,105 @@
               </a:defRPr>
             </a:pPr>
             <a:r>
-              <a:t>This IS the power law — β≈5.01, discovered from scratch with zero assumptions</a:t>
+              <a:t>Log-periodic amplitude scales with quantile:</a:t>
             </a:r>
           </a:p>
           <a:p>
             <a:pPr lvl="1">
               <a:defRPr sz="1300" b="0">
                 <a:solidFill>
-                  <a:srgbClr val="888888"/>
-                </a:solidFill>
-                <a:latin typeface="Calibri"/>
-              </a:defRPr>
-            </a:pPr>
-            <a:r>
-              <a:t>R² = 0.962 on full data (same as our fitted power law)</a:t>
-            </a:r>
-          </a:p>
-          <a:p>
-            <a:pPr>
-              <a:defRPr sz="600" b="0">
-                <a:solidFill>
-                  <a:srgbClr val="EEEEEE"/>
-                </a:solidFill>
-                <a:latin typeface="Calibri"/>
-              </a:defRPr>
-            </a:pPr>
-          </a:p>
-          <a:p>
-            <a:pPr>
-              <a:defRPr sz="1400" b="0">
-                <a:solidFill>
-                  <a:srgbClr val="EEEEEE"/>
-                </a:solidFill>
-                <a:latin typeface="Calibri"/>
-              </a:defRPr>
-            </a:pPr>
-            <a:r>
-              <a:t>Higher-complexity equations found cosine terms (complexity ≥ 15)</a:t>
+                  <a:srgbClr val="EEEEEE"/>
+                </a:solidFill>
+                <a:latin typeface="Calibri"/>
+              </a:defRPr>
+            </a:pPr>
+            <a:r>
+              <a:t>   Q5% (floor): C=0.07  →  Q50%: C=0.15  →  Q95% (peaks): C=0.27</a:t>
             </a:r>
           </a:p>
           <a:p>
             <a:pPr lvl="1">
               <a:defRPr sz="1300" b="0">
                 <a:solidFill>
-                  <a:srgbClr val="888888"/>
-                </a:solidFill>
-                <a:latin typeface="Calibri"/>
-              </a:defRPr>
-            </a:pPr>
-            <a:r>
-              <a:t>but with minimal improvement — confirming oscillations are secondary to the trend</a:t>
-            </a:r>
-          </a:p>
-          <a:p>
-            <a:pPr>
-              <a:defRPr sz="600" b="0">
-                <a:solidFill>
-                  <a:srgbClr val="EEEEEE"/>
-                </a:solidFill>
-                <a:latin typeface="Calibri"/>
-              </a:defRPr>
-            </a:pPr>
-          </a:p>
-          <a:p>
-            <a:pPr>
-              <a:defRPr sz="1400" b="1">
-                <a:solidFill>
-                  <a:srgbClr val="E74C3C"/>
-                </a:solidFill>
-                <a:latin typeface="Calibri"/>
-              </a:defRPr>
-            </a:pPr>
-            <a:r>
-              <a:t>Genesis date is an INPUT, not discovered — PySR cannot find log(year − 2009.56)</a:t>
+                  <a:srgbClr val="2ECC71"/>
+                </a:solidFill>
+                <a:latin typeface="Calibri"/>
+              </a:defRPr>
+            </a:pPr>
+            <a:r>
+              <a:t>   Upper quantiles oscillate 4× larger than the floor</a:t>
+            </a:r>
+          </a:p>
+          <a:p>
+            <a:pPr>
+              <a:defRPr sz="400" b="0">
+                <a:solidFill>
+                  <a:srgbClr val="EEEEEE"/>
+                </a:solidFill>
+                <a:latin typeface="Calibri"/>
+              </a:defRPr>
+            </a:pPr>
+          </a:p>
+          <a:p>
+            <a:pPr lvl="1">
+              <a:defRPr sz="1400" b="0">
+                <a:solidFill>
+                  <a:srgbClr val="EEEEEE"/>
+                </a:solidFill>
+                <a:latin typeface="Calibri"/>
+              </a:defRPr>
+            </a:pPr>
+            <a:r>
+              <a:t>Power law slope varies by quantile:</a:t>
             </a:r>
           </a:p>
           <a:p>
             <a:pPr lvl="1">
               <a:defRPr sz="1300" b="0">
                 <a:solidFill>
+                  <a:srgbClr val="EEEEEE"/>
+                </a:solidFill>
+                <a:latin typeface="Calibri"/>
+              </a:defRPr>
+            </a:pPr>
+            <a:r>
+              <a:t>   Q5%: β=5.41 (steep floor)  →  Q95%: β=4.87 (flatter peaks)</a:t>
+            </a:r>
+          </a:p>
+          <a:p>
+            <a:pPr lvl="1">
+              <a:defRPr sz="1300" b="0">
+                <a:solidFill>
+                  <a:srgbClr val="2ECC71"/>
+                </a:solidFill>
+                <a:latin typeface="Calibri"/>
+              </a:defRPr>
+            </a:pPr>
+            <a:r>
+              <a:t>   The floor grows faster than the peaks — volatility compression</a:t>
+            </a:r>
+          </a:p>
+          <a:p>
+            <a:pPr>
+              <a:defRPr sz="400" b="0">
+                <a:solidFill>
+                  <a:srgbClr val="EEEEEE"/>
+                </a:solidFill>
+                <a:latin typeface="Calibri"/>
+              </a:defRPr>
+            </a:pPr>
+          </a:p>
+          <a:p>
+            <a:pPr lvl="1">
+              <a:defRPr sz="1300" b="0">
+                <a:solidFill>
                   <a:srgbClr val="888888"/>
                 </a:solidFill>
                 <a:latin typeface="Calibri"/>
               </a:defRPr>
             </a:pPr>
             <a:r>
-              <a:t>from raw calendar year (finds linear fit instead, R²=0.87)</a:t>
+              <a:t>Calendar oscillation amplitude is roughly constant (~0.24) across all quantiles</a:t>
             </a:r>
           </a:p>
         </p:txBody>
@@ -11845,21 +12027,45 @@
               </a:defRPr>
             </a:pPr>
             <a:r>
-              <a:t>Fourier Extrapolation: 5-Year Forward Projection</a:t>
-            </a:r>
-          </a:p>
-        </p:txBody>
-      </p:sp>
-      <p:sp>
-        <p:nvSpPr>
-          <p:cNvPr id="4" name="TextBox 3"/>
+              <a:t>Wavelet Scalogram</a:t>
+            </a:r>
+          </a:p>
+        </p:txBody>
+      </p:sp>
+      <p:pic>
+        <p:nvPicPr>
+          <p:cNvPr id="4" name="Picture 3" descr="wavelet_scalogram.png"/>
+          <p:cNvPicPr>
+            <a:picLocks noChangeAspect="1"/>
+          </p:cNvPicPr>
+          <p:nvPr/>
+        </p:nvPicPr>
+        <p:blipFill>
+          <a:blip r:embed="rId2"/>
+          <a:stretch>
+            <a:fillRect/>
+          </a:stretch>
+        </p:blipFill>
+        <p:spPr>
+          <a:xfrm>
+            <a:off x="1371600" y="1097280"/>
+            <a:ext cx="9418320" cy="4852482"/>
+          </a:xfrm>
+          <a:prstGeom prst="rect">
+            <a:avLst/>
+          </a:prstGeom>
+        </p:spPr>
+      </p:pic>
+      <p:sp>
+        <p:nvSpPr>
+          <p:cNvPr id="5" name="TextBox 4"/>
           <p:cNvSpPr txBox="1"/>
           <p:nvPr/>
         </p:nvSpPr>
         <p:spPr>
           <a:xfrm>
-            <a:off x="274320" y="1005840"/>
-            <a:ext cx="11430000" cy="5486400"/>
+            <a:off x="457200" y="5303520"/>
+            <a:ext cx="10972800" cy="1371600"/>
           </a:xfrm>
           <a:prstGeom prst="rect">
             <a:avLst/>
@@ -11873,224 +12079,51 @@
           <a:lstStyle/>
           <a:p>
             <a:pPr algn="l">
-              <a:defRPr sz="1400" b="0">
-                <a:solidFill>
-                  <a:srgbClr val="EEEEEE"/>
-                </a:solidFill>
-                <a:latin typeface="Calibri"/>
-              </a:defRPr>
-            </a:pPr>
-          </a:p>
-          <a:p>
-            <a:pPr>
-              <a:defRPr sz="1600" b="0">
-                <a:solidFill>
-                  <a:srgbClr val="EEEEEE"/>
-                </a:solidFill>
-                <a:latin typeface="Calibri"/>
-              </a:defRPr>
-            </a:pPr>
-            <a:r>
-              <a:t>Remove power law trend, FFT the residuals, keep top 20 modes, project forward</a:t>
-            </a:r>
-          </a:p>
-          <a:p>
-            <a:pPr lvl="1">
               <a:defRPr sz="1300" b="0">
                 <a:solidFill>
+                  <a:srgbClr val="EEEEEE"/>
+                </a:solidFill>
+                <a:latin typeface="Calibri"/>
+              </a:defRPr>
+            </a:pPr>
+          </a:p>
+          <a:p>
+            <a:pPr>
+              <a:defRPr sz="1400" b="1">
+                <a:solidFill>
+                  <a:srgbClr val="2ECC71"/>
+                </a:solidFill>
+                <a:latin typeface="Calibri"/>
+              </a:defRPr>
+            </a:pPr>
+            <a:r>
+              <a:t>Halving cycle (T≈3.6yr) overwhelmingly dominant across all time and scale</a:t>
+            </a:r>
+          </a:p>
+          <a:p>
+            <a:pPr>
+              <a:defRPr sz="1300" b="0">
+                <a:solidFill>
                   <a:srgbClr val="888888"/>
                 </a:solidFill>
                 <a:latin typeface="Calibri"/>
               </a:defRPr>
             </a:pPr>
             <a:r>
-              <a:t>R² = 0.923 on historical residuals (20 modes)</a:t>
-            </a:r>
-          </a:p>
-          <a:p>
-            <a:pPr>
-              <a:defRPr sz="600" b="0">
-                <a:solidFill>
-                  <a:srgbClr val="EEEEEE"/>
-                </a:solidFill>
-                <a:latin typeface="Calibri"/>
-              </a:defRPr>
-            </a:pPr>
-          </a:p>
-          <a:p>
-            <a:pPr>
-              <a:defRPr sz="1600" b="1">
-                <a:solidFill>
-                  <a:srgbClr val="F7931A"/>
-                </a:solidFill>
-                <a:latin typeface="Calibri"/>
-              </a:defRPr>
-            </a:pPr>
-            <a:r>
-              <a:t>Projected prices (power law + Fourier residuals):</a:t>
-            </a:r>
-          </a:p>
-          <a:p>
-            <a:pPr>
-              <a:defRPr sz="400" b="0">
-                <a:solidFill>
-                  <a:srgbClr val="EEEEEE"/>
-                </a:solidFill>
-                <a:latin typeface="Calibri"/>
-              </a:defRPr>
-            </a:pPr>
-          </a:p>
-          <a:p>
-            <a:pPr>
-              <a:defRPr sz="1400" b="1">
-                <a:solidFill>
-                  <a:srgbClr val="5DADE2"/>
-                </a:solidFill>
-                <a:latin typeface="Calibri"/>
-              </a:defRPr>
-            </a:pPr>
-            <a:r>
-              <a:t>Year        Price      Interpretation</a:t>
-            </a:r>
-          </a:p>
-          <a:p>
-            <a:pPr>
-              <a:defRPr sz="1200" b="0">
-                <a:solidFill>
-                  <a:srgbClr val="888888"/>
-                </a:solidFill>
-                <a:latin typeface="Calibri"/>
-              </a:defRPr>
-            </a:pPr>
-            <a:r>
-              <a:t>─────────────────────────────────────────</a:t>
-            </a:r>
-          </a:p>
-          <a:p>
-            <a:pPr>
-              <a:defRPr sz="1400" b="0">
-                <a:solidFill>
-                  <a:srgbClr val="EEEEEE"/>
-                </a:solidFill>
-                <a:latin typeface="Calibri"/>
-              </a:defRPr>
-            </a:pPr>
-            <a:r>
-              <a:t>2027-04    $724,114    Cycle peak?</a:t>
-            </a:r>
-          </a:p>
-          <a:p>
-            <a:pPr>
-              <a:defRPr sz="1400" b="0">
-                <a:solidFill>
-                  <a:srgbClr val="EEEEEE"/>
-                </a:solidFill>
-                <a:latin typeface="Calibri"/>
-              </a:defRPr>
-            </a:pPr>
-            <a:r>
-              <a:t>2028-03     $85,292    Post-peak crash</a:t>
-            </a:r>
-          </a:p>
-          <a:p>
-            <a:pPr>
-              <a:defRPr sz="1400" b="0">
-                <a:solidFill>
-                  <a:srgbClr val="EEEEEE"/>
-                </a:solidFill>
-                <a:latin typeface="Calibri"/>
-              </a:defRPr>
-            </a:pPr>
-            <a:r>
-              <a:t>2029-03    $294,282    Recovery</a:t>
-            </a:r>
-          </a:p>
-          <a:p>
-            <a:pPr>
-              <a:defRPr sz="1400" b="0">
-                <a:solidFill>
-                  <a:srgbClr val="EEEEEE"/>
-                </a:solidFill>
-                <a:latin typeface="Calibri"/>
-              </a:defRPr>
-            </a:pPr>
-            <a:r>
-              <a:t>2030-03    $676,513    Next peak?</a:t>
-            </a:r>
-          </a:p>
-          <a:p>
-            <a:pPr>
-              <a:defRPr sz="1400" b="0">
-                <a:solidFill>
-                  <a:srgbClr val="EEEEEE"/>
-                </a:solidFill>
-                <a:latin typeface="Calibri"/>
-              </a:defRPr>
-            </a:pPr>
-            <a:r>
-              <a:t>2031-03    $157,485    Next crash</a:t>
-            </a:r>
-          </a:p>
-          <a:p>
-            <a:pPr>
-              <a:defRPr sz="800" b="0">
-                <a:solidFill>
-                  <a:srgbClr val="EEEEEE"/>
-                </a:solidFill>
-                <a:latin typeface="Calibri"/>
-              </a:defRPr>
-            </a:pPr>
-          </a:p>
-          <a:p>
-            <a:pPr>
-              <a:defRPr sz="1600" b="1">
-                <a:solidFill>
-                  <a:srgbClr val="E74C3C"/>
-                </a:solidFill>
-                <a:latin typeface="Calibri"/>
-              </a:defRPr>
-            </a:pPr>
-            <a:r>
-              <a:t>⚠ Caveat: Fourier extrapolation has NO damping</a:t>
-            </a:r>
-          </a:p>
-          <a:p>
-            <a:pPr lvl="1">
+              <a:t>Early era power is 2× late era — oscillations fading (supports entropy model)</a:t>
+            </a:r>
+          </a:p>
+          <a:p>
+            <a:pPr>
               <a:defRPr sz="1300" b="0">
                 <a:solidFill>
-                  <a:srgbClr val="888888"/>
-                </a:solidFill>
-                <a:latin typeface="Calibri"/>
-              </a:defRPr>
-            </a:pPr>
-            <a:r>
-              <a:t>Projects historical oscillation amplitudes unchanged into the future</a:t>
-            </a:r>
-          </a:p>
-          <a:p>
-            <a:pPr lvl="1">
-              <a:defRPr sz="1300" b="0">
-                <a:solidFill>
-                  <a:srgbClr val="888888"/>
-                </a:solidFill>
-                <a:latin typeface="Calibri"/>
-              </a:defRPr>
-            </a:pPr>
-            <a:r>
-              <a:t>Real cycles are fading (entropy/damping) — these projections are too volatile</a:t>
-            </a:r>
-          </a:p>
-          <a:p>
-            <a:pPr lvl="1">
-              <a:defRPr sz="1300" b="0">
-                <a:solidFill>
-                  <a:srgbClr val="888888"/>
-                </a:solidFill>
-                <a:latin typeface="Calibri"/>
-              </a:defRPr>
-            </a:pPr>
-            <a:r>
-              <a:t>Useful for showing cyclical structure, NOT for reliable price targets</a:t>
+                  <a:srgbClr val="EEEEEE"/>
+                </a:solidFill>
+                <a:latin typeface="Calibri"/>
+              </a:defRPr>
+            </a:pPr>
+            <a:r>
+              <a:t>Log-periodic invisible: it's a chirp in calendar time (T varies from 1.7yr to 13.6yr with t)</a:t>
             </a:r>
           </a:p>
         </p:txBody>
@@ -12106,6 +12139,14 @@
 <file path=ppt/slides/slide37.xml><?xml version="1.0" encoding="utf-8"?>
 <p:sld xmlns:a="http://schemas.openxmlformats.org/drawingml/2006/main" xmlns:p="http://schemas.openxmlformats.org/presentationml/2006/main" xmlns:r="http://schemas.openxmlformats.org/officeDocument/2006/relationships">
   <p:cSld>
+    <p:bg>
+      <p:bgPr>
+        <a:solidFill>
+          <a:srgbClr val="1A1A2E"/>
+        </a:solidFill>
+        <a:effectLst/>
+      </p:bgPr>
+    </p:bg>
     <p:spTree>
       <p:nvGrpSpPr>
         <p:cNvPr id="1" name=""/>
@@ -12113,6 +12154,301 @@
         <p:nvPr/>
       </p:nvGrpSpPr>
       <p:grpSpPr/>
+      <p:sp>
+        <p:nvSpPr>
+          <p:cNvPr id="2" name="Rectangle 1"/>
+          <p:cNvSpPr/>
+          <p:nvPr/>
+        </p:nvSpPr>
+        <p:spPr>
+          <a:xfrm>
+            <a:off x="0" y="0"/>
+            <a:ext cx="12191695" cy="822960"/>
+          </a:xfrm>
+          <a:prstGeom prst="rect">
+            <a:avLst/>
+          </a:prstGeom>
+          <a:solidFill>
+            <a:srgbClr val="16213E"/>
+          </a:solidFill>
+          <a:ln>
+            <a:noFill/>
+          </a:ln>
+        </p:spPr>
+        <p:style>
+          <a:lnRef idx="1">
+            <a:schemeClr val="accent1"/>
+          </a:lnRef>
+          <a:fillRef idx="3">
+            <a:schemeClr val="accent1"/>
+          </a:fillRef>
+          <a:effectRef idx="2">
+            <a:schemeClr val="accent1"/>
+          </a:effectRef>
+          <a:fontRef idx="minor">
+            <a:schemeClr val="lt1"/>
+          </a:fontRef>
+        </p:style>
+        <p:txBody>
+          <a:bodyPr rtlCol="0" anchor="ctr"/>
+          <a:lstStyle/>
+          <a:p>
+            <a:pPr algn="ctr"/>
+          </a:p>
+        </p:txBody>
+      </p:sp>
+      <p:sp>
+        <p:nvSpPr>
+          <p:cNvPr id="3" name="TextBox 2"/>
+          <p:cNvSpPr txBox="1"/>
+          <p:nvPr/>
+        </p:nvSpPr>
+        <p:spPr>
+          <a:xfrm>
+            <a:off x="457200" y="91440"/>
+            <a:ext cx="10972800" cy="640080"/>
+          </a:xfrm>
+          <a:prstGeom prst="rect">
+            <a:avLst/>
+          </a:prstGeom>
+          <a:noFill/>
+        </p:spPr>
+        <p:txBody>
+          <a:bodyPr wrap="square">
+            <a:spAutoFit/>
+          </a:bodyPr>
+          <a:lstStyle/>
+          <a:p>
+            <a:pPr algn="l">
+              <a:defRPr sz="2800" b="1">
+                <a:solidFill>
+                  <a:srgbClr val="F7931A"/>
+                </a:solidFill>
+                <a:latin typeface="Calibri"/>
+              </a:defRPr>
+            </a:pPr>
+            <a:r>
+              <a:t>Symbolic Regression: Machine Discovers the Power Law</a:t>
+            </a:r>
+          </a:p>
+        </p:txBody>
+      </p:sp>
+      <p:sp>
+        <p:nvSpPr>
+          <p:cNvPr id="4" name="TextBox 3"/>
+          <p:cNvSpPr txBox="1"/>
+          <p:nvPr/>
+        </p:nvSpPr>
+        <p:spPr>
+          <a:xfrm>
+            <a:off x="274320" y="1005840"/>
+            <a:ext cx="11430000" cy="5486400"/>
+          </a:xfrm>
+          <a:prstGeom prst="rect">
+            <a:avLst/>
+          </a:prstGeom>
+          <a:noFill/>
+        </p:spPr>
+        <p:txBody>
+          <a:bodyPr wrap="square">
+            <a:spAutoFit/>
+          </a:bodyPr>
+          <a:lstStyle/>
+          <a:p>
+            <a:pPr algn="l">
+              <a:defRPr sz="1400" b="0">
+                <a:solidFill>
+                  <a:srgbClr val="EEEEEE"/>
+                </a:solidFill>
+                <a:latin typeface="Calibri"/>
+              </a:defRPr>
+            </a:pPr>
+          </a:p>
+          <a:p>
+            <a:pPr>
+              <a:defRPr sz="1600" b="0">
+                <a:solidFill>
+                  <a:srgbClr val="EEEEEE"/>
+                </a:solidFill>
+                <a:latin typeface="Calibri"/>
+              </a:defRPr>
+            </a:pPr>
+            <a:r>
+              <a:t>PySR (genetic programming) searched for log₁₀(price) = f(t)</a:t>
+            </a:r>
+          </a:p>
+          <a:p>
+            <a:pPr lvl="1">
+              <a:defRPr sz="1300" b="0">
+                <a:solidFill>
+                  <a:srgbClr val="888888"/>
+                </a:solidFill>
+                <a:latin typeface="Calibri"/>
+              </a:defRPr>
+            </a:pPr>
+            <a:r>
+              <a:t>Available operations: +, -, ×, ÷, log, cos, sin, exp</a:t>
+            </a:r>
+          </a:p>
+          <a:p>
+            <a:pPr lvl="1">
+              <a:defRPr sz="1300" b="0">
+                <a:solidFill>
+                  <a:srgbClr val="888888"/>
+                </a:solidFill>
+                <a:latin typeface="Calibri"/>
+              </a:defRPr>
+            </a:pPr>
+            <a:r>
+              <a:t>500 subsampled points, 40 iterations, complexity up to 25</a:t>
+            </a:r>
+          </a:p>
+          <a:p>
+            <a:pPr>
+              <a:defRPr sz="600" b="0">
+                <a:solidFill>
+                  <a:srgbClr val="EEEEEE"/>
+                </a:solidFill>
+                <a:latin typeface="Calibri"/>
+              </a:defRPr>
+            </a:pPr>
+          </a:p>
+          <a:p>
+            <a:pPr>
+              <a:defRPr sz="1600" b="1">
+                <a:solidFill>
+                  <a:srgbClr val="F7931A"/>
+                </a:solidFill>
+                <a:latin typeface="Calibri"/>
+              </a:defRPr>
+            </a:pPr>
+            <a:r>
+              <a:t>Best equation (complexity=6):</a:t>
+            </a:r>
+          </a:p>
+          <a:p>
+            <a:pPr>
+              <a:defRPr sz="1500" b="1">
+                <a:solidFill>
+                  <a:srgbClr val="2ECC71"/>
+                </a:solidFill>
+                <a:latin typeface="Calibri"/>
+              </a:defRPr>
+            </a:pPr>
+            <a:r>
+              <a:t>   log₁₀(price) = 2.174·ln(t) − 1.097  =  5.01·log₁₀(t) − 1.10</a:t>
+            </a:r>
+          </a:p>
+          <a:p>
+            <a:pPr>
+              <a:defRPr sz="400" b="0">
+                <a:solidFill>
+                  <a:srgbClr val="EEEEEE"/>
+                </a:solidFill>
+                <a:latin typeface="Calibri"/>
+              </a:defRPr>
+            </a:pPr>
+          </a:p>
+          <a:p>
+            <a:pPr>
+              <a:defRPr sz="1400" b="0">
+                <a:solidFill>
+                  <a:srgbClr val="EEEEEE"/>
+                </a:solidFill>
+                <a:latin typeface="Calibri"/>
+              </a:defRPr>
+            </a:pPr>
+            <a:r>
+              <a:t>This IS the power law — β≈5.01, discovered from scratch with zero assumptions</a:t>
+            </a:r>
+          </a:p>
+          <a:p>
+            <a:pPr lvl="1">
+              <a:defRPr sz="1300" b="0">
+                <a:solidFill>
+                  <a:srgbClr val="888888"/>
+                </a:solidFill>
+                <a:latin typeface="Calibri"/>
+              </a:defRPr>
+            </a:pPr>
+            <a:r>
+              <a:t>R² = 0.962 on full data (same as our fitted power law)</a:t>
+            </a:r>
+          </a:p>
+          <a:p>
+            <a:pPr>
+              <a:defRPr sz="600" b="0">
+                <a:solidFill>
+                  <a:srgbClr val="EEEEEE"/>
+                </a:solidFill>
+                <a:latin typeface="Calibri"/>
+              </a:defRPr>
+            </a:pPr>
+          </a:p>
+          <a:p>
+            <a:pPr>
+              <a:defRPr sz="1400" b="0">
+                <a:solidFill>
+                  <a:srgbClr val="EEEEEE"/>
+                </a:solidFill>
+                <a:latin typeface="Calibri"/>
+              </a:defRPr>
+            </a:pPr>
+            <a:r>
+              <a:t>Higher-complexity equations found cosine terms (complexity ≥ 15)</a:t>
+            </a:r>
+          </a:p>
+          <a:p>
+            <a:pPr lvl="1">
+              <a:defRPr sz="1300" b="0">
+                <a:solidFill>
+                  <a:srgbClr val="888888"/>
+                </a:solidFill>
+                <a:latin typeface="Calibri"/>
+              </a:defRPr>
+            </a:pPr>
+            <a:r>
+              <a:t>but with minimal improvement — confirming oscillations are secondary to the trend</a:t>
+            </a:r>
+          </a:p>
+          <a:p>
+            <a:pPr>
+              <a:defRPr sz="600" b="0">
+                <a:solidFill>
+                  <a:srgbClr val="EEEEEE"/>
+                </a:solidFill>
+                <a:latin typeface="Calibri"/>
+              </a:defRPr>
+            </a:pPr>
+          </a:p>
+          <a:p>
+            <a:pPr>
+              <a:defRPr sz="1400" b="1">
+                <a:solidFill>
+                  <a:srgbClr val="E74C3C"/>
+                </a:solidFill>
+                <a:latin typeface="Calibri"/>
+              </a:defRPr>
+            </a:pPr>
+            <a:r>
+              <a:t>Genesis date is an INPUT, not discovered — PySR cannot find log(year − 2009.56)</a:t>
+            </a:r>
+          </a:p>
+          <a:p>
+            <a:pPr lvl="1">
+              <a:defRPr sz="1300" b="0">
+                <a:solidFill>
+                  <a:srgbClr val="888888"/>
+                </a:solidFill>
+                <a:latin typeface="Calibri"/>
+              </a:defRPr>
+            </a:pPr>
+            <a:r>
+              <a:t>from raw calendar year (finds linear fit instead, R²=0.87)</a:t>
+            </a:r>
+          </a:p>
+        </p:txBody>
+      </p:sp>
     </p:spTree>
   </p:cSld>
   <p:clrMapOvr>
@@ -12124,6 +12460,14 @@
 <file path=ppt/slides/slide38.xml><?xml version="1.0" encoding="utf-8"?>
 <p:sld xmlns:a="http://schemas.openxmlformats.org/drawingml/2006/main" xmlns:p="http://schemas.openxmlformats.org/presentationml/2006/main" xmlns:r="http://schemas.openxmlformats.org/officeDocument/2006/relationships">
   <p:cSld>
+    <p:bg>
+      <p:bgPr>
+        <a:solidFill>
+          <a:srgbClr val="1A1A2E"/>
+        </a:solidFill>
+        <a:effectLst/>
+      </p:bgPr>
+    </p:bg>
     <p:spTree>
       <p:nvGrpSpPr>
         <p:cNvPr id="1" name=""/>
@@ -12131,6 +12475,330 @@
         <p:nvPr/>
       </p:nvGrpSpPr>
       <p:grpSpPr/>
+      <p:sp>
+        <p:nvSpPr>
+          <p:cNvPr id="2" name="Rectangle 1"/>
+          <p:cNvSpPr/>
+          <p:nvPr/>
+        </p:nvSpPr>
+        <p:spPr>
+          <a:xfrm>
+            <a:off x="0" y="0"/>
+            <a:ext cx="12191695" cy="822960"/>
+          </a:xfrm>
+          <a:prstGeom prst="rect">
+            <a:avLst/>
+          </a:prstGeom>
+          <a:solidFill>
+            <a:srgbClr val="16213E"/>
+          </a:solidFill>
+          <a:ln>
+            <a:noFill/>
+          </a:ln>
+        </p:spPr>
+        <p:style>
+          <a:lnRef idx="1">
+            <a:schemeClr val="accent1"/>
+          </a:lnRef>
+          <a:fillRef idx="3">
+            <a:schemeClr val="accent1"/>
+          </a:fillRef>
+          <a:effectRef idx="2">
+            <a:schemeClr val="accent1"/>
+          </a:effectRef>
+          <a:fontRef idx="minor">
+            <a:schemeClr val="lt1"/>
+          </a:fontRef>
+        </p:style>
+        <p:txBody>
+          <a:bodyPr rtlCol="0" anchor="ctr"/>
+          <a:lstStyle/>
+          <a:p>
+            <a:pPr algn="ctr"/>
+          </a:p>
+        </p:txBody>
+      </p:sp>
+      <p:sp>
+        <p:nvSpPr>
+          <p:cNvPr id="3" name="TextBox 2"/>
+          <p:cNvSpPr txBox="1"/>
+          <p:nvPr/>
+        </p:nvSpPr>
+        <p:spPr>
+          <a:xfrm>
+            <a:off x="457200" y="91440"/>
+            <a:ext cx="10972800" cy="640080"/>
+          </a:xfrm>
+          <a:prstGeom prst="rect">
+            <a:avLst/>
+          </a:prstGeom>
+          <a:noFill/>
+        </p:spPr>
+        <p:txBody>
+          <a:bodyPr wrap="square">
+            <a:spAutoFit/>
+          </a:bodyPr>
+          <a:lstStyle/>
+          <a:p>
+            <a:pPr algn="l">
+              <a:defRPr sz="2800" b="1">
+                <a:solidFill>
+                  <a:srgbClr val="F7931A"/>
+                </a:solidFill>
+                <a:latin typeface="Calibri"/>
+              </a:defRPr>
+            </a:pPr>
+            <a:r>
+              <a:t>Fourier Extrapolation: 5-Year Forward Projection</a:t>
+            </a:r>
+          </a:p>
+        </p:txBody>
+      </p:sp>
+      <p:sp>
+        <p:nvSpPr>
+          <p:cNvPr id="4" name="TextBox 3"/>
+          <p:cNvSpPr txBox="1"/>
+          <p:nvPr/>
+        </p:nvSpPr>
+        <p:spPr>
+          <a:xfrm>
+            <a:off x="274320" y="1005840"/>
+            <a:ext cx="11430000" cy="5486400"/>
+          </a:xfrm>
+          <a:prstGeom prst="rect">
+            <a:avLst/>
+          </a:prstGeom>
+          <a:noFill/>
+        </p:spPr>
+        <p:txBody>
+          <a:bodyPr wrap="square">
+            <a:spAutoFit/>
+          </a:bodyPr>
+          <a:lstStyle/>
+          <a:p>
+            <a:pPr algn="l">
+              <a:defRPr sz="1400" b="0">
+                <a:solidFill>
+                  <a:srgbClr val="EEEEEE"/>
+                </a:solidFill>
+                <a:latin typeface="Calibri"/>
+              </a:defRPr>
+            </a:pPr>
+          </a:p>
+          <a:p>
+            <a:pPr>
+              <a:defRPr sz="1600" b="0">
+                <a:solidFill>
+                  <a:srgbClr val="EEEEEE"/>
+                </a:solidFill>
+                <a:latin typeface="Calibri"/>
+              </a:defRPr>
+            </a:pPr>
+            <a:r>
+              <a:t>Remove power law trend, FFT the residuals, keep top 20 modes, project forward</a:t>
+            </a:r>
+          </a:p>
+          <a:p>
+            <a:pPr lvl="1">
+              <a:defRPr sz="1300" b="0">
+                <a:solidFill>
+                  <a:srgbClr val="888888"/>
+                </a:solidFill>
+                <a:latin typeface="Calibri"/>
+              </a:defRPr>
+            </a:pPr>
+            <a:r>
+              <a:t>R² = 0.923 on historical residuals (20 modes)</a:t>
+            </a:r>
+          </a:p>
+          <a:p>
+            <a:pPr>
+              <a:defRPr sz="600" b="0">
+                <a:solidFill>
+                  <a:srgbClr val="EEEEEE"/>
+                </a:solidFill>
+                <a:latin typeface="Calibri"/>
+              </a:defRPr>
+            </a:pPr>
+          </a:p>
+          <a:p>
+            <a:pPr>
+              <a:defRPr sz="1600" b="1">
+                <a:solidFill>
+                  <a:srgbClr val="F7931A"/>
+                </a:solidFill>
+                <a:latin typeface="Calibri"/>
+              </a:defRPr>
+            </a:pPr>
+            <a:r>
+              <a:t>Projected prices (power law + Fourier residuals):</a:t>
+            </a:r>
+          </a:p>
+          <a:p>
+            <a:pPr>
+              <a:defRPr sz="400" b="0">
+                <a:solidFill>
+                  <a:srgbClr val="EEEEEE"/>
+                </a:solidFill>
+                <a:latin typeface="Calibri"/>
+              </a:defRPr>
+            </a:pPr>
+          </a:p>
+          <a:p>
+            <a:pPr>
+              <a:defRPr sz="1400" b="1">
+                <a:solidFill>
+                  <a:srgbClr val="5DADE2"/>
+                </a:solidFill>
+                <a:latin typeface="Calibri"/>
+              </a:defRPr>
+            </a:pPr>
+            <a:r>
+              <a:t>Year        Price      Interpretation</a:t>
+            </a:r>
+          </a:p>
+          <a:p>
+            <a:pPr>
+              <a:defRPr sz="1200" b="0">
+                <a:solidFill>
+                  <a:srgbClr val="888888"/>
+                </a:solidFill>
+                <a:latin typeface="Calibri"/>
+              </a:defRPr>
+            </a:pPr>
+            <a:r>
+              <a:t>─────────────────────────────────────────</a:t>
+            </a:r>
+          </a:p>
+          <a:p>
+            <a:pPr>
+              <a:defRPr sz="1400" b="0">
+                <a:solidFill>
+                  <a:srgbClr val="EEEEEE"/>
+                </a:solidFill>
+                <a:latin typeface="Calibri"/>
+              </a:defRPr>
+            </a:pPr>
+            <a:r>
+              <a:t>2027-04    $724,114    Cycle peak?</a:t>
+            </a:r>
+          </a:p>
+          <a:p>
+            <a:pPr>
+              <a:defRPr sz="1400" b="0">
+                <a:solidFill>
+                  <a:srgbClr val="EEEEEE"/>
+                </a:solidFill>
+                <a:latin typeface="Calibri"/>
+              </a:defRPr>
+            </a:pPr>
+            <a:r>
+              <a:t>2028-03     $85,292    Post-peak crash</a:t>
+            </a:r>
+          </a:p>
+          <a:p>
+            <a:pPr>
+              <a:defRPr sz="1400" b="0">
+                <a:solidFill>
+                  <a:srgbClr val="EEEEEE"/>
+                </a:solidFill>
+                <a:latin typeface="Calibri"/>
+              </a:defRPr>
+            </a:pPr>
+            <a:r>
+              <a:t>2029-03    $294,282    Recovery</a:t>
+            </a:r>
+          </a:p>
+          <a:p>
+            <a:pPr>
+              <a:defRPr sz="1400" b="0">
+                <a:solidFill>
+                  <a:srgbClr val="EEEEEE"/>
+                </a:solidFill>
+                <a:latin typeface="Calibri"/>
+              </a:defRPr>
+            </a:pPr>
+            <a:r>
+              <a:t>2030-03    $676,513    Next peak?</a:t>
+            </a:r>
+          </a:p>
+          <a:p>
+            <a:pPr>
+              <a:defRPr sz="1400" b="0">
+                <a:solidFill>
+                  <a:srgbClr val="EEEEEE"/>
+                </a:solidFill>
+                <a:latin typeface="Calibri"/>
+              </a:defRPr>
+            </a:pPr>
+            <a:r>
+              <a:t>2031-03    $157,485    Next crash</a:t>
+            </a:r>
+          </a:p>
+          <a:p>
+            <a:pPr>
+              <a:defRPr sz="800" b="0">
+                <a:solidFill>
+                  <a:srgbClr val="EEEEEE"/>
+                </a:solidFill>
+                <a:latin typeface="Calibri"/>
+              </a:defRPr>
+            </a:pPr>
+          </a:p>
+          <a:p>
+            <a:pPr>
+              <a:defRPr sz="1600" b="1">
+                <a:solidFill>
+                  <a:srgbClr val="E74C3C"/>
+                </a:solidFill>
+                <a:latin typeface="Calibri"/>
+              </a:defRPr>
+            </a:pPr>
+            <a:r>
+              <a:t>⚠ Caveat: Fourier extrapolation has NO damping</a:t>
+            </a:r>
+          </a:p>
+          <a:p>
+            <a:pPr lvl="1">
+              <a:defRPr sz="1300" b="0">
+                <a:solidFill>
+                  <a:srgbClr val="888888"/>
+                </a:solidFill>
+                <a:latin typeface="Calibri"/>
+              </a:defRPr>
+            </a:pPr>
+            <a:r>
+              <a:t>Projects historical oscillation amplitudes unchanged into the future</a:t>
+            </a:r>
+          </a:p>
+          <a:p>
+            <a:pPr lvl="1">
+              <a:defRPr sz="1300" b="0">
+                <a:solidFill>
+                  <a:srgbClr val="888888"/>
+                </a:solidFill>
+                <a:latin typeface="Calibri"/>
+              </a:defRPr>
+            </a:pPr>
+            <a:r>
+              <a:t>Real cycles are fading (entropy/damping) — these projections are too volatile</a:t>
+            </a:r>
+          </a:p>
+          <a:p>
+            <a:pPr lvl="1">
+              <a:defRPr sz="1300" b="0">
+                <a:solidFill>
+                  <a:srgbClr val="888888"/>
+                </a:solidFill>
+                <a:latin typeface="Calibri"/>
+              </a:defRPr>
+            </a:pPr>
+            <a:r>
+              <a:t>Useful for showing cyclical structure, NOT for reliable price targets</a:t>
+            </a:r>
+          </a:p>
+        </p:txBody>
+      </p:sp>
     </p:spTree>
   </p:cSld>
   <p:clrMapOvr>
@@ -12519,6 +13187,42 @@
 </file>
 
 <file path=ppt/slides/slide40.xml><?xml version="1.0" encoding="utf-8"?>
+<p:sld xmlns:a="http://schemas.openxmlformats.org/drawingml/2006/main" xmlns:p="http://schemas.openxmlformats.org/presentationml/2006/main" xmlns:r="http://schemas.openxmlformats.org/officeDocument/2006/relationships">
+  <p:cSld>
+    <p:spTree>
+      <p:nvGrpSpPr>
+        <p:cNvPr id="1" name=""/>
+        <p:cNvGrpSpPr/>
+        <p:nvPr/>
+      </p:nvGrpSpPr>
+      <p:grpSpPr/>
+    </p:spTree>
+  </p:cSld>
+  <p:clrMapOvr>
+    <a:masterClrMapping/>
+  </p:clrMapOvr>
+</p:sld>
+</file>
+
+<file path=ppt/slides/slide41.xml><?xml version="1.0" encoding="utf-8"?>
+<p:sld xmlns:a="http://schemas.openxmlformats.org/drawingml/2006/main" xmlns:p="http://schemas.openxmlformats.org/presentationml/2006/main" xmlns:r="http://schemas.openxmlformats.org/officeDocument/2006/relationships">
+  <p:cSld>
+    <p:spTree>
+      <p:nvGrpSpPr>
+        <p:cNvPr id="1" name=""/>
+        <p:cNvGrpSpPr/>
+        <p:nvPr/>
+      </p:nvGrpSpPr>
+      <p:grpSpPr/>
+    </p:spTree>
+  </p:cSld>
+  <p:clrMapOvr>
+    <a:masterClrMapping/>
+  </p:clrMapOvr>
+</p:sld>
+</file>
+
+<file path=ppt/slides/slide42.xml><?xml version="1.0" encoding="utf-8"?>
 <p:sld xmlns:a="http://schemas.openxmlformats.org/drawingml/2006/main" xmlns:p="http://schemas.openxmlformats.org/presentationml/2006/main" xmlns:r="http://schemas.openxmlformats.org/officeDocument/2006/relationships">
   <p:cSld>
     <p:spTree>

--- a/bitcoin_decomposition.pptx
+++ b/bitcoin_decomposition.pptx
@@ -17,6 +17,7 @@
     <p:sldId id="276" r:id="rId27"/>
     <p:sldId id="296" r:id="rId47"/>
     <p:sldId id="297" r:id="rId48"/>
+    <p:sldId id="298" r:id="rId49"/>
     <p:sldId id="277" r:id="rId28"/>
     <p:sldId id="278" r:id="rId29"/>
     <p:sldId id="275" r:id="rId26"/>
@@ -3396,7 +3397,7 @@
               </a:defRPr>
             </a:pPr>
             <a:r>
-              <a:t>Eight Independent Lines of Evidence → July 2009</a:t>
+              <a:t>Nine Independent Lines of Evidence → July 2009</a:t>
             </a:r>
           </a:p>
         </p:txBody>
@@ -3673,7 +3674,7 @@
               </a:defRPr>
             </a:pPr>
             <a:r>
-              <a:t>All eight methods converge on June-August 2009 — no economic transactions at this time</a:t>
+              <a:t>All nine methods converge on June-August 2009 — no economic transactions at this time</a:t>
             </a:r>
           </a:p>
         </p:txBody>
@@ -13240,6 +13241,407 @@
 </p:sld>
 </file>
 
+<file path=ppt/slides/slide43.xml><?xml version="1.0" encoding="utf-8"?>
+<p:sld xmlns:a="http://schemas.openxmlformats.org/drawingml/2006/main" xmlns:p="http://schemas.openxmlformats.org/presentationml/2006/main" xmlns:r="http://schemas.openxmlformats.org/officeDocument/2006/relationships">
+  <p:cSld>
+    <p:spTree>
+      <p:nvGrpSpPr>
+        <p:cNvPr id="1" name=""/>
+        <p:cNvGrpSpPr/>
+        <p:nvPr/>
+      </p:nvGrpSpPr>
+      <p:grpSpPr/>
+      <p:sp>
+        <p:nvSpPr>
+          <p:cNvPr id="2" name="HeaderRect"/>
+          <p:cNvSpPr/>
+          <p:nvPr/>
+        </p:nvSpPr>
+        <p:spPr>
+          <a:xfrm>
+            <a:off x="0" y="0"/>
+            <a:ext cx="12191695" cy="822960"/>
+          </a:xfrm>
+          <a:prstGeom prst="rect">
+            <a:avLst/>
+          </a:prstGeom>
+          <a:solidFill>
+            <a:srgbClr val="16213E"/>
+          </a:solidFill>
+          <a:ln>
+            <a:noFill/>
+          </a:ln>
+        </p:spPr>
+        <p:style>
+          <a:lnRef idx="1">
+            <a:schemeClr val="accent1"/>
+          </a:lnRef>
+          <a:fillRef idx="3">
+            <a:schemeClr val="accent1"/>
+          </a:fillRef>
+          <a:effectRef idx="2">
+            <a:schemeClr val="accent1"/>
+          </a:effectRef>
+          <a:fontRef idx="minor">
+            <a:schemeClr val="lt1"/>
+          </a:fontRef>
+        </p:style>
+        <p:txBody>
+          <a:bodyPr rtlCol="0" anchor="ctr"/>
+          <a:lstStyle/>
+          <a:p>
+            <a:pPr algn="ctr"/>
+          </a:p>
+        </p:txBody>
+      </p:sp>
+      <p:sp>
+        <p:nvSpPr>
+          <p:cNvPr id="3" name="TextBox 2"/>
+          <p:cNvSpPr txBox="1"/>
+          <p:nvPr/>
+        </p:nvSpPr>
+        <p:spPr>
+          <a:xfrm>
+            <a:off x="457200" y="91440"/>
+            <a:ext cx="10972800" cy="640080"/>
+          </a:xfrm>
+          <a:prstGeom prst="rect">
+            <a:avLst/>
+          </a:prstGeom>
+          <a:noFill/>
+        </p:spPr>
+        <p:txBody>
+          <a:bodyPr wrap="square">
+            <a:spAutoFit/>
+          </a:bodyPr>
+          <a:lstStyle/>
+          <a:p>
+            <a:r>
+              <a:rPr sz="2800" b="1">
+                <a:solidFill>
+                  <a:srgbClr val="FFFFFF"/>
+                </a:solidFill>
+              </a:rPr>
+              <a:t>Ninth Test: BM Floor-Subset Sweep (Bubbles Excluded)</a:t>
+            </a:r>
+          </a:p>
+        </p:txBody>
+      </p:sp>
+      <p:pic>
+        <p:nvPicPr>
+          <p:cNvPr id="4" name="Picture 3" descr="sweep_t0_floor.jpg"/>
+          <p:cNvPicPr>
+            <a:picLocks noChangeAspect="1"/>
+          </p:cNvPicPr>
+          <p:nvPr/>
+        </p:nvPicPr>
+        <p:blipFill>
+          <a:blip r:embed="rId2"/>
+          <a:stretch>
+            <a:fillRect/>
+          </a:stretch>
+        </p:blipFill>
+        <p:spPr>
+          <a:xfrm>
+            <a:off x="274320" y="914400"/>
+            <a:ext cx="5486400" cy="5669280"/>
+          </a:xfrm>
+          <a:prstGeom prst="rect">
+            <a:avLst/>
+          </a:prstGeom>
+        </p:spPr>
+      </p:pic>
+      <p:sp>
+        <p:nvSpPr>
+          <p:cNvPr id="5" name="TextBox 4"/>
+          <p:cNvSpPr txBox="1"/>
+          <p:nvPr/>
+        </p:nvSpPr>
+        <p:spPr>
+          <a:xfrm>
+            <a:off x="6035040" y="914400"/>
+            <a:ext cx="5943600" cy="5669280"/>
+          </a:xfrm>
+          <a:prstGeom prst="rect">
+            <a:avLst/>
+          </a:prstGeom>
+          <a:noFill/>
+        </p:spPr>
+        <p:txBody>
+          <a:bodyPr wrap="square">
+            <a:spAutoFit/>
+          </a:bodyPr>
+          <a:lstStyle/>
+          <a:p>
+            <a:r>
+              <a:rPr sz="1300" b="1">
+                <a:solidFill>
+                  <a:srgbClr val="1E1E1E"/>
+                </a:solidFill>
+              </a:rPr>
+              <a:t>Methodology — price floor only, bubbles excluded by construction:</a:t>
+            </a:r>
+          </a:p>
+          <a:p>
+            <a:r>
+              <a:rPr sz="1300">
+                <a:solidFill>
+                  <a:srgbClr val="1E1E1E"/>
+                </a:solidFill>
+              </a:rPr>
+              <a:t>  1. OLS fit on all data (t &gt; 1 yr).</a:t>
+            </a:r>
+          </a:p>
+          <a:p>
+            <a:r>
+              <a:rPr sz="1300">
+                <a:solidFill>
+                  <a:srgbClr val="1E1E1E"/>
+                </a:solidFill>
+              </a:rPr>
+              <a:t>  2. Keep bottom 20% of OLS residuals → support subset.</a:t>
+            </a:r>
+          </a:p>
+          <a:p>
+            <a:r>
+              <a:rPr sz="1300">
+                <a:solidFill>
+                  <a:srgbClr val="1E1E1E"/>
+                </a:solidFill>
+              </a:rPr>
+              <a:t>  3. QuantReg q=0.5 on the support subset → floor line.</a:t>
+            </a:r>
+          </a:p>
+          <a:p>
+            <a:r>
+              <a:rPr sz="1300">
+                <a:solidFill>
+                  <a:srgbClr val="1E1E1E"/>
+                </a:solidFill>
+              </a:rPr>
+              <a:t>  4. R² and σ computed against floor subset only.</a:t>
+            </a:r>
+          </a:p>
+          <a:p>
+            <a:r>
+              <a:rPr sz="1300">
+                <a:solidFill>
+                  <a:srgbClr val="1E1E1E"/>
+                </a:solidFill>
+              </a:rPr>
+              <a:t/>
+            </a:r>
+          </a:p>
+          <a:p>
+            <a:r>
+              <a:rPr sz="1300" b="1">
+                <a:solidFill>
+                  <a:srgbClr val="1E1E1E"/>
+                </a:solidFill>
+              </a:rPr>
+              <a:t>Findings at the canonical t₀ = 2009-07-25:</a:t>
+            </a:r>
+          </a:p>
+          <a:p>
+            <a:r>
+              <a:rPr sz="1300">
+                <a:solidFill>
+                  <a:srgbClr val="1E1E1E"/>
+                </a:solidFill>
+              </a:rPr>
+              <a:t>  • β_floor = 5.11 (matches all-data OLS β = 5.10)</a:t>
+            </a:r>
+          </a:p>
+          <a:p>
+            <a:r>
+              <a:rPr sz="1300">
+                <a:solidFill>
+                  <a:srgbClr val="1E1E1E"/>
+                </a:solidFill>
+              </a:rPr>
+              <a:t>  • σ_floor = 0.042 (vs σ_all-data = 0.30 — 7× smaller)</a:t>
+            </a:r>
+          </a:p>
+          <a:p>
+            <a:r>
+              <a:rPr sz="1300">
+                <a:solidFill>
+                  <a:srgbClr val="1E1E1E"/>
+                </a:solidFill>
+              </a:rPr>
+              <a:t>  • R²_floor = 0.995</a:t>
+            </a:r>
+          </a:p>
+          <a:p>
+            <a:r>
+              <a:rPr sz="1300">
+                <a:solidFill>
+                  <a:srgbClr val="1E1E1E"/>
+                </a:solidFill>
+              </a:rPr>
+              <a:t/>
+            </a:r>
+          </a:p>
+          <a:p>
+            <a:r>
+              <a:rPr sz="1300" b="1">
+                <a:solidFill>
+                  <a:srgbClr val="1E1E1E"/>
+                </a:solidFill>
+              </a:rPr>
+              <a:t>Optimum on this test:</a:t>
+            </a:r>
+          </a:p>
+          <a:p>
+            <a:r>
+              <a:rPr sz="1300">
+                <a:solidFill>
+                  <a:srgbClr val="1E1E1E"/>
+                </a:solidFill>
+              </a:rPr>
+              <a:t>  • Argmax R²_floor: 2009-03-02  (−145 days, ~5 months earlier)</a:t>
+            </a:r>
+          </a:p>
+          <a:p>
+            <a:r>
+              <a:rPr sz="1300">
+                <a:solidFill>
+                  <a:srgbClr val="1E1E1E"/>
+                </a:solidFill>
+              </a:rPr>
+              <a:t>  • R²_floor at optimum: 0.9953   (canonical: 0.9949)</a:t>
+            </a:r>
+          </a:p>
+          <a:p>
+            <a:r>
+              <a:rPr sz="1300">
+                <a:solidFill>
+                  <a:srgbClr val="1E1E1E"/>
+                </a:solidFill>
+              </a:rPr>
+              <a:t/>
+            </a:r>
+          </a:p>
+          <a:p>
+            <a:r>
+              <a:rPr sz="1300" b="1">
+                <a:solidFill>
+                  <a:srgbClr val="1E1E1E"/>
+                </a:solidFill>
+              </a:rPr>
+              <a:t>Note on σ_floor argmin (2014-01-27, confounded):</a:t>
+            </a:r>
+          </a:p>
+          <a:p>
+            <a:r>
+              <a:rPr sz="1300">
+                <a:solidFill>
+                  <a:srgbClr val="1E1E1E"/>
+                </a:solidFill>
+              </a:rPr>
+              <a:t>  • σ mechanically shrinks as the floor subset thins.</a:t>
+            </a:r>
+          </a:p>
+          <a:p>
+            <a:r>
+              <a:rPr sz="1300">
+                <a:solidFill>
+                  <a:srgbClr val="1E1E1E"/>
+                </a:solidFill>
+              </a:rPr>
+              <a:t>  • Don't trust the late-t₀ σ_floor minimum — it's an</a:t>
+            </a:r>
+          </a:p>
+          <a:p>
+            <a:r>
+              <a:rPr sz="1300">
+                <a:solidFill>
+                  <a:srgbClr val="1E1E1E"/>
+                </a:solidFill>
+              </a:rPr>
+              <a:t>    artifact of subset-size shrinkage, not a better fit.</a:t>
+            </a:r>
+          </a:p>
+          <a:p>
+            <a:r>
+              <a:rPr sz="1300">
+                <a:solidFill>
+                  <a:srgbClr val="1E1E1E"/>
+                </a:solidFill>
+              </a:rPr>
+              <a:t>  • R²_floor is the robust metric.</a:t>
+            </a:r>
+          </a:p>
+          <a:p>
+            <a:r>
+              <a:rPr sz="1300">
+                <a:solidFill>
+                  <a:srgbClr val="1E1E1E"/>
+                </a:solidFill>
+              </a:rPr>
+              <a:t/>
+            </a:r>
+          </a:p>
+          <a:p>
+            <a:r>
+              <a:rPr sz="1300" b="1">
+                <a:solidFill>
+                  <a:srgbClr val="1E1E1E"/>
+                </a:solidFill>
+              </a:rPr>
+              <a:t>Convergence across three independent tests:</a:t>
+            </a:r>
+          </a:p>
+          <a:p>
+            <a:r>
+              <a:rPr sz="1300">
+                <a:solidFill>
+                  <a:srgbClr val="1E1E1E"/>
+                </a:solidFill>
+              </a:rPr>
+              <a:t>  • OOS 2015 holdout     → +107 days (after canonical)</a:t>
+            </a:r>
+          </a:p>
+          <a:p>
+            <a:r>
+              <a:rPr sz="1300">
+                <a:solidFill>
+                  <a:srgbClr val="1E1E1E"/>
+                </a:solidFill>
+              </a:rPr>
+              <a:t>  • OOS 2016-12 holdout  → −124 days</a:t>
+            </a:r>
+          </a:p>
+          <a:p>
+            <a:r>
+              <a:rPr sz="1300">
+                <a:solidFill>
+                  <a:srgbClr val="1E1E1E"/>
+                </a:solidFill>
+              </a:rPr>
+              <a:t>  • Floor R²_floor argmax → −145 days</a:t>
+            </a:r>
+          </a:p>
+          <a:p>
+            <a:r>
+              <a:rPr sz="1300">
+                <a:solidFill>
+                  <a:srgbClr val="1E1E1E"/>
+                </a:solidFill>
+              </a:rPr>
+              <a:t>  All three inside a ±5-month envelope; canonical is the midpoint.</a:t>
+            </a:r>
+          </a:p>
+        </p:txBody>
+      </p:sp>
+    </p:spTree>
+  </p:cSld>
+  <p:clrMapOvr>
+    <a:masterClrMapping/>
+  </p:clrMapOvr>
+</p:sld>
+</file>
+
 <file path=ppt/slides/slide5.xml><?xml version="1.0" encoding="utf-8"?>
 <p:sld xmlns:a="http://schemas.openxmlformats.org/drawingml/2006/main" xmlns:p="http://schemas.openxmlformats.org/presentationml/2006/main" xmlns:r="http://schemas.openxmlformats.org/officeDocument/2006/relationships">
   <p:cSld>
